--- a/3M_사내_클럽_비용_정산_시스템_사용_설명회.pptx
+++ b/3M_사내_클럽_비용_정산_시스템_사용_설명회.pptx
@@ -1,6 +1,6 @@
 
 <file path=ppt/presentation.xml><?xml version="1.0" encoding="utf-8"?>
-<p:presentation xmlns:a="http://schemas.openxmlformats.org/drawingml/2006/main" xmlns:r="http://schemas.openxmlformats.org/officeDocument/2006/relationships" xmlns:p="http://schemas.openxmlformats.org/presentationml/2006/main" saveSubsetFonts="1" autoCompressPictures="0">
+<p:presentation xmlns:a="http://schemas.openxmlformats.org/drawingml/2006/main" xmlns:r="http://schemas.openxmlformats.org/officeDocument/2006/relationships" xmlns:p="http://schemas.openxmlformats.org/presentationml/2006/main" saveSubsetFonts="1">
   <p:sldMasterIdLst>
     <p:sldMasterId id="2147483648" r:id="rId1"/>
   </p:sldMasterIdLst>
@@ -18,9 +18,6 @@
     <p:sldId id="266" r:id="rId12"/>
     <p:sldId id="267" r:id="rId13"/>
   </p:sldIdLst>
-  <p:notesMasterIdLst>
-    <p:notesMasterId r:id="rId14"/>
-  </p:notesMasterIdLst>
   <p:sldSz cx="9144000" cy="5143500"/>
   <p:notesSz cx="5143500" cy="9144000"/>
   <p:defaultTextStyle>
@@ -118,1413 +115,8 @@
 </p:presentation>
 </file>
 
-<file path=ppt/notesMasters/notesMaster1.xml><?xml version="1.0" encoding="utf-8"?>
-<p:notesMaster xmlns:a="http://schemas.openxmlformats.org/drawingml/2006/main" xmlns:r="http://schemas.openxmlformats.org/officeDocument/2006/relationships" xmlns:p="http://schemas.openxmlformats.org/presentationml/2006/main">
-  <p:cSld>
-    <p:bg>
-      <p:bgRef idx="1001">
-        <a:schemeClr val="bg1"/>
-      </p:bgRef>
-    </p:bg>
-    <p:spTree>
-      <p:nvGrpSpPr>
-        <p:cNvPr id="1" name=""/>
-        <p:cNvGrpSpPr/>
-        <p:nvPr/>
-      </p:nvGrpSpPr>
-      <p:grpSpPr>
-        <a:xfrm>
-          <a:off x="0" y="0"/>
-          <a:ext cx="0" cy="0"/>
-          <a:chOff x="0" y="0"/>
-          <a:chExt cx="0" cy="0"/>
-        </a:xfrm>
-      </p:grpSpPr>
-      <p:sp>
-        <p:nvSpPr>
-          <p:cNvPr id="2" name="Header Placeholder 1"/>
-          <p:cNvSpPr>
-            <a:spLocks noGrp="1"/>
-          </p:cNvSpPr>
-          <p:nvPr>
-            <p:ph type="hdr" sz="quarter"/>
-          </p:nvPr>
-        </p:nvSpPr>
-        <p:spPr>
-          <a:xfrm>
-            <a:off x="0" y="0"/>
-            <a:ext cx="2971800" cy="458788"/>
-          </a:xfrm>
-          <a:prstGeom prst="rect">
-            <a:avLst/>
-          </a:prstGeom>
-        </p:spPr>
-        <p:txBody>
-          <a:bodyPr vert="horz" lIns="91440" tIns="45720" rIns="91440" bIns="45720" rtlCol="0"/>
-          <a:lstStyle>
-            <a:lvl1pPr algn="l">
-              <a:defRPr sz="1200"/>
-            </a:lvl1pPr>
-          </a:lstStyle>
-          <a:p>
-            <a:endParaRPr lang="en-US"/>
-          </a:p>
-        </p:txBody>
-      </p:sp>
-      <p:sp>
-        <p:nvSpPr>
-          <p:cNvPr id="3" name="Date Placeholder 2"/>
-          <p:cNvSpPr>
-            <a:spLocks noGrp="1"/>
-          </p:cNvSpPr>
-          <p:nvPr>
-            <p:ph type="dt" idx="1"/>
-          </p:nvPr>
-        </p:nvSpPr>
-        <p:spPr>
-          <a:xfrm>
-            <a:off x="3884613" y="0"/>
-            <a:ext cx="2971800" cy="458788"/>
-          </a:xfrm>
-          <a:prstGeom prst="rect">
-            <a:avLst/>
-          </a:prstGeom>
-        </p:spPr>
-        <p:txBody>
-          <a:bodyPr vert="horz" lIns="91440" tIns="45720" rIns="91440" bIns="45720" rtlCol="0"/>
-          <a:lstStyle>
-            <a:lvl1pPr algn="r">
-              <a:defRPr sz="1200"/>
-            </a:lvl1pPr>
-          </a:lstStyle>
-          <a:p>
-            <a:fld id="{5282F153-3F37-0F45-9E97-73ACFA13230C}" type="datetimeFigureOut">
-              <a:rPr lang="en-US"/>
-              <a:t>7/23/19</a:t>
-            </a:fld>
-            <a:endParaRPr lang="en-US"/>
-          </a:p>
-        </p:txBody>
-      </p:sp>
-      <p:sp>
-        <p:nvSpPr>
-          <p:cNvPr id="4" name="Slide Image Placeholder 3"/>
-          <p:cNvSpPr>
-            <a:spLocks noGrp="1" noRot="1" noChangeAspect="1"/>
-          </p:cNvSpPr>
-          <p:nvPr>
-            <p:ph type="sldImg" idx="2"/>
-          </p:nvPr>
-        </p:nvSpPr>
-        <p:spPr>
-          <a:xfrm>
-            <a:off x="685800" y="1143000"/>
-            <a:ext cx="5486400" cy="3086100"/>
-          </a:xfrm>
-          <a:prstGeom prst="rect">
-            <a:avLst/>
-          </a:prstGeom>
-          <a:noFill/>
-          <a:ln w="12700">
-            <a:solidFill>
-              <a:prstClr val="black"/>
-            </a:solidFill>
-          </a:ln>
-        </p:spPr>
-        <p:txBody>
-          <a:bodyPr vert="horz" lIns="91440" tIns="45720" rIns="91440" bIns="45720" rtlCol="0" anchor="ctr"/>
-          <a:lstStyle/>
-          <a:p>
-            <a:endParaRPr lang="en-US"/>
-          </a:p>
-        </p:txBody>
-      </p:sp>
-      <p:sp>
-        <p:nvSpPr>
-          <p:cNvPr id="5" name="Notes Placeholder 4"/>
-          <p:cNvSpPr>
-            <a:spLocks noGrp="1"/>
-          </p:cNvSpPr>
-          <p:nvPr>
-            <p:ph type="body" sz="quarter" idx="3"/>
-          </p:nvPr>
-        </p:nvSpPr>
-        <p:spPr>
-          <a:xfrm>
-            <a:off x="685800" y="4400550"/>
-            <a:ext cx="5486400" cy="3600450"/>
-          </a:xfrm>
-          <a:prstGeom prst="rect">
-            <a:avLst/>
-          </a:prstGeom>
-        </p:spPr>
-        <p:txBody>
-          <a:bodyPr vert="horz" lIns="91440" tIns="45720" rIns="91440" bIns="45720" rtlCol="0"/>
-          <a:lstStyle/>
-          <a:p>
-            <a:pPr lvl="0"/>
-            <a:r>
-              <a:rPr lang="en-US"/>
-              <a:t>Click to edit Master text styles</a:t>
-            </a:r>
-          </a:p>
-          <a:p>
-            <a:pPr lvl="1"/>
-            <a:r>
-              <a:rPr lang="en-US"/>
-              <a:t>Second level</a:t>
-            </a:r>
-          </a:p>
-          <a:p>
-            <a:pPr lvl="2"/>
-            <a:r>
-              <a:rPr lang="en-US"/>
-              <a:t>Third level</a:t>
-            </a:r>
-          </a:p>
-          <a:p>
-            <a:pPr lvl="3"/>
-            <a:r>
-              <a:rPr lang="en-US"/>
-              <a:t>Fourth level</a:t>
-            </a:r>
-          </a:p>
-          <a:p>
-            <a:pPr lvl="4"/>
-            <a:r>
-              <a:rPr lang="en-US"/>
-              <a:t>Fifth level</a:t>
-            </a:r>
-          </a:p>
-        </p:txBody>
-      </p:sp>
-      <p:sp>
-        <p:nvSpPr>
-          <p:cNvPr id="6" name="Footer Placeholder 5"/>
-          <p:cNvSpPr>
-            <a:spLocks noGrp="1"/>
-          </p:cNvSpPr>
-          <p:nvPr>
-            <p:ph type="ftr" sz="quarter" idx="4"/>
-          </p:nvPr>
-        </p:nvSpPr>
-        <p:spPr>
-          <a:xfrm>
-            <a:off x="0" y="8685213"/>
-            <a:ext cx="2971800" cy="458787"/>
-          </a:xfrm>
-          <a:prstGeom prst="rect">
-            <a:avLst/>
-          </a:prstGeom>
-        </p:spPr>
-        <p:txBody>
-          <a:bodyPr vert="horz" lIns="91440" tIns="45720" rIns="91440" bIns="45720" rtlCol="0" anchor="b"/>
-          <a:lstStyle>
-            <a:lvl1pPr algn="l">
-              <a:defRPr sz="1200"/>
-            </a:lvl1pPr>
-          </a:lstStyle>
-          <a:p>
-            <a:endParaRPr lang="en-US"/>
-          </a:p>
-        </p:txBody>
-      </p:sp>
-      <p:sp>
-        <p:nvSpPr>
-          <p:cNvPr id="7" name="Slide Number Placeholder 6"/>
-          <p:cNvSpPr>
-            <a:spLocks noGrp="1"/>
-          </p:cNvSpPr>
-          <p:nvPr>
-            <p:ph type="sldNum" sz="quarter" idx="5"/>
-          </p:nvPr>
-        </p:nvSpPr>
-        <p:spPr>
-          <a:xfrm>
-            <a:off x="3884613" y="8685213"/>
-            <a:ext cx="2971800" cy="458787"/>
-          </a:xfrm>
-          <a:prstGeom prst="rect">
-            <a:avLst/>
-          </a:prstGeom>
-        </p:spPr>
-        <p:txBody>
-          <a:bodyPr vert="horz" lIns="91440" tIns="45720" rIns="91440" bIns="45720" rtlCol="0" anchor="b"/>
-          <a:lstStyle>
-            <a:lvl1pPr algn="r">
-              <a:defRPr sz="1200"/>
-            </a:lvl1pPr>
-          </a:lstStyle>
-          <a:p>
-            <a:fld id="{CE5E9CC1-C706-0F49-92D6-E571CC5EEA8F}" type="slidenum">
-              <a:rPr lang="en-US"/>
-              <a:t>‹#›</a:t>
-            </a:fld>
-            <a:endParaRPr lang="en-US"/>
-          </a:p>
-        </p:txBody>
-      </p:sp>
-    </p:spTree>
-    <p:extLst>
-      <p:ext uri="{BB962C8B-B14F-4D97-AF65-F5344CB8AC3E}">
-        <p14:creationId xmlns:p14="http://schemas.microsoft.com/office/powerpoint/2010/main" val="1024086991"/>
-      </p:ext>
-    </p:extLst>
-  </p:cSld>
-  <p:clrMap bg1="lt1" tx1="dk1" bg2="lt2" tx2="dk2" accent1="accent1" accent2="accent2" accent3="accent3" accent4="accent4" accent5="accent5" accent6="accent6" hlink="hlink" folHlink="folHlink"/>
-  <p:notesStyle>
-    <a:lvl1pPr marL="0" algn="l" defTabSz="914400" rtl="0" eaLnBrk="1" latinLnBrk="0" hangingPunct="1">
-      <a:defRPr sz="1200" kern="1200">
-        <a:solidFill>
-          <a:schemeClr val="tx1"/>
-        </a:solidFill>
-        <a:latin typeface="+mn-lt"/>
-        <a:ea typeface="+mn-ea"/>
-        <a:cs typeface="+mn-cs"/>
-      </a:defRPr>
-    </a:lvl1pPr>
-    <a:lvl2pPr marL="457200" algn="l" defTabSz="914400" rtl="0" eaLnBrk="1" latinLnBrk="0" hangingPunct="1">
-      <a:defRPr sz="1200" kern="1200">
-        <a:solidFill>
-          <a:schemeClr val="tx1"/>
-        </a:solidFill>
-        <a:latin typeface="+mn-lt"/>
-        <a:ea typeface="+mn-ea"/>
-        <a:cs typeface="+mn-cs"/>
-      </a:defRPr>
-    </a:lvl2pPr>
-    <a:lvl3pPr marL="914400" algn="l" defTabSz="914400" rtl="0" eaLnBrk="1" latinLnBrk="0" hangingPunct="1">
-      <a:defRPr sz="1200" kern="1200">
-        <a:solidFill>
-          <a:schemeClr val="tx1"/>
-        </a:solidFill>
-        <a:latin typeface="+mn-lt"/>
-        <a:ea typeface="+mn-ea"/>
-        <a:cs typeface="+mn-cs"/>
-      </a:defRPr>
-    </a:lvl3pPr>
-    <a:lvl4pPr marL="1371600" algn="l" defTabSz="914400" rtl="0" eaLnBrk="1" latinLnBrk="0" hangingPunct="1">
-      <a:defRPr sz="1200" kern="1200">
-        <a:solidFill>
-          <a:schemeClr val="tx1"/>
-        </a:solidFill>
-        <a:latin typeface="+mn-lt"/>
-        <a:ea typeface="+mn-ea"/>
-        <a:cs typeface="+mn-cs"/>
-      </a:defRPr>
-    </a:lvl4pPr>
-    <a:lvl5pPr marL="1828800" algn="l" defTabSz="914400" rtl="0" eaLnBrk="1" latinLnBrk="0" hangingPunct="1">
-      <a:defRPr sz="1200" kern="1200">
-        <a:solidFill>
-          <a:schemeClr val="tx1"/>
-        </a:solidFill>
-        <a:latin typeface="+mn-lt"/>
-        <a:ea typeface="+mn-ea"/>
-        <a:cs typeface="+mn-cs"/>
-      </a:defRPr>
-    </a:lvl5pPr>
-    <a:lvl6pPr marL="2286000" algn="l" defTabSz="914400" rtl="0" eaLnBrk="1" latinLnBrk="0" hangingPunct="1">
-      <a:defRPr sz="1200" kern="1200">
-        <a:solidFill>
-          <a:schemeClr val="tx1"/>
-        </a:solidFill>
-        <a:latin typeface="+mn-lt"/>
-        <a:ea typeface="+mn-ea"/>
-        <a:cs typeface="+mn-cs"/>
-      </a:defRPr>
-    </a:lvl6pPr>
-    <a:lvl7pPr marL="2743200" algn="l" defTabSz="914400" rtl="0" eaLnBrk="1" latinLnBrk="0" hangingPunct="1">
-      <a:defRPr sz="1200" kern="1200">
-        <a:solidFill>
-          <a:schemeClr val="tx1"/>
-        </a:solidFill>
-        <a:latin typeface="+mn-lt"/>
-        <a:ea typeface="+mn-ea"/>
-        <a:cs typeface="+mn-cs"/>
-      </a:defRPr>
-    </a:lvl7pPr>
-    <a:lvl8pPr marL="3200400" algn="l" defTabSz="914400" rtl="0" eaLnBrk="1" latinLnBrk="0" hangingPunct="1">
-      <a:defRPr sz="1200" kern="1200">
-        <a:solidFill>
-          <a:schemeClr val="tx1"/>
-        </a:solidFill>
-        <a:latin typeface="+mn-lt"/>
-        <a:ea typeface="+mn-ea"/>
-        <a:cs typeface="+mn-cs"/>
-      </a:defRPr>
-    </a:lvl8pPr>
-    <a:lvl9pPr marL="3657600" algn="l" defTabSz="914400" rtl="0" eaLnBrk="1" latinLnBrk="0" hangingPunct="1">
-      <a:defRPr sz="1200" kern="1200">
-        <a:solidFill>
-          <a:schemeClr val="tx1"/>
-        </a:solidFill>
-        <a:latin typeface="+mn-lt"/>
-        <a:ea typeface="+mn-ea"/>
-        <a:cs typeface="+mn-cs"/>
-      </a:defRPr>
-    </a:lvl9pPr>
-  </p:notesStyle>
-</p:notesMaster>
-</file>
-
-<file path=ppt/notesSlides/notesSlide1.xml><?xml version="1.0" encoding="utf-8"?>
-<p:notes xmlns:a="http://schemas.openxmlformats.org/drawingml/2006/main" xmlns:r="http://schemas.openxmlformats.org/officeDocument/2006/relationships" xmlns:p="http://schemas.openxmlformats.org/presentationml/2006/main">
-  <p:cSld>
-    <p:spTree>
-      <p:nvGrpSpPr>
-        <p:cNvPr id="1" name=""/>
-        <p:cNvGrpSpPr/>
-        <p:nvPr/>
-      </p:nvGrpSpPr>
-      <p:grpSpPr>
-        <a:xfrm>
-          <a:off x="0" y="0"/>
-          <a:ext cx="0" cy="0"/>
-          <a:chOff x="0" y="0"/>
-          <a:chExt cx="0" cy="0"/>
-        </a:xfrm>
-      </p:grpSpPr>
-      <p:sp>
-        <p:nvSpPr>
-          <p:cNvPr id="2" name="Slide Image Placeholder 1"/>
-          <p:cNvSpPr>
-            <a:spLocks noGrp="1" noRot="1" noChangeAspect="1"/>
-          </p:cNvSpPr>
-          <p:nvPr>
-            <p:ph type="sldImg"/>
-          </p:nvPr>
-        </p:nvSpPr>
-        <p:spPr/>
-      </p:sp>
-      <p:sp>
-        <p:nvSpPr>
-          <p:cNvPr id="3" name="Notes Placeholder 2"/>
-          <p:cNvSpPr>
-            <a:spLocks noGrp="1"/>
-          </p:cNvSpPr>
-          <p:nvPr>
-            <p:ph type="body" idx="1"/>
-          </p:nvPr>
-        </p:nvSpPr>
-        <p:spPr/>
-        <p:txBody>
-          <a:bodyPr/>
-          <a:lstStyle/>
-          <a:p>
-            <a:r>
-              <a:rPr lang="en-US" dirty="0"/>
-              <a:t/>
-            </a:r>
-            <a:endParaRPr lang="en-US" dirty="0"/>
-          </a:p>
-        </p:txBody>
-      </p:sp>
-      <p:sp>
-        <p:nvSpPr>
-          <p:cNvPr id="4" name="Slide Number Placeholder 3"/>
-          <p:cNvSpPr>
-            <a:spLocks noGrp="1"/>
-          </p:cNvSpPr>
-          <p:nvPr>
-            <p:ph type="sldNum" sz="quarter" idx="10"/>
-          </p:nvPr>
-        </p:nvSpPr>
-        <p:spPr/>
-        <p:txBody>
-          <a:bodyPr/>
-          <a:lstStyle/>
-          <a:p>
-            <a:fld id="{F7021451-1387-4CA6-816F-3879F97B5CBC}" type="slidenum">
-              <a:rPr lang="en-US"/>
-              <a:t>1</a:t>
-            </a:fld>
-            <a:endParaRPr lang="en-US"/>
-          </a:p>
-        </p:txBody>
-      </p:sp>
-    </p:spTree>
-    <p:extLst>
-      <p:ext uri="{BB962C8B-B14F-4D97-AF65-F5344CB8AC3E}">
-        <p14:creationId xmlns:p14="http://schemas.microsoft.com/office/powerpoint/2010/main" val="1024086991"/>
-      </p:ext>
-    </p:extLst>
-  </p:cSld>
-  <p:clrMapOvr>
-    <a:masterClrMapping/>
-  </p:clrMapOvr>
-</p:notes>
-</file>
-
-<file path=ppt/notesSlides/notesSlide10.xml><?xml version="1.0" encoding="utf-8"?>
-<p:notes xmlns:a="http://schemas.openxmlformats.org/drawingml/2006/main" xmlns:r="http://schemas.openxmlformats.org/officeDocument/2006/relationships" xmlns:p="http://schemas.openxmlformats.org/presentationml/2006/main">
-  <p:cSld>
-    <p:spTree>
-      <p:nvGrpSpPr>
-        <p:cNvPr id="1" name=""/>
-        <p:cNvGrpSpPr/>
-        <p:nvPr/>
-      </p:nvGrpSpPr>
-      <p:grpSpPr>
-        <a:xfrm>
-          <a:off x="0" y="0"/>
-          <a:ext cx="0" cy="0"/>
-          <a:chOff x="0" y="0"/>
-          <a:chExt cx="0" cy="0"/>
-        </a:xfrm>
-      </p:grpSpPr>
-      <p:sp>
-        <p:nvSpPr>
-          <p:cNvPr id="2" name="Slide Image Placeholder 1"/>
-          <p:cNvSpPr>
-            <a:spLocks noGrp="1" noRot="1" noChangeAspect="1"/>
-          </p:cNvSpPr>
-          <p:nvPr>
-            <p:ph type="sldImg"/>
-          </p:nvPr>
-        </p:nvSpPr>
-        <p:spPr/>
-      </p:sp>
-      <p:sp>
-        <p:nvSpPr>
-          <p:cNvPr id="3" name="Notes Placeholder 2"/>
-          <p:cNvSpPr>
-            <a:spLocks noGrp="1"/>
-          </p:cNvSpPr>
-          <p:nvPr>
-            <p:ph type="body" idx="1"/>
-          </p:nvPr>
-        </p:nvSpPr>
-        <p:spPr/>
-        <p:txBody>
-          <a:bodyPr/>
-          <a:lstStyle/>
-          <a:p>
-            <a:r>
-              <a:rPr lang="en-US" dirty="0"/>
-              <a:t/>
-            </a:r>
-            <a:endParaRPr lang="en-US" dirty="0"/>
-          </a:p>
-        </p:txBody>
-      </p:sp>
-      <p:sp>
-        <p:nvSpPr>
-          <p:cNvPr id="4" name="Slide Number Placeholder 3"/>
-          <p:cNvSpPr>
-            <a:spLocks noGrp="1"/>
-          </p:cNvSpPr>
-          <p:nvPr>
-            <p:ph type="sldNum" sz="quarter" idx="10"/>
-          </p:nvPr>
-        </p:nvSpPr>
-        <p:spPr/>
-        <p:txBody>
-          <a:bodyPr/>
-          <a:lstStyle/>
-          <a:p>
-            <a:fld id="{F7021451-1387-4CA6-816F-3879F97B5CBC}" type="slidenum">
-              <a:rPr lang="en-US"/>
-              <a:t>10</a:t>
-            </a:fld>
-            <a:endParaRPr lang="en-US"/>
-          </a:p>
-        </p:txBody>
-      </p:sp>
-    </p:spTree>
-    <p:extLst>
-      <p:ext uri="{BB962C8B-B14F-4D97-AF65-F5344CB8AC3E}">
-        <p14:creationId xmlns:p14="http://schemas.microsoft.com/office/powerpoint/2010/main" val="1024086991"/>
-      </p:ext>
-    </p:extLst>
-  </p:cSld>
-  <p:clrMapOvr>
-    <a:masterClrMapping/>
-  </p:clrMapOvr>
-</p:notes>
-</file>
-
-<file path=ppt/notesSlides/notesSlide11.xml><?xml version="1.0" encoding="utf-8"?>
-<p:notes xmlns:a="http://schemas.openxmlformats.org/drawingml/2006/main" xmlns:r="http://schemas.openxmlformats.org/officeDocument/2006/relationships" xmlns:p="http://schemas.openxmlformats.org/presentationml/2006/main">
-  <p:cSld>
-    <p:spTree>
-      <p:nvGrpSpPr>
-        <p:cNvPr id="1" name=""/>
-        <p:cNvGrpSpPr/>
-        <p:nvPr/>
-      </p:nvGrpSpPr>
-      <p:grpSpPr>
-        <a:xfrm>
-          <a:off x="0" y="0"/>
-          <a:ext cx="0" cy="0"/>
-          <a:chOff x="0" y="0"/>
-          <a:chExt cx="0" cy="0"/>
-        </a:xfrm>
-      </p:grpSpPr>
-      <p:sp>
-        <p:nvSpPr>
-          <p:cNvPr id="2" name="Slide Image Placeholder 1"/>
-          <p:cNvSpPr>
-            <a:spLocks noGrp="1" noRot="1" noChangeAspect="1"/>
-          </p:cNvSpPr>
-          <p:nvPr>
-            <p:ph type="sldImg"/>
-          </p:nvPr>
-        </p:nvSpPr>
-        <p:spPr/>
-      </p:sp>
-      <p:sp>
-        <p:nvSpPr>
-          <p:cNvPr id="3" name="Notes Placeholder 2"/>
-          <p:cNvSpPr>
-            <a:spLocks noGrp="1"/>
-          </p:cNvSpPr>
-          <p:nvPr>
-            <p:ph type="body" idx="1"/>
-          </p:nvPr>
-        </p:nvSpPr>
-        <p:spPr/>
-        <p:txBody>
-          <a:bodyPr/>
-          <a:lstStyle/>
-          <a:p>
-            <a:r>
-              <a:rPr lang="en-US" dirty="0"/>
-              <a:t/>
-            </a:r>
-            <a:endParaRPr lang="en-US" dirty="0"/>
-          </a:p>
-        </p:txBody>
-      </p:sp>
-      <p:sp>
-        <p:nvSpPr>
-          <p:cNvPr id="4" name="Slide Number Placeholder 3"/>
-          <p:cNvSpPr>
-            <a:spLocks noGrp="1"/>
-          </p:cNvSpPr>
-          <p:nvPr>
-            <p:ph type="sldNum" sz="quarter" idx="10"/>
-          </p:nvPr>
-        </p:nvSpPr>
-        <p:spPr/>
-        <p:txBody>
-          <a:bodyPr/>
-          <a:lstStyle/>
-          <a:p>
-            <a:fld id="{F7021451-1387-4CA6-816F-3879F97B5CBC}" type="slidenum">
-              <a:rPr lang="en-US"/>
-              <a:t>11</a:t>
-            </a:fld>
-            <a:endParaRPr lang="en-US"/>
-          </a:p>
-        </p:txBody>
-      </p:sp>
-    </p:spTree>
-    <p:extLst>
-      <p:ext uri="{BB962C8B-B14F-4D97-AF65-F5344CB8AC3E}">
-        <p14:creationId xmlns:p14="http://schemas.microsoft.com/office/powerpoint/2010/main" val="1024086991"/>
-      </p:ext>
-    </p:extLst>
-  </p:cSld>
-  <p:clrMapOvr>
-    <a:masterClrMapping/>
-  </p:clrMapOvr>
-</p:notes>
-</file>
-
-<file path=ppt/notesSlides/notesSlide12.xml><?xml version="1.0" encoding="utf-8"?>
-<p:notes xmlns:a="http://schemas.openxmlformats.org/drawingml/2006/main" xmlns:r="http://schemas.openxmlformats.org/officeDocument/2006/relationships" xmlns:p="http://schemas.openxmlformats.org/presentationml/2006/main">
-  <p:cSld>
-    <p:spTree>
-      <p:nvGrpSpPr>
-        <p:cNvPr id="1" name=""/>
-        <p:cNvGrpSpPr/>
-        <p:nvPr/>
-      </p:nvGrpSpPr>
-      <p:grpSpPr>
-        <a:xfrm>
-          <a:off x="0" y="0"/>
-          <a:ext cx="0" cy="0"/>
-          <a:chOff x="0" y="0"/>
-          <a:chExt cx="0" cy="0"/>
-        </a:xfrm>
-      </p:grpSpPr>
-      <p:sp>
-        <p:nvSpPr>
-          <p:cNvPr id="2" name="Slide Image Placeholder 1"/>
-          <p:cNvSpPr>
-            <a:spLocks noGrp="1" noRot="1" noChangeAspect="1"/>
-          </p:cNvSpPr>
-          <p:nvPr>
-            <p:ph type="sldImg"/>
-          </p:nvPr>
-        </p:nvSpPr>
-        <p:spPr/>
-      </p:sp>
-      <p:sp>
-        <p:nvSpPr>
-          <p:cNvPr id="3" name="Notes Placeholder 2"/>
-          <p:cNvSpPr>
-            <a:spLocks noGrp="1"/>
-          </p:cNvSpPr>
-          <p:nvPr>
-            <p:ph type="body" idx="1"/>
-          </p:nvPr>
-        </p:nvSpPr>
-        <p:spPr/>
-        <p:txBody>
-          <a:bodyPr/>
-          <a:lstStyle/>
-          <a:p>
-            <a:r>
-              <a:rPr lang="en-US" dirty="0"/>
-              <a:t/>
-            </a:r>
-            <a:endParaRPr lang="en-US" dirty="0"/>
-          </a:p>
-        </p:txBody>
-      </p:sp>
-      <p:sp>
-        <p:nvSpPr>
-          <p:cNvPr id="4" name="Slide Number Placeholder 3"/>
-          <p:cNvSpPr>
-            <a:spLocks noGrp="1"/>
-          </p:cNvSpPr>
-          <p:nvPr>
-            <p:ph type="sldNum" sz="quarter" idx="10"/>
-          </p:nvPr>
-        </p:nvSpPr>
-        <p:spPr/>
-        <p:txBody>
-          <a:bodyPr/>
-          <a:lstStyle/>
-          <a:p>
-            <a:fld id="{F7021451-1387-4CA6-816F-3879F97B5CBC}" type="slidenum">
-              <a:rPr lang="en-US"/>
-              <a:t>12</a:t>
-            </a:fld>
-            <a:endParaRPr lang="en-US"/>
-          </a:p>
-        </p:txBody>
-      </p:sp>
-    </p:spTree>
-    <p:extLst>
-      <p:ext uri="{BB962C8B-B14F-4D97-AF65-F5344CB8AC3E}">
-        <p14:creationId xmlns:p14="http://schemas.microsoft.com/office/powerpoint/2010/main" val="1024086991"/>
-      </p:ext>
-    </p:extLst>
-  </p:cSld>
-  <p:clrMapOvr>
-    <a:masterClrMapping/>
-  </p:clrMapOvr>
-</p:notes>
-</file>
-
-<file path=ppt/notesSlides/notesSlide2.xml><?xml version="1.0" encoding="utf-8"?>
-<p:notes xmlns:a="http://schemas.openxmlformats.org/drawingml/2006/main" xmlns:r="http://schemas.openxmlformats.org/officeDocument/2006/relationships" xmlns:p="http://schemas.openxmlformats.org/presentationml/2006/main">
-  <p:cSld>
-    <p:spTree>
-      <p:nvGrpSpPr>
-        <p:cNvPr id="1" name=""/>
-        <p:cNvGrpSpPr/>
-        <p:nvPr/>
-      </p:nvGrpSpPr>
-      <p:grpSpPr>
-        <a:xfrm>
-          <a:off x="0" y="0"/>
-          <a:ext cx="0" cy="0"/>
-          <a:chOff x="0" y="0"/>
-          <a:chExt cx="0" cy="0"/>
-        </a:xfrm>
-      </p:grpSpPr>
-      <p:sp>
-        <p:nvSpPr>
-          <p:cNvPr id="2" name="Slide Image Placeholder 1"/>
-          <p:cNvSpPr>
-            <a:spLocks noGrp="1" noRot="1" noChangeAspect="1"/>
-          </p:cNvSpPr>
-          <p:nvPr>
-            <p:ph type="sldImg"/>
-          </p:nvPr>
-        </p:nvSpPr>
-        <p:spPr/>
-      </p:sp>
-      <p:sp>
-        <p:nvSpPr>
-          <p:cNvPr id="3" name="Notes Placeholder 2"/>
-          <p:cNvSpPr>
-            <a:spLocks noGrp="1"/>
-          </p:cNvSpPr>
-          <p:nvPr>
-            <p:ph type="body" idx="1"/>
-          </p:nvPr>
-        </p:nvSpPr>
-        <p:spPr/>
-        <p:txBody>
-          <a:bodyPr/>
-          <a:lstStyle/>
-          <a:p>
-            <a:r>
-              <a:rPr lang="en-US" dirty="0"/>
-              <a:t/>
-            </a:r>
-            <a:endParaRPr lang="en-US" dirty="0"/>
-          </a:p>
-        </p:txBody>
-      </p:sp>
-      <p:sp>
-        <p:nvSpPr>
-          <p:cNvPr id="4" name="Slide Number Placeholder 3"/>
-          <p:cNvSpPr>
-            <a:spLocks noGrp="1"/>
-          </p:cNvSpPr>
-          <p:nvPr>
-            <p:ph type="sldNum" sz="quarter" idx="10"/>
-          </p:nvPr>
-        </p:nvSpPr>
-        <p:spPr/>
-        <p:txBody>
-          <a:bodyPr/>
-          <a:lstStyle/>
-          <a:p>
-            <a:fld id="{F7021451-1387-4CA6-816F-3879F97B5CBC}" type="slidenum">
-              <a:rPr lang="en-US"/>
-              <a:t>2</a:t>
-            </a:fld>
-            <a:endParaRPr lang="en-US"/>
-          </a:p>
-        </p:txBody>
-      </p:sp>
-    </p:spTree>
-    <p:extLst>
-      <p:ext uri="{BB962C8B-B14F-4D97-AF65-F5344CB8AC3E}">
-        <p14:creationId xmlns:p14="http://schemas.microsoft.com/office/powerpoint/2010/main" val="1024086991"/>
-      </p:ext>
-    </p:extLst>
-  </p:cSld>
-  <p:clrMapOvr>
-    <a:masterClrMapping/>
-  </p:clrMapOvr>
-</p:notes>
-</file>
-
-<file path=ppt/notesSlides/notesSlide3.xml><?xml version="1.0" encoding="utf-8"?>
-<p:notes xmlns:a="http://schemas.openxmlformats.org/drawingml/2006/main" xmlns:r="http://schemas.openxmlformats.org/officeDocument/2006/relationships" xmlns:p="http://schemas.openxmlformats.org/presentationml/2006/main">
-  <p:cSld>
-    <p:spTree>
-      <p:nvGrpSpPr>
-        <p:cNvPr id="1" name=""/>
-        <p:cNvGrpSpPr/>
-        <p:nvPr/>
-      </p:nvGrpSpPr>
-      <p:grpSpPr>
-        <a:xfrm>
-          <a:off x="0" y="0"/>
-          <a:ext cx="0" cy="0"/>
-          <a:chOff x="0" y="0"/>
-          <a:chExt cx="0" cy="0"/>
-        </a:xfrm>
-      </p:grpSpPr>
-      <p:sp>
-        <p:nvSpPr>
-          <p:cNvPr id="2" name="Slide Image Placeholder 1"/>
-          <p:cNvSpPr>
-            <a:spLocks noGrp="1" noRot="1" noChangeAspect="1"/>
-          </p:cNvSpPr>
-          <p:nvPr>
-            <p:ph type="sldImg"/>
-          </p:nvPr>
-        </p:nvSpPr>
-        <p:spPr/>
-      </p:sp>
-      <p:sp>
-        <p:nvSpPr>
-          <p:cNvPr id="3" name="Notes Placeholder 2"/>
-          <p:cNvSpPr>
-            <a:spLocks noGrp="1"/>
-          </p:cNvSpPr>
-          <p:nvPr>
-            <p:ph type="body" idx="1"/>
-          </p:nvPr>
-        </p:nvSpPr>
-        <p:spPr/>
-        <p:txBody>
-          <a:bodyPr/>
-          <a:lstStyle/>
-          <a:p>
-            <a:r>
-              <a:rPr lang="en-US" dirty="0"/>
-              <a:t/>
-            </a:r>
-            <a:endParaRPr lang="en-US" dirty="0"/>
-          </a:p>
-        </p:txBody>
-      </p:sp>
-      <p:sp>
-        <p:nvSpPr>
-          <p:cNvPr id="4" name="Slide Number Placeholder 3"/>
-          <p:cNvSpPr>
-            <a:spLocks noGrp="1"/>
-          </p:cNvSpPr>
-          <p:nvPr>
-            <p:ph type="sldNum" sz="quarter" idx="10"/>
-          </p:nvPr>
-        </p:nvSpPr>
-        <p:spPr/>
-        <p:txBody>
-          <a:bodyPr/>
-          <a:lstStyle/>
-          <a:p>
-            <a:fld id="{F7021451-1387-4CA6-816F-3879F97B5CBC}" type="slidenum">
-              <a:rPr lang="en-US"/>
-              <a:t>3</a:t>
-            </a:fld>
-            <a:endParaRPr lang="en-US"/>
-          </a:p>
-        </p:txBody>
-      </p:sp>
-    </p:spTree>
-    <p:extLst>
-      <p:ext uri="{BB962C8B-B14F-4D97-AF65-F5344CB8AC3E}">
-        <p14:creationId xmlns:p14="http://schemas.microsoft.com/office/powerpoint/2010/main" val="1024086991"/>
-      </p:ext>
-    </p:extLst>
-  </p:cSld>
-  <p:clrMapOvr>
-    <a:masterClrMapping/>
-  </p:clrMapOvr>
-</p:notes>
-</file>
-
-<file path=ppt/notesSlides/notesSlide4.xml><?xml version="1.0" encoding="utf-8"?>
-<p:notes xmlns:a="http://schemas.openxmlformats.org/drawingml/2006/main" xmlns:r="http://schemas.openxmlformats.org/officeDocument/2006/relationships" xmlns:p="http://schemas.openxmlformats.org/presentationml/2006/main">
-  <p:cSld>
-    <p:spTree>
-      <p:nvGrpSpPr>
-        <p:cNvPr id="1" name=""/>
-        <p:cNvGrpSpPr/>
-        <p:nvPr/>
-      </p:nvGrpSpPr>
-      <p:grpSpPr>
-        <a:xfrm>
-          <a:off x="0" y="0"/>
-          <a:ext cx="0" cy="0"/>
-          <a:chOff x="0" y="0"/>
-          <a:chExt cx="0" cy="0"/>
-        </a:xfrm>
-      </p:grpSpPr>
-      <p:sp>
-        <p:nvSpPr>
-          <p:cNvPr id="2" name="Slide Image Placeholder 1"/>
-          <p:cNvSpPr>
-            <a:spLocks noGrp="1" noRot="1" noChangeAspect="1"/>
-          </p:cNvSpPr>
-          <p:nvPr>
-            <p:ph type="sldImg"/>
-          </p:nvPr>
-        </p:nvSpPr>
-        <p:spPr/>
-      </p:sp>
-      <p:sp>
-        <p:nvSpPr>
-          <p:cNvPr id="3" name="Notes Placeholder 2"/>
-          <p:cNvSpPr>
-            <a:spLocks noGrp="1"/>
-          </p:cNvSpPr>
-          <p:nvPr>
-            <p:ph type="body" idx="1"/>
-          </p:nvPr>
-        </p:nvSpPr>
-        <p:spPr/>
-        <p:txBody>
-          <a:bodyPr/>
-          <a:lstStyle/>
-          <a:p>
-            <a:r>
-              <a:rPr lang="en-US" dirty="0"/>
-              <a:t/>
-            </a:r>
-            <a:endParaRPr lang="en-US" dirty="0"/>
-          </a:p>
-        </p:txBody>
-      </p:sp>
-      <p:sp>
-        <p:nvSpPr>
-          <p:cNvPr id="4" name="Slide Number Placeholder 3"/>
-          <p:cNvSpPr>
-            <a:spLocks noGrp="1"/>
-          </p:cNvSpPr>
-          <p:nvPr>
-            <p:ph type="sldNum" sz="quarter" idx="10"/>
-          </p:nvPr>
-        </p:nvSpPr>
-        <p:spPr/>
-        <p:txBody>
-          <a:bodyPr/>
-          <a:lstStyle/>
-          <a:p>
-            <a:fld id="{F7021451-1387-4CA6-816F-3879F97B5CBC}" type="slidenum">
-              <a:rPr lang="en-US"/>
-              <a:t>4</a:t>
-            </a:fld>
-            <a:endParaRPr lang="en-US"/>
-          </a:p>
-        </p:txBody>
-      </p:sp>
-    </p:spTree>
-    <p:extLst>
-      <p:ext uri="{BB962C8B-B14F-4D97-AF65-F5344CB8AC3E}">
-        <p14:creationId xmlns:p14="http://schemas.microsoft.com/office/powerpoint/2010/main" val="1024086991"/>
-      </p:ext>
-    </p:extLst>
-  </p:cSld>
-  <p:clrMapOvr>
-    <a:masterClrMapping/>
-  </p:clrMapOvr>
-</p:notes>
-</file>
-
-<file path=ppt/notesSlides/notesSlide5.xml><?xml version="1.0" encoding="utf-8"?>
-<p:notes xmlns:a="http://schemas.openxmlformats.org/drawingml/2006/main" xmlns:r="http://schemas.openxmlformats.org/officeDocument/2006/relationships" xmlns:p="http://schemas.openxmlformats.org/presentationml/2006/main">
-  <p:cSld>
-    <p:spTree>
-      <p:nvGrpSpPr>
-        <p:cNvPr id="1" name=""/>
-        <p:cNvGrpSpPr/>
-        <p:nvPr/>
-      </p:nvGrpSpPr>
-      <p:grpSpPr>
-        <a:xfrm>
-          <a:off x="0" y="0"/>
-          <a:ext cx="0" cy="0"/>
-          <a:chOff x="0" y="0"/>
-          <a:chExt cx="0" cy="0"/>
-        </a:xfrm>
-      </p:grpSpPr>
-      <p:sp>
-        <p:nvSpPr>
-          <p:cNvPr id="2" name="Slide Image Placeholder 1"/>
-          <p:cNvSpPr>
-            <a:spLocks noGrp="1" noRot="1" noChangeAspect="1"/>
-          </p:cNvSpPr>
-          <p:nvPr>
-            <p:ph type="sldImg"/>
-          </p:nvPr>
-        </p:nvSpPr>
-        <p:spPr/>
-      </p:sp>
-      <p:sp>
-        <p:nvSpPr>
-          <p:cNvPr id="3" name="Notes Placeholder 2"/>
-          <p:cNvSpPr>
-            <a:spLocks noGrp="1"/>
-          </p:cNvSpPr>
-          <p:nvPr>
-            <p:ph type="body" idx="1"/>
-          </p:nvPr>
-        </p:nvSpPr>
-        <p:spPr/>
-        <p:txBody>
-          <a:bodyPr/>
-          <a:lstStyle/>
-          <a:p>
-            <a:r>
-              <a:rPr lang="en-US" dirty="0"/>
-              <a:t/>
-            </a:r>
-            <a:endParaRPr lang="en-US" dirty="0"/>
-          </a:p>
-        </p:txBody>
-      </p:sp>
-      <p:sp>
-        <p:nvSpPr>
-          <p:cNvPr id="4" name="Slide Number Placeholder 3"/>
-          <p:cNvSpPr>
-            <a:spLocks noGrp="1"/>
-          </p:cNvSpPr>
-          <p:nvPr>
-            <p:ph type="sldNum" sz="quarter" idx="10"/>
-          </p:nvPr>
-        </p:nvSpPr>
-        <p:spPr/>
-        <p:txBody>
-          <a:bodyPr/>
-          <a:lstStyle/>
-          <a:p>
-            <a:fld id="{F7021451-1387-4CA6-816F-3879F97B5CBC}" type="slidenum">
-              <a:rPr lang="en-US"/>
-              <a:t>5</a:t>
-            </a:fld>
-            <a:endParaRPr lang="en-US"/>
-          </a:p>
-        </p:txBody>
-      </p:sp>
-    </p:spTree>
-    <p:extLst>
-      <p:ext uri="{BB962C8B-B14F-4D97-AF65-F5344CB8AC3E}">
-        <p14:creationId xmlns:p14="http://schemas.microsoft.com/office/powerpoint/2010/main" val="1024086991"/>
-      </p:ext>
-    </p:extLst>
-  </p:cSld>
-  <p:clrMapOvr>
-    <a:masterClrMapping/>
-  </p:clrMapOvr>
-</p:notes>
-</file>
-
-<file path=ppt/notesSlides/notesSlide6.xml><?xml version="1.0" encoding="utf-8"?>
-<p:notes xmlns:a="http://schemas.openxmlformats.org/drawingml/2006/main" xmlns:r="http://schemas.openxmlformats.org/officeDocument/2006/relationships" xmlns:p="http://schemas.openxmlformats.org/presentationml/2006/main">
-  <p:cSld>
-    <p:spTree>
-      <p:nvGrpSpPr>
-        <p:cNvPr id="1" name=""/>
-        <p:cNvGrpSpPr/>
-        <p:nvPr/>
-      </p:nvGrpSpPr>
-      <p:grpSpPr>
-        <a:xfrm>
-          <a:off x="0" y="0"/>
-          <a:ext cx="0" cy="0"/>
-          <a:chOff x="0" y="0"/>
-          <a:chExt cx="0" cy="0"/>
-        </a:xfrm>
-      </p:grpSpPr>
-      <p:sp>
-        <p:nvSpPr>
-          <p:cNvPr id="2" name="Slide Image Placeholder 1"/>
-          <p:cNvSpPr>
-            <a:spLocks noGrp="1" noRot="1" noChangeAspect="1"/>
-          </p:cNvSpPr>
-          <p:nvPr>
-            <p:ph type="sldImg"/>
-          </p:nvPr>
-        </p:nvSpPr>
-        <p:spPr/>
-      </p:sp>
-      <p:sp>
-        <p:nvSpPr>
-          <p:cNvPr id="3" name="Notes Placeholder 2"/>
-          <p:cNvSpPr>
-            <a:spLocks noGrp="1"/>
-          </p:cNvSpPr>
-          <p:nvPr>
-            <p:ph type="body" idx="1"/>
-          </p:nvPr>
-        </p:nvSpPr>
-        <p:spPr/>
-        <p:txBody>
-          <a:bodyPr/>
-          <a:lstStyle/>
-          <a:p>
-            <a:r>
-              <a:rPr lang="en-US" dirty="0"/>
-              <a:t/>
-            </a:r>
-            <a:endParaRPr lang="en-US" dirty="0"/>
-          </a:p>
-        </p:txBody>
-      </p:sp>
-      <p:sp>
-        <p:nvSpPr>
-          <p:cNvPr id="4" name="Slide Number Placeholder 3"/>
-          <p:cNvSpPr>
-            <a:spLocks noGrp="1"/>
-          </p:cNvSpPr>
-          <p:nvPr>
-            <p:ph type="sldNum" sz="quarter" idx="10"/>
-          </p:nvPr>
-        </p:nvSpPr>
-        <p:spPr/>
-        <p:txBody>
-          <a:bodyPr/>
-          <a:lstStyle/>
-          <a:p>
-            <a:fld id="{F7021451-1387-4CA6-816F-3879F97B5CBC}" type="slidenum">
-              <a:rPr lang="en-US"/>
-              <a:t>6</a:t>
-            </a:fld>
-            <a:endParaRPr lang="en-US"/>
-          </a:p>
-        </p:txBody>
-      </p:sp>
-    </p:spTree>
-    <p:extLst>
-      <p:ext uri="{BB962C8B-B14F-4D97-AF65-F5344CB8AC3E}">
-        <p14:creationId xmlns:p14="http://schemas.microsoft.com/office/powerpoint/2010/main" val="1024086991"/>
-      </p:ext>
-    </p:extLst>
-  </p:cSld>
-  <p:clrMapOvr>
-    <a:masterClrMapping/>
-  </p:clrMapOvr>
-</p:notes>
-</file>
-
-<file path=ppt/notesSlides/notesSlide7.xml><?xml version="1.0" encoding="utf-8"?>
-<p:notes xmlns:a="http://schemas.openxmlformats.org/drawingml/2006/main" xmlns:r="http://schemas.openxmlformats.org/officeDocument/2006/relationships" xmlns:p="http://schemas.openxmlformats.org/presentationml/2006/main">
-  <p:cSld>
-    <p:spTree>
-      <p:nvGrpSpPr>
-        <p:cNvPr id="1" name=""/>
-        <p:cNvGrpSpPr/>
-        <p:nvPr/>
-      </p:nvGrpSpPr>
-      <p:grpSpPr>
-        <a:xfrm>
-          <a:off x="0" y="0"/>
-          <a:ext cx="0" cy="0"/>
-          <a:chOff x="0" y="0"/>
-          <a:chExt cx="0" cy="0"/>
-        </a:xfrm>
-      </p:grpSpPr>
-      <p:sp>
-        <p:nvSpPr>
-          <p:cNvPr id="2" name="Slide Image Placeholder 1"/>
-          <p:cNvSpPr>
-            <a:spLocks noGrp="1" noRot="1" noChangeAspect="1"/>
-          </p:cNvSpPr>
-          <p:nvPr>
-            <p:ph type="sldImg"/>
-          </p:nvPr>
-        </p:nvSpPr>
-        <p:spPr/>
-      </p:sp>
-      <p:sp>
-        <p:nvSpPr>
-          <p:cNvPr id="3" name="Notes Placeholder 2"/>
-          <p:cNvSpPr>
-            <a:spLocks noGrp="1"/>
-          </p:cNvSpPr>
-          <p:nvPr>
-            <p:ph type="body" idx="1"/>
-          </p:nvPr>
-        </p:nvSpPr>
-        <p:spPr/>
-        <p:txBody>
-          <a:bodyPr/>
-          <a:lstStyle/>
-          <a:p>
-            <a:r>
-              <a:rPr lang="en-US" dirty="0"/>
-              <a:t/>
-            </a:r>
-            <a:endParaRPr lang="en-US" dirty="0"/>
-          </a:p>
-        </p:txBody>
-      </p:sp>
-      <p:sp>
-        <p:nvSpPr>
-          <p:cNvPr id="4" name="Slide Number Placeholder 3"/>
-          <p:cNvSpPr>
-            <a:spLocks noGrp="1"/>
-          </p:cNvSpPr>
-          <p:nvPr>
-            <p:ph type="sldNum" sz="quarter" idx="10"/>
-          </p:nvPr>
-        </p:nvSpPr>
-        <p:spPr/>
-        <p:txBody>
-          <a:bodyPr/>
-          <a:lstStyle/>
-          <a:p>
-            <a:fld id="{F7021451-1387-4CA6-816F-3879F97B5CBC}" type="slidenum">
-              <a:rPr lang="en-US"/>
-              <a:t>7</a:t>
-            </a:fld>
-            <a:endParaRPr lang="en-US"/>
-          </a:p>
-        </p:txBody>
-      </p:sp>
-    </p:spTree>
-    <p:extLst>
-      <p:ext uri="{BB962C8B-B14F-4D97-AF65-F5344CB8AC3E}">
-        <p14:creationId xmlns:p14="http://schemas.microsoft.com/office/powerpoint/2010/main" val="1024086991"/>
-      </p:ext>
-    </p:extLst>
-  </p:cSld>
-  <p:clrMapOvr>
-    <a:masterClrMapping/>
-  </p:clrMapOvr>
-</p:notes>
-</file>
-
-<file path=ppt/notesSlides/notesSlide8.xml><?xml version="1.0" encoding="utf-8"?>
-<p:notes xmlns:a="http://schemas.openxmlformats.org/drawingml/2006/main" xmlns:r="http://schemas.openxmlformats.org/officeDocument/2006/relationships" xmlns:p="http://schemas.openxmlformats.org/presentationml/2006/main">
-  <p:cSld>
-    <p:spTree>
-      <p:nvGrpSpPr>
-        <p:cNvPr id="1" name=""/>
-        <p:cNvGrpSpPr/>
-        <p:nvPr/>
-      </p:nvGrpSpPr>
-      <p:grpSpPr>
-        <a:xfrm>
-          <a:off x="0" y="0"/>
-          <a:ext cx="0" cy="0"/>
-          <a:chOff x="0" y="0"/>
-          <a:chExt cx="0" cy="0"/>
-        </a:xfrm>
-      </p:grpSpPr>
-      <p:sp>
-        <p:nvSpPr>
-          <p:cNvPr id="2" name="Slide Image Placeholder 1"/>
-          <p:cNvSpPr>
-            <a:spLocks noGrp="1" noRot="1" noChangeAspect="1"/>
-          </p:cNvSpPr>
-          <p:nvPr>
-            <p:ph type="sldImg"/>
-          </p:nvPr>
-        </p:nvSpPr>
-        <p:spPr/>
-      </p:sp>
-      <p:sp>
-        <p:nvSpPr>
-          <p:cNvPr id="3" name="Notes Placeholder 2"/>
-          <p:cNvSpPr>
-            <a:spLocks noGrp="1"/>
-          </p:cNvSpPr>
-          <p:nvPr>
-            <p:ph type="body" idx="1"/>
-          </p:nvPr>
-        </p:nvSpPr>
-        <p:spPr/>
-        <p:txBody>
-          <a:bodyPr/>
-          <a:lstStyle/>
-          <a:p>
-            <a:r>
-              <a:rPr lang="en-US" dirty="0"/>
-              <a:t/>
-            </a:r>
-            <a:endParaRPr lang="en-US" dirty="0"/>
-          </a:p>
-        </p:txBody>
-      </p:sp>
-      <p:sp>
-        <p:nvSpPr>
-          <p:cNvPr id="4" name="Slide Number Placeholder 3"/>
-          <p:cNvSpPr>
-            <a:spLocks noGrp="1"/>
-          </p:cNvSpPr>
-          <p:nvPr>
-            <p:ph type="sldNum" sz="quarter" idx="10"/>
-          </p:nvPr>
-        </p:nvSpPr>
-        <p:spPr/>
-        <p:txBody>
-          <a:bodyPr/>
-          <a:lstStyle/>
-          <a:p>
-            <a:fld id="{F7021451-1387-4CA6-816F-3879F97B5CBC}" type="slidenum">
-              <a:rPr lang="en-US"/>
-              <a:t>8</a:t>
-            </a:fld>
-            <a:endParaRPr lang="en-US"/>
-          </a:p>
-        </p:txBody>
-      </p:sp>
-    </p:spTree>
-    <p:extLst>
-      <p:ext uri="{BB962C8B-B14F-4D97-AF65-F5344CB8AC3E}">
-        <p14:creationId xmlns:p14="http://schemas.microsoft.com/office/powerpoint/2010/main" val="1024086991"/>
-      </p:ext>
-    </p:extLst>
-  </p:cSld>
-  <p:clrMapOvr>
-    <a:masterClrMapping/>
-  </p:clrMapOvr>
-</p:notes>
-</file>
-
-<file path=ppt/notesSlides/notesSlide9.xml><?xml version="1.0" encoding="utf-8"?>
-<p:notes xmlns:a="http://schemas.openxmlformats.org/drawingml/2006/main" xmlns:r="http://schemas.openxmlformats.org/officeDocument/2006/relationships" xmlns:p="http://schemas.openxmlformats.org/presentationml/2006/main">
-  <p:cSld>
-    <p:spTree>
-      <p:nvGrpSpPr>
-        <p:cNvPr id="1" name=""/>
-        <p:cNvGrpSpPr/>
-        <p:nvPr/>
-      </p:nvGrpSpPr>
-      <p:grpSpPr>
-        <a:xfrm>
-          <a:off x="0" y="0"/>
-          <a:ext cx="0" cy="0"/>
-          <a:chOff x="0" y="0"/>
-          <a:chExt cx="0" cy="0"/>
-        </a:xfrm>
-      </p:grpSpPr>
-      <p:sp>
-        <p:nvSpPr>
-          <p:cNvPr id="2" name="Slide Image Placeholder 1"/>
-          <p:cNvSpPr>
-            <a:spLocks noGrp="1" noRot="1" noChangeAspect="1"/>
-          </p:cNvSpPr>
-          <p:nvPr>
-            <p:ph type="sldImg"/>
-          </p:nvPr>
-        </p:nvSpPr>
-        <p:spPr/>
-      </p:sp>
-      <p:sp>
-        <p:nvSpPr>
-          <p:cNvPr id="3" name="Notes Placeholder 2"/>
-          <p:cNvSpPr>
-            <a:spLocks noGrp="1"/>
-          </p:cNvSpPr>
-          <p:nvPr>
-            <p:ph type="body" idx="1"/>
-          </p:nvPr>
-        </p:nvSpPr>
-        <p:spPr/>
-        <p:txBody>
-          <a:bodyPr/>
-          <a:lstStyle/>
-          <a:p>
-            <a:r>
-              <a:rPr lang="en-US" dirty="0"/>
-              <a:t/>
-            </a:r>
-            <a:endParaRPr lang="en-US" dirty="0"/>
-          </a:p>
-        </p:txBody>
-      </p:sp>
-      <p:sp>
-        <p:nvSpPr>
-          <p:cNvPr id="4" name="Slide Number Placeholder 3"/>
-          <p:cNvSpPr>
-            <a:spLocks noGrp="1"/>
-          </p:cNvSpPr>
-          <p:nvPr>
-            <p:ph type="sldNum" sz="quarter" idx="10"/>
-          </p:nvPr>
-        </p:nvSpPr>
-        <p:spPr/>
-        <p:txBody>
-          <a:bodyPr/>
-          <a:lstStyle/>
-          <a:p>
-            <a:fld id="{F7021451-1387-4CA6-816F-3879F97B5CBC}" type="slidenum">
-              <a:rPr lang="en-US"/>
-              <a:t>9</a:t>
-            </a:fld>
-            <a:endParaRPr lang="en-US"/>
-          </a:p>
-        </p:txBody>
-      </p:sp>
-    </p:spTree>
-    <p:extLst>
-      <p:ext uri="{BB962C8B-B14F-4D97-AF65-F5344CB8AC3E}">
-        <p14:creationId xmlns:p14="http://schemas.microsoft.com/office/powerpoint/2010/main" val="1024086991"/>
-      </p:ext>
-    </p:extLst>
-  </p:cSld>
-  <p:clrMapOvr>
-    <a:masterClrMapping/>
-  </p:clrMapOvr>
-</p:notes>
-</file>
-
 <file path=ppt/slideLayouts/slideLayout1.xml><?xml version="1.0" encoding="utf-8"?>
-<p:sldLayout xmlns:a="http://schemas.openxmlformats.org/drawingml/2006/main" xmlns:r="http://schemas.openxmlformats.org/officeDocument/2006/relationships" xmlns:p="http://schemas.openxmlformats.org/presentationml/2006/main" preserve="1">
+<p:sldLayout xmlns:a="http://schemas.openxmlformats.org/drawingml/2006/main" xmlns:r="http://schemas.openxmlformats.org/officeDocument/2006/relationships" xmlns:p="http://schemas.openxmlformats.org/presentationml/2006/main" type="cust" preserve="1">
   <p:cSld name="DEFAULT">
     <p:bg>
       <p:bgRef idx="1001">
@@ -1555,7 +147,7 @@
 
 <file path=ppt/slideMasters/slideMaster1.xml><?xml version="1.0" encoding="utf-8"?>
 <p:sldMaster xmlns:a="http://schemas.openxmlformats.org/drawingml/2006/main" xmlns:r="http://schemas.openxmlformats.org/officeDocument/2006/relationships" xmlns:p="http://schemas.openxmlformats.org/presentationml/2006/main">
-  <p:cSld>
+  <p:cSld name="Office Theme">
     <p:spTree>
       <p:nvGrpSpPr>
         <p:cNvPr id="1" name=""/>
@@ -1576,7 +168,6 @@
   <p:sldLayoutIdLst>
     <p:sldLayoutId id="2147483649" r:id="rId1"/>
   </p:sldLayoutIdLst>
-  <p:hf sldNum="0" hdr="0" ftr="0" dt="0"/>
   <p:txStyles>
     <p:titleStyle>
       <a:lvl1pPr algn="ctr" defTabSz="914400" rtl="0" eaLnBrk="1" latinLnBrk="0" hangingPunct="1">
@@ -1599,7 +190,7 @@
         <a:spcBef>
           <a:spcPct val="20000"/>
         </a:spcBef>
-        <a:buFont typeface="Arial" pitchFamily="34" charset="0"/>
+        <a:buFont typeface="Arial"/>
         <a:buChar char="•"/>
         <a:defRPr sz="3200" kern="1200">
           <a:solidFill>
@@ -1614,7 +205,7 @@
         <a:spcBef>
           <a:spcPct val="20000"/>
         </a:spcBef>
-        <a:buFont typeface="Arial" pitchFamily="34" charset="0"/>
+        <a:buFont typeface="Arial"/>
         <a:buChar char="–"/>
         <a:defRPr sz="2800" kern="1200">
           <a:solidFill>
@@ -1629,7 +220,7 @@
         <a:spcBef>
           <a:spcPct val="20000"/>
         </a:spcBef>
-        <a:buFont typeface="Arial" pitchFamily="34" charset="0"/>
+        <a:buFont typeface="Arial"/>
         <a:buChar char="•"/>
         <a:defRPr sz="2400" kern="1200">
           <a:solidFill>
@@ -1644,7 +235,7 @@
         <a:spcBef>
           <a:spcPct val="20000"/>
         </a:spcBef>
-        <a:buFont typeface="Arial" pitchFamily="34" charset="0"/>
+        <a:buFont typeface="Arial"/>
         <a:buChar char="–"/>
         <a:defRPr sz="2000" kern="1200">
           <a:solidFill>
@@ -1659,7 +250,7 @@
         <a:spcBef>
           <a:spcPct val="20000"/>
         </a:spcBef>
-        <a:buFont typeface="Arial" pitchFamily="34" charset="0"/>
+        <a:buFont typeface="Arial"/>
         <a:buChar char="»"/>
         <a:defRPr sz="2000" kern="1200">
           <a:solidFill>
@@ -1674,7 +265,7 @@
         <a:spcBef>
           <a:spcPct val="20000"/>
         </a:spcBef>
-        <a:buFont typeface="Arial" pitchFamily="34" charset="0"/>
+        <a:buFont typeface="Arial"/>
         <a:buChar char="•"/>
         <a:defRPr sz="2000" kern="1200">
           <a:solidFill>
@@ -1689,7 +280,7 @@
         <a:spcBef>
           <a:spcPct val="20000"/>
         </a:spcBef>
-        <a:buFont typeface="Arial" pitchFamily="34" charset="0"/>
+        <a:buFont typeface="Arial"/>
         <a:buChar char="•"/>
         <a:defRPr sz="2000" kern="1200">
           <a:solidFill>
@@ -1704,7 +295,7 @@
         <a:spcBef>
           <a:spcPct val="20000"/>
         </a:spcBef>
-        <a:buFont typeface="Arial" pitchFamily="34" charset="0"/>
+        <a:buFont typeface="Arial"/>
         <a:buChar char="•"/>
         <a:defRPr sz="2000" kern="1200">
           <a:solidFill>
@@ -1719,7 +310,7 @@
         <a:spcBef>
           <a:spcPct val="20000"/>
         </a:spcBef>
-        <a:buFont typeface="Arial" pitchFamily="34" charset="0"/>
+        <a:buFont typeface="Arial"/>
         <a:buChar char="•"/>
         <a:defRPr sz="2000" kern="1200">
           <a:solidFill>
@@ -1732,9 +323,6 @@
       </a:lvl9pPr>
     </p:bodyStyle>
     <p:otherStyle>
-      <a:defPPr>
-        <a:defRPr lang="en-US"/>
-      </a:defPPr>
       <a:lvl1pPr marL="0" algn="l" defTabSz="914400" rtl="0" eaLnBrk="1" latinLnBrk="0" hangingPunct="1">
         <a:defRPr sz="1800" kern="1200">
           <a:solidFill>
@@ -1945,21 +533,21 @@
           <a:bodyPr wrap="square" lIns="0" tIns="0" rIns="0" bIns="0" rtlCol="0" anchor="ctr"/>
           <a:lstStyle/>
           <a:p>
-            <a:pPr algn="ctr" indent="0" marL="0">
-              <a:buNone/>
-            </a:pPr>
-            <a:r>
-              <a:rPr lang="en-US" sz="1050" b="1" dirty="0">
+            <a:pPr marL="0" indent="0" algn="ctr">
+              <a:buNone/>
+            </a:pPr>
+            <a:r>
+              <a:rPr lang="en-US" sz="1050" b="1">
                 <a:solidFill>
                   <a:srgbClr val="1D4ED8"/>
                 </a:solidFill>
-                <a:latin typeface="Malgun Gothic" pitchFamily="34" charset="0"/>
-                <a:ea typeface="Malgun Gothic" pitchFamily="34" charset="-122"/>
-                <a:cs typeface="Malgun Gothic" pitchFamily="34" charset="-120"/>
+                <a:latin typeface="Malgun Gothic"/>
+                <a:ea typeface="Malgun Gothic"/>
+                <a:cs typeface="Malgun Gothic"/>
               </a:rPr>
               <a:t>⚡ 3M SMART SETTLEMENT</a:t>
             </a:r>
-            <a:endParaRPr lang="en-US" sz="1050" dirty="0"/>
+            <a:endParaRPr lang="en-US" sz="1050"/>
           </a:p>
         </p:txBody>
       </p:sp>
@@ -1984,44 +572,44 @@
           <a:bodyPr wrap="square" lIns="0" tIns="0" rIns="0" bIns="0" rtlCol="0" anchor="ctr"/>
           <a:lstStyle/>
           <a:p>
-            <a:pPr indent="0" marL="0">
+            <a:pPr marL="0" indent="0">
               <a:lnSpc>
                 <a:spcPts val="4000"/>
               </a:lnSpc>
               <a:buNone/>
             </a:pPr>
             <a:r>
-              <a:rPr lang="en-US" sz="2800" b="1" dirty="0">
+              <a:rPr lang="en-US" sz="2800" b="1">
                 <a:solidFill>
                   <a:srgbClr val="0F172A"/>
                 </a:solidFill>
-                <a:latin typeface="Malgun Gothic" pitchFamily="34" charset="0"/>
-                <a:ea typeface="Malgun Gothic" pitchFamily="34" charset="-122"/>
-                <a:cs typeface="Malgun Gothic" pitchFamily="34" charset="-120"/>
+                <a:latin typeface="Malgun Gothic"/>
+                <a:ea typeface="Malgun Gothic"/>
+                <a:cs typeface="Malgun Gothic"/>
               </a:rPr>
               <a:t>3M 사내 동아리·클럽</a:t>
             </a:r>
-            <a:endParaRPr lang="en-US" sz="2800" dirty="0"/>
-          </a:p>
-          <a:p>
-            <a:pPr indent="0" marL="0">
+            <a:endParaRPr lang="en-US" sz="2800"/>
+          </a:p>
+          <a:p>
+            <a:pPr marL="0" indent="0">
               <a:lnSpc>
                 <a:spcPts val="4000"/>
               </a:lnSpc>
               <a:buNone/>
             </a:pPr>
             <a:r>
-              <a:rPr lang="en-US" sz="2800" b="1" dirty="0">
+              <a:rPr lang="en-US" sz="2800" b="1">
                 <a:solidFill>
                   <a:srgbClr val="0F172A"/>
                 </a:solidFill>
-                <a:latin typeface="Malgun Gothic" pitchFamily="34" charset="0"/>
-                <a:ea typeface="Malgun Gothic" pitchFamily="34" charset="-122"/>
-                <a:cs typeface="Malgun Gothic" pitchFamily="34" charset="-120"/>
+                <a:latin typeface="Malgun Gothic"/>
+                <a:ea typeface="Malgun Gothic"/>
+                <a:cs typeface="Malgun Gothic"/>
               </a:rPr>
               <a:t>비용 정산 시스템 사용자 설명회</a:t>
             </a:r>
-            <a:endParaRPr lang="en-US" sz="2800" dirty="0"/>
+            <a:endParaRPr lang="en-US" sz="2800"/>
           </a:p>
         </p:txBody>
       </p:sp>
@@ -2046,21 +634,21 @@
           <a:bodyPr wrap="square" lIns="0" tIns="0" rIns="0" bIns="0" rtlCol="0" anchor="ctr"/>
           <a:lstStyle/>
           <a:p>
-            <a:pPr indent="0" marL="0">
-              <a:buNone/>
-            </a:pPr>
-            <a:r>
-              <a:rPr lang="en-US" sz="1250" dirty="0">
+            <a:pPr marL="0" indent="0">
+              <a:buNone/>
+            </a:pPr>
+            <a:r>
+              <a:rPr lang="en-US" sz="1250">
                 <a:solidFill>
                   <a:srgbClr val="475569"/>
                 </a:solidFill>
-                <a:latin typeface="Malgun Gothic" pitchFamily="34" charset="0"/>
-                <a:ea typeface="Malgun Gothic" pitchFamily="34" charset="-122"/>
-                <a:cs typeface="Malgun Gothic" pitchFamily="34" charset="-120"/>
+                <a:latin typeface="Malgun Gothic"/>
+                <a:ea typeface="Malgun Gothic"/>
+                <a:cs typeface="Malgun Gothic"/>
               </a:rPr>
               <a:t>실제 사이트 화면으로 누구나 3분 만에 마스터하는 원클릭 스마트 정산 가이드</a:t>
             </a:r>
-            <a:endParaRPr lang="en-US" sz="1250" dirty="0"/>
+            <a:endParaRPr lang="en-US" sz="1250"/>
           </a:p>
         </p:txBody>
       </p:sp>
@@ -2112,21 +700,21 @@
           <a:bodyPr wrap="square" lIns="0" tIns="0" rIns="0" bIns="0" rtlCol="0" anchor="ctr"/>
           <a:lstStyle/>
           <a:p>
-            <a:pPr indent="0" marL="0">
-              <a:buNone/>
-            </a:pPr>
-            <a:r>
-              <a:rPr lang="en-US" sz="1200" b="1" dirty="0">
+            <a:pPr marL="0" indent="0">
+              <a:buNone/>
+            </a:pPr>
+            <a:r>
+              <a:rPr lang="en-US" sz="1200" b="1">
                 <a:solidFill>
                   <a:srgbClr val="2563EB"/>
                 </a:solidFill>
-                <a:latin typeface="Malgun Gothic" pitchFamily="34" charset="0"/>
-                <a:ea typeface="Malgun Gothic" pitchFamily="34" charset="-122"/>
-                <a:cs typeface="Malgun Gothic" pitchFamily="34" charset="-120"/>
+                <a:latin typeface="Malgun Gothic"/>
+                <a:ea typeface="Malgun Gothic"/>
+                <a:cs typeface="Malgun Gothic"/>
               </a:rPr>
               <a:t>🔑 1초 간편 로그인</a:t>
             </a:r>
-            <a:endParaRPr lang="en-US" sz="1200" dirty="0"/>
+            <a:endParaRPr lang="en-US" sz="1200"/>
           </a:p>
         </p:txBody>
       </p:sp>
@@ -2151,24 +739,24 @@
           <a:bodyPr wrap="square" lIns="0" tIns="0" rIns="0" bIns="0" rtlCol="0" anchor="ctr"/>
           <a:lstStyle/>
           <a:p>
-            <a:pPr indent="0" marL="0">
+            <a:pPr marL="0" indent="0">
               <a:lnSpc>
                 <a:spcPts val="1400"/>
               </a:lnSpc>
               <a:buNone/>
             </a:pPr>
             <a:r>
-              <a:rPr lang="en-US" sz="920" dirty="0">
+              <a:rPr lang="en-US" sz="920">
                 <a:solidFill>
                   <a:srgbClr val="475569"/>
                 </a:solidFill>
-                <a:latin typeface="Malgun Gothic" pitchFamily="34" charset="0"/>
-                <a:ea typeface="Malgun Gothic" pitchFamily="34" charset="-122"/>
-                <a:cs typeface="Malgun Gothic" pitchFamily="34" charset="-120"/>
+                <a:latin typeface="Malgun Gothic"/>
+                <a:ea typeface="Malgun Gothic"/>
+                <a:cs typeface="Malgun Gothic"/>
               </a:rPr>
               <a:t>사번 PIN 번호로 비밀번호 없이 즉시 접속</a:t>
             </a:r>
-            <a:endParaRPr lang="en-US" sz="920" dirty="0"/>
+            <a:endParaRPr lang="en-US" sz="920"/>
           </a:p>
         </p:txBody>
       </p:sp>
@@ -2220,21 +808,21 @@
           <a:bodyPr wrap="square" lIns="0" tIns="0" rIns="0" bIns="0" rtlCol="0" anchor="ctr"/>
           <a:lstStyle/>
           <a:p>
-            <a:pPr indent="0" marL="0">
-              <a:buNone/>
-            </a:pPr>
-            <a:r>
-              <a:rPr lang="en-US" sz="1200" b="1" dirty="0">
+            <a:pPr marL="0" indent="0">
+              <a:buNone/>
+            </a:pPr>
+            <a:r>
+              <a:rPr lang="en-US" sz="1200" b="1">
                 <a:solidFill>
                   <a:srgbClr val="059669"/>
                 </a:solidFill>
-                <a:latin typeface="Malgun Gothic" pitchFamily="34" charset="0"/>
-                <a:ea typeface="Malgun Gothic" pitchFamily="34" charset="-122"/>
-                <a:cs typeface="Malgun Gothic" pitchFamily="34" charset="-120"/>
+                <a:latin typeface="Malgun Gothic"/>
+                <a:ea typeface="Malgun Gothic"/>
+                <a:cs typeface="Malgun Gothic"/>
               </a:rPr>
               <a:t>⚡ 4구간 자동 분할</a:t>
             </a:r>
-            <a:endParaRPr lang="en-US" sz="1200" dirty="0"/>
+            <a:endParaRPr lang="en-US" sz="1200"/>
           </a:p>
         </p:txBody>
       </p:sp>
@@ -2259,24 +847,24 @@
           <a:bodyPr wrap="square" lIns="0" tIns="0" rIns="0" bIns="0" rtlCol="0" anchor="ctr"/>
           <a:lstStyle/>
           <a:p>
-            <a:pPr indent="0" marL="0">
+            <a:pPr marL="0" indent="0">
               <a:lnSpc>
                 <a:spcPts val="1400"/>
               </a:lnSpc>
               <a:buNone/>
             </a:pPr>
             <a:r>
-              <a:rPr lang="en-US" sz="920" dirty="0">
+              <a:rPr lang="en-US" sz="920">
                 <a:solidFill>
                   <a:srgbClr val="475569"/>
                 </a:solidFill>
-                <a:latin typeface="Malgun Gothic" pitchFamily="34" charset="0"/>
-                <a:ea typeface="Malgun Gothic" pitchFamily="34" charset="-122"/>
-                <a:cs typeface="Malgun Gothic" pitchFamily="34" charset="-120"/>
+                <a:latin typeface="Malgun Gothic"/>
+                <a:ea typeface="Malgun Gothic"/>
+                <a:cs typeface="Malgun Gothic"/>
               </a:rPr>
               <a:t>규정에 따른 회사 지원금/자부담 100% 자동 검증</a:t>
             </a:r>
-            <a:endParaRPr lang="en-US" sz="920" dirty="0"/>
+            <a:endParaRPr lang="en-US" sz="920"/>
           </a:p>
         </p:txBody>
       </p:sp>
@@ -2328,21 +916,21 @@
           <a:bodyPr wrap="square" lIns="0" tIns="0" rIns="0" bIns="0" rtlCol="0" anchor="ctr"/>
           <a:lstStyle/>
           <a:p>
-            <a:pPr indent="0" marL="0">
-              <a:buNone/>
-            </a:pPr>
-            <a:r>
-              <a:rPr lang="en-US" sz="1200" b="1" dirty="0">
+            <a:pPr marL="0" indent="0">
+              <a:buNone/>
+            </a:pPr>
+            <a:r>
+              <a:rPr lang="en-US" sz="1200" b="1">
                 <a:solidFill>
                   <a:srgbClr val="D97706"/>
                 </a:solidFill>
-                <a:latin typeface="Malgun Gothic" pitchFamily="34" charset="0"/>
-                <a:ea typeface="Malgun Gothic" pitchFamily="34" charset="-122"/>
-                <a:cs typeface="Malgun Gothic" pitchFamily="34" charset="-120"/>
+                <a:latin typeface="Malgun Gothic"/>
+                <a:ea typeface="Malgun Gothic"/>
+                <a:cs typeface="Malgun Gothic"/>
               </a:rPr>
               <a:t>📊 공식 엑셀 원클릭</a:t>
             </a:r>
-            <a:endParaRPr lang="en-US" sz="1200" dirty="0"/>
+            <a:endParaRPr lang="en-US" sz="1200"/>
           </a:p>
         </p:txBody>
       </p:sp>
@@ -2367,24 +955,24 @@
           <a:bodyPr wrap="square" lIns="0" tIns="0" rIns="0" bIns="0" rtlCol="0" anchor="ctr"/>
           <a:lstStyle/>
           <a:p>
-            <a:pPr indent="0" marL="0">
+            <a:pPr marL="0" indent="0">
               <a:lnSpc>
                 <a:spcPts val="1400"/>
               </a:lnSpc>
               <a:buNone/>
             </a:pPr>
             <a:r>
-              <a:rPr lang="en-US" sz="920" dirty="0">
+              <a:rPr lang="en-US" sz="920">
                 <a:solidFill>
                   <a:srgbClr val="475569"/>
                 </a:solidFill>
-                <a:latin typeface="Malgun Gothic" pitchFamily="34" charset="0"/>
-                <a:ea typeface="Malgun Gothic" pitchFamily="34" charset="-122"/>
-                <a:cs typeface="Malgun Gothic" pitchFamily="34" charset="-120"/>
+                <a:latin typeface="Malgun Gothic"/>
+                <a:ea typeface="Malgun Gothic"/>
+                <a:cs typeface="Malgun Gothic"/>
               </a:rPr>
               <a:t>회사 공식 품의서 서식 자동 매핑 및 즉시 다운로드</a:t>
             </a:r>
-            <a:endParaRPr lang="en-US" sz="920" dirty="0"/>
+            <a:endParaRPr lang="en-US" sz="920"/>
           </a:p>
         </p:txBody>
       </p:sp>
@@ -2409,21 +997,21 @@
           <a:bodyPr wrap="square" lIns="0" tIns="0" rIns="0" bIns="0" rtlCol="0" anchor="ctr"/>
           <a:lstStyle/>
           <a:p>
-            <a:pPr indent="0" marL="0">
-              <a:buNone/>
-            </a:pPr>
-            <a:r>
-              <a:rPr lang="en-US" sz="920" dirty="0">
+            <a:pPr marL="0" indent="0">
+              <a:buNone/>
+            </a:pPr>
+            <a:r>
+              <a:rPr lang="en-US" sz="920">
                 <a:solidFill>
                   <a:srgbClr val="64748B"/>
                 </a:solidFill>
-                <a:latin typeface="Malgun Gothic" pitchFamily="34" charset="0"/>
-                <a:ea typeface="Malgun Gothic" pitchFamily="34" charset="-122"/>
-                <a:cs typeface="Malgun Gothic" pitchFamily="34" charset="-120"/>
+                <a:latin typeface="Malgun Gothic"/>
+                <a:ea typeface="Malgun Gothic"/>
+                <a:cs typeface="Malgun Gothic"/>
               </a:rPr>
               <a:t>발표일: 2026. 10. 24 (금)  |  발표자: 김종필 (시스템 개발자)  |  시스템 버전: v1.6.310 (최신 배포 버전)</a:t>
             </a:r>
-            <a:endParaRPr lang="en-US" sz="920" dirty="0"/>
+            <a:endParaRPr lang="en-US" sz="920"/>
           </a:p>
         </p:txBody>
       </p:sp>
@@ -2550,21 +1138,21 @@
           <a:bodyPr wrap="square" lIns="0" tIns="0" rIns="0" bIns="0" rtlCol="0" anchor="ctr"/>
           <a:lstStyle/>
           <a:p>
-            <a:pPr algn="ctr" indent="0" marL="0">
-              <a:buNone/>
-            </a:pPr>
-            <a:r>
-              <a:rPr lang="en-US" sz="900" b="1" dirty="0">
+            <a:pPr marL="0" indent="0" algn="ctr">
+              <a:buNone/>
+            </a:pPr>
+            <a:r>
+              <a:rPr lang="en-US" sz="900" b="1">
                 <a:solidFill>
                   <a:srgbClr val="1D4ED8"/>
                 </a:solidFill>
-                <a:latin typeface="Malgun Gothic" pitchFamily="34" charset="0"/>
-                <a:ea typeface="Malgun Gothic" pitchFamily="34" charset="-122"/>
-                <a:cs typeface="Malgun Gothic" pitchFamily="34" charset="-120"/>
+                <a:latin typeface="Malgun Gothic"/>
+                <a:ea typeface="Malgun Gothic"/>
+                <a:cs typeface="Malgun Gothic"/>
               </a:rPr>
               <a:t>관리자 전용 기능 (회장단)</a:t>
             </a:r>
-            <a:endParaRPr lang="en-US" sz="900" dirty="0"/>
+            <a:endParaRPr lang="en-US" sz="900"/>
           </a:p>
         </p:txBody>
       </p:sp>
@@ -2589,21 +1177,21 @@
           <a:bodyPr wrap="square" lIns="0" tIns="0" rIns="0" bIns="0" rtlCol="0" anchor="ctr"/>
           <a:lstStyle/>
           <a:p>
-            <a:pPr indent="0" marL="0">
-              <a:buNone/>
-            </a:pPr>
-            <a:r>
-              <a:rPr lang="en-US" sz="1800" b="1" dirty="0">
+            <a:pPr marL="0" indent="0">
+              <a:buNone/>
+            </a:pPr>
+            <a:r>
+              <a:rPr lang="en-US" sz="1800" b="1">
                 <a:solidFill>
                   <a:srgbClr val="0F172A"/>
                 </a:solidFill>
-                <a:latin typeface="Malgun Gothic" pitchFamily="34" charset="0"/>
-                <a:ea typeface="Malgun Gothic" pitchFamily="34" charset="-122"/>
-                <a:cs typeface="Malgun Gothic" pitchFamily="34" charset="-120"/>
+                <a:latin typeface="Malgun Gothic"/>
+                <a:ea typeface="Malgun Gothic"/>
+                <a:cs typeface="Malgun Gothic"/>
               </a:rPr>
               <a:t>[관리자] 7대 실시간 시각화 분석 차트 대시보드</a:t>
             </a:r>
-            <a:endParaRPr lang="en-US" sz="1800" dirty="0"/>
+            <a:endParaRPr lang="en-US" sz="1800"/>
           </a:p>
         </p:txBody>
       </p:sp>
@@ -2628,21 +1216,21 @@
           <a:bodyPr wrap="square" lIns="0" tIns="0" rIns="0" bIns="0" rtlCol="0" anchor="ctr"/>
           <a:lstStyle/>
           <a:p>
-            <a:pPr indent="0" marL="0">
-              <a:buNone/>
-            </a:pPr>
-            <a:r>
-              <a:rPr lang="en-US" sz="1050" dirty="0">
+            <a:pPr marL="0" indent="0">
+              <a:buNone/>
+            </a:pPr>
+            <a:r>
+              <a:rPr lang="en-US" sz="1050">
                 <a:solidFill>
                   <a:srgbClr val="475569"/>
                 </a:solidFill>
-                <a:latin typeface="Malgun Gothic" pitchFamily="34" charset="0"/>
-                <a:ea typeface="Malgun Gothic" pitchFamily="34" charset="-122"/>
-                <a:cs typeface="Malgun Gothic" pitchFamily="34" charset="-120"/>
+                <a:latin typeface="Malgun Gothic"/>
+                <a:ea typeface="Malgun Gothic"/>
+                <a:cs typeface="Malgun Gothic"/>
               </a:rPr>
               <a:t>월별 지출액, 예산 소진율, 활동 회원 수 등 7대 핵심 지표를 인터랙티브 차트로 한눈에 파악합니다.</a:t>
             </a:r>
-            <a:endParaRPr lang="en-US" sz="1050" dirty="0"/>
+            <a:endParaRPr lang="en-US" sz="1050"/>
           </a:p>
         </p:txBody>
       </p:sp>
@@ -2690,21 +1278,21 @@
           <a:bodyPr wrap="square" lIns="0" tIns="0" rIns="0" bIns="0" rtlCol="0" anchor="ctr"/>
           <a:lstStyle/>
           <a:p>
-            <a:pPr indent="0" marL="0">
-              <a:buNone/>
-            </a:pPr>
-            <a:r>
-              <a:rPr lang="en-US" sz="800" dirty="0">
+            <a:pPr marL="0" indent="0">
+              <a:buNone/>
+            </a:pPr>
+            <a:r>
+              <a:rPr lang="en-US" sz="800">
                 <a:solidFill>
                   <a:srgbClr val="64748B"/>
                 </a:solidFill>
-                <a:latin typeface="Malgun Gothic" pitchFamily="34" charset="0"/>
-                <a:ea typeface="Malgun Gothic" pitchFamily="34" charset="-122"/>
-                <a:cs typeface="Malgun Gothic" pitchFamily="34" charset="-120"/>
+                <a:latin typeface="Malgun Gothic"/>
+                <a:ea typeface="Malgun Gothic"/>
+                <a:cs typeface="Malgun Gothic"/>
               </a:rPr>
               <a:t>3M 사내 동아리·클럽 비용 정산기 (v1.6.310) | 실무 사용자 설명회</a:t>
             </a:r>
-            <a:endParaRPr lang="en-US" sz="800" dirty="0"/>
+            <a:endParaRPr lang="en-US" sz="800"/>
           </a:p>
         </p:txBody>
       </p:sp>
@@ -2729,34 +1317,34 @@
           <a:bodyPr wrap="square" lIns="0" tIns="0" rIns="0" bIns="0" rtlCol="0" anchor="ctr"/>
           <a:lstStyle/>
           <a:p>
-            <a:pPr algn="r" indent="0" marL="0">
-              <a:buNone/>
-            </a:pPr>
-            <a:r>
-              <a:rPr lang="en-US" sz="750" dirty="0">
+            <a:pPr marL="0" indent="0" algn="r">
+              <a:buNone/>
+            </a:pPr>
+            <a:r>
+              <a:rPr lang="en-US" sz="750">
                 <a:solidFill>
                   <a:srgbClr val="64748B"/>
                 </a:solidFill>
-                <a:latin typeface="Malgun Gothic" pitchFamily="34" charset="0"/>
-                <a:ea typeface="Malgun Gothic" pitchFamily="34" charset="-122"/>
-                <a:cs typeface="Malgun Gothic" pitchFamily="34" charset="-120"/>
+                <a:latin typeface="Malgun Gothic"/>
+                <a:ea typeface="Malgun Gothic"/>
+                <a:cs typeface="Malgun Gothic"/>
               </a:rPr>
               <a:t>COPYRIGHT © 2026 3M ALL RIGHTS RESERVED</a:t>
             </a:r>
-            <a:endParaRPr lang="en-US" sz="750" dirty="0"/>
+            <a:endParaRPr lang="en-US" sz="750"/>
           </a:p>
         </p:txBody>
       </p:sp>
       <p:pic>
         <p:nvPicPr>
-          <p:cNvPr id="11" name="Image 0" descr="preencoded.png">    </p:cNvPr>
+          <p:cNvPr id="11" name="Image 0" descr="preencoded.png"/>
           <p:cNvPicPr>
             <a:picLocks noChangeAspect="1"/>
           </p:cNvPicPr>
           <p:nvPr/>
         </p:nvPicPr>
-        <p:blipFill>
-          <a:blip r:embed="rId1"/>
+        <p:blipFill rotWithShape="1">
+          <a:blip r:embed="rId2"/>
           <a:stretch>
             <a:fillRect/>
           </a:stretch>
@@ -2819,21 +1407,21 @@
           <a:bodyPr wrap="square" lIns="0" tIns="0" rIns="0" bIns="0" rtlCol="0" anchor="ctr"/>
           <a:lstStyle/>
           <a:p>
-            <a:pPr indent="0" marL="0">
-              <a:buNone/>
-            </a:pPr>
-            <a:r>
-              <a:rPr lang="en-US" sz="1250" b="1" dirty="0">
+            <a:pPr marL="0" indent="0">
+              <a:buNone/>
+            </a:pPr>
+            <a:r>
+              <a:rPr lang="en-US" sz="1250" b="1">
                 <a:solidFill>
                   <a:srgbClr val="2563EB"/>
                 </a:solidFill>
-                <a:latin typeface="Malgun Gothic" pitchFamily="34" charset="0"/>
-                <a:ea typeface="Malgun Gothic" pitchFamily="34" charset="-122"/>
-                <a:cs typeface="Malgun Gothic" pitchFamily="34" charset="-120"/>
+                <a:latin typeface="Malgun Gothic"/>
+                <a:ea typeface="Malgun Gothic"/>
+                <a:cs typeface="Malgun Gothic"/>
               </a:rPr>
               <a:t>📊 7대 실시간 분석 차트</a:t>
             </a:r>
-            <a:endParaRPr lang="en-US" sz="1250" dirty="0"/>
+            <a:endParaRPr lang="en-US" sz="1250"/>
           </a:p>
         </p:txBody>
       </p:sp>
@@ -2858,21 +1446,21 @@
           <a:bodyPr wrap="square" lIns="0" tIns="0" rIns="0" bIns="0" rtlCol="0" anchor="ctr"/>
           <a:lstStyle/>
           <a:p>
-            <a:pPr indent="0" marL="0">
-              <a:buNone/>
-            </a:pPr>
-            <a:r>
-              <a:rPr lang="en-US" sz="920" b="1" dirty="0">
+            <a:pPr marL="0" indent="0">
+              <a:buNone/>
+            </a:pPr>
+            <a:r>
+              <a:rPr lang="en-US" sz="920" b="1">
                 <a:solidFill>
                   <a:srgbClr val="0F172A"/>
                 </a:solidFill>
-                <a:latin typeface="Malgun Gothic" pitchFamily="34" charset="0"/>
-                <a:ea typeface="Malgun Gothic" pitchFamily="34" charset="-122"/>
-                <a:cs typeface="Malgun Gothic" pitchFamily="34" charset="-120"/>
+                <a:latin typeface="Malgun Gothic"/>
+                <a:ea typeface="Malgun Gothic"/>
+                <a:cs typeface="Malgun Gothic"/>
               </a:rPr>
               <a:t>① 월별 지출 현황 (1~12월)</a:t>
             </a:r>
-            <a:endParaRPr lang="en-US" sz="920" dirty="0"/>
+            <a:endParaRPr lang="en-US" sz="920"/>
           </a:p>
         </p:txBody>
       </p:sp>
@@ -2897,24 +1485,24 @@
           <a:bodyPr wrap="square" lIns="0" tIns="0" rIns="0" bIns="0" rtlCol="0" anchor="ctr"/>
           <a:lstStyle/>
           <a:p>
-            <a:pPr indent="0" marL="0">
+            <a:pPr marL="0" indent="0">
               <a:lnSpc>
                 <a:spcPts val="1200"/>
               </a:lnSpc>
               <a:buNone/>
             </a:pPr>
             <a:r>
-              <a:rPr lang="en-US" sz="800" dirty="0">
+              <a:rPr lang="en-US" sz="800">
                 <a:solidFill>
                   <a:srgbClr val="475569"/>
                 </a:solidFill>
-                <a:latin typeface="Malgun Gothic" pitchFamily="34" charset="0"/>
-                <a:ea typeface="Malgun Gothic" pitchFamily="34" charset="-122"/>
-                <a:cs typeface="Malgun Gothic" pitchFamily="34" charset="-120"/>
+                <a:latin typeface="Malgun Gothic"/>
+                <a:ea typeface="Malgun Gothic"/>
+                <a:cs typeface="Malgun Gothic"/>
               </a:rPr>
               <a:t>클럽별 월간 지출액 추이를 멀티 컬러 바 차트로 비교 분석</a:t>
             </a:r>
-            <a:endParaRPr lang="en-US" sz="800" dirty="0"/>
+            <a:endParaRPr lang="en-US" sz="800"/>
           </a:p>
         </p:txBody>
       </p:sp>
@@ -2939,21 +1527,21 @@
           <a:bodyPr wrap="square" lIns="0" tIns="0" rIns="0" bIns="0" rtlCol="0" anchor="ctr"/>
           <a:lstStyle/>
           <a:p>
-            <a:pPr indent="0" marL="0">
-              <a:buNone/>
-            </a:pPr>
-            <a:r>
-              <a:rPr lang="en-US" sz="920" b="1" dirty="0">
+            <a:pPr marL="0" indent="0">
+              <a:buNone/>
+            </a:pPr>
+            <a:r>
+              <a:rPr lang="en-US" sz="920" b="1">
                 <a:solidFill>
                   <a:srgbClr val="0F172A"/>
                 </a:solidFill>
-                <a:latin typeface="Malgun Gothic" pitchFamily="34" charset="0"/>
-                <a:ea typeface="Malgun Gothic" pitchFamily="34" charset="-122"/>
-                <a:cs typeface="Malgun Gothic" pitchFamily="34" charset="-120"/>
+                <a:latin typeface="Malgun Gothic"/>
+                <a:ea typeface="Malgun Gothic"/>
+                <a:cs typeface="Malgun Gothic"/>
               </a:rPr>
               <a:t>② 클럽별 예산 소진율 (위험도 경고)</a:t>
             </a:r>
-            <a:endParaRPr lang="en-US" sz="920" dirty="0"/>
+            <a:endParaRPr lang="en-US" sz="920"/>
           </a:p>
         </p:txBody>
       </p:sp>
@@ -2978,24 +1566,24 @@
           <a:bodyPr wrap="square" lIns="0" tIns="0" rIns="0" bIns="0" rtlCol="0" anchor="ctr"/>
           <a:lstStyle/>
           <a:p>
-            <a:pPr indent="0" marL="0">
+            <a:pPr marL="0" indent="0">
               <a:lnSpc>
                 <a:spcPts val="1200"/>
               </a:lnSpc>
               <a:buNone/>
             </a:pPr>
             <a:r>
-              <a:rPr lang="en-US" sz="800" dirty="0">
+              <a:rPr lang="en-US" sz="800">
                 <a:solidFill>
                   <a:srgbClr val="475569"/>
                 </a:solidFill>
-                <a:latin typeface="Malgun Gothic" pitchFamily="34" charset="0"/>
-                <a:ea typeface="Malgun Gothic" pitchFamily="34" charset="-122"/>
-                <a:cs typeface="Malgun Gothic" pitchFamily="34" charset="-120"/>
+                <a:latin typeface="Malgun Gothic"/>
+                <a:ea typeface="Malgun Gothic"/>
+                <a:cs typeface="Malgun Gothic"/>
               </a:rPr>
               <a:t>클럽 고유 색상 매핑 및 소진 위험도에 따른 스마트 경고 표시</a:t>
             </a:r>
-            <a:endParaRPr lang="en-US" sz="800" dirty="0"/>
+            <a:endParaRPr lang="en-US" sz="800"/>
           </a:p>
         </p:txBody>
       </p:sp>
@@ -3020,21 +1608,21 @@
           <a:bodyPr wrap="square" lIns="0" tIns="0" rIns="0" bIns="0" rtlCol="0" anchor="ctr"/>
           <a:lstStyle/>
           <a:p>
-            <a:pPr indent="0" marL="0">
-              <a:buNone/>
-            </a:pPr>
-            <a:r>
-              <a:rPr lang="en-US" sz="920" b="1" dirty="0">
+            <a:pPr marL="0" indent="0">
+              <a:buNone/>
+            </a:pPr>
+            <a:r>
+              <a:rPr lang="en-US" sz="920" b="1">
                 <a:solidFill>
                   <a:srgbClr val="0F172A"/>
                 </a:solidFill>
-                <a:latin typeface="Malgun Gothic" pitchFamily="34" charset="0"/>
-                <a:ea typeface="Malgun Gothic" pitchFamily="34" charset="-122"/>
-                <a:cs typeface="Malgun Gothic" pitchFamily="34" charset="-120"/>
+                <a:latin typeface="Malgun Gothic"/>
+                <a:ea typeface="Malgun Gothic"/>
+                <a:cs typeface="Malgun Gothic"/>
               </a:rPr>
               <a:t>③ 3대 카테고리별 비용 비중</a:t>
             </a:r>
-            <a:endParaRPr lang="en-US" sz="920" dirty="0"/>
+            <a:endParaRPr lang="en-US" sz="920"/>
           </a:p>
         </p:txBody>
       </p:sp>
@@ -3059,24 +1647,24 @@
           <a:bodyPr wrap="square" lIns="0" tIns="0" rIns="0" bIns="0" rtlCol="0" anchor="ctr"/>
           <a:lstStyle/>
           <a:p>
-            <a:pPr indent="0" marL="0">
+            <a:pPr marL="0" indent="0">
               <a:lnSpc>
                 <a:spcPts val="1200"/>
               </a:lnSpc>
               <a:buNone/>
             </a:pPr>
             <a:r>
-              <a:rPr lang="en-US" sz="800" dirty="0">
+              <a:rPr lang="en-US" sz="800">
                 <a:solidFill>
                   <a:srgbClr val="475569"/>
                 </a:solidFill>
-                <a:latin typeface="Malgun Gothic" pitchFamily="34" charset="0"/>
-                <a:ea typeface="Malgun Gothic" pitchFamily="34" charset="-122"/>
-                <a:cs typeface="Malgun Gothic" pitchFamily="34" charset="-120"/>
+                <a:latin typeface="Malgun Gothic"/>
+                <a:ea typeface="Malgun Gothic"/>
+                <a:cs typeface="Malgun Gothic"/>
               </a:rPr>
               <a:t>행사비, 시설·장비, 상품비 구성비를 도넛 차트로 실시간 분석</a:t>
             </a:r>
-            <a:endParaRPr lang="en-US" sz="800" dirty="0"/>
+            <a:endParaRPr lang="en-US" sz="800"/>
           </a:p>
         </p:txBody>
       </p:sp>
@@ -3101,21 +1689,21 @@
           <a:bodyPr wrap="square" lIns="0" tIns="0" rIns="0" bIns="0" rtlCol="0" anchor="ctr"/>
           <a:lstStyle/>
           <a:p>
-            <a:pPr indent="0" marL="0">
-              <a:buNone/>
-            </a:pPr>
-            <a:r>
-              <a:rPr lang="en-US" sz="920" b="1" dirty="0">
+            <a:pPr marL="0" indent="0">
+              <a:buNone/>
+            </a:pPr>
+            <a:r>
+              <a:rPr lang="en-US" sz="920" b="1">
                 <a:solidFill>
                   <a:srgbClr val="0F172A"/>
                 </a:solidFill>
-                <a:latin typeface="Malgun Gothic" pitchFamily="34" charset="0"/>
-                <a:ea typeface="Malgun Gothic" pitchFamily="34" charset="-122"/>
-                <a:cs typeface="Malgun Gothic" pitchFamily="34" charset="-120"/>
+                <a:latin typeface="Malgun Gothic"/>
+                <a:ea typeface="Malgun Gothic"/>
+                <a:cs typeface="Malgun Gothic"/>
               </a:rPr>
               <a:t>④ 클럽별 고유 참석자 분석 (중복 제거)</a:t>
             </a:r>
-            <a:endParaRPr lang="en-US" sz="920" dirty="0"/>
+            <a:endParaRPr lang="en-US" sz="920"/>
           </a:p>
         </p:txBody>
       </p:sp>
@@ -3140,24 +1728,24 @@
           <a:bodyPr wrap="square" lIns="0" tIns="0" rIns="0" bIns="0" rtlCol="0" anchor="ctr"/>
           <a:lstStyle/>
           <a:p>
-            <a:pPr indent="0" marL="0">
+            <a:pPr marL="0" indent="0">
               <a:lnSpc>
                 <a:spcPts val="1200"/>
               </a:lnSpc>
               <a:buNone/>
             </a:pPr>
             <a:r>
-              <a:rPr lang="en-US" sz="800" dirty="0">
+              <a:rPr lang="en-US" sz="800">
                 <a:solidFill>
                   <a:srgbClr val="475569"/>
                 </a:solidFill>
-                <a:latin typeface="Malgun Gothic" pitchFamily="34" charset="0"/>
-                <a:ea typeface="Malgun Gothic" pitchFamily="34" charset="-122"/>
-                <a:cs typeface="Malgun Gothic" pitchFamily="34" charset="-120"/>
+                <a:latin typeface="Malgun Gothic"/>
+                <a:ea typeface="Malgun Gothic"/>
+                <a:cs typeface="Malgun Gothic"/>
               </a:rPr>
               <a:t>사번 기준 중복을 완벽 제거하여 실제 순수 활동 인원수 집계</a:t>
             </a:r>
-            <a:endParaRPr lang="en-US" sz="800" dirty="0"/>
+            <a:endParaRPr lang="en-US" sz="800"/>
           </a:p>
         </p:txBody>
       </p:sp>
@@ -3182,21 +1770,21 @@
           <a:bodyPr wrap="square" lIns="0" tIns="0" rIns="0" bIns="0" rtlCol="0" anchor="ctr"/>
           <a:lstStyle/>
           <a:p>
-            <a:pPr indent="0" marL="0">
-              <a:buNone/>
-            </a:pPr>
-            <a:r>
-              <a:rPr lang="en-US" sz="920" b="1" dirty="0">
+            <a:pPr marL="0" indent="0">
+              <a:buNone/>
+            </a:pPr>
+            <a:r>
+              <a:rPr lang="en-US" sz="920" b="1">
                 <a:solidFill>
                   <a:srgbClr val="0F172A"/>
                 </a:solidFill>
-                <a:latin typeface="Malgun Gothic" pitchFamily="34" charset="0"/>
-                <a:ea typeface="Malgun Gothic" pitchFamily="34" charset="-122"/>
-                <a:cs typeface="Malgun Gothic" pitchFamily="34" charset="-120"/>
+                <a:latin typeface="Malgun Gothic"/>
+                <a:ea typeface="Malgun Gothic"/>
+                <a:cs typeface="Malgun Gothic"/>
               </a:rPr>
               <a:t>⑤ 클럽별 정산 횟수 &amp; 자부담 추이</a:t>
             </a:r>
-            <a:endParaRPr lang="en-US" sz="920" dirty="0"/>
+            <a:endParaRPr lang="en-US" sz="920"/>
           </a:p>
         </p:txBody>
       </p:sp>
@@ -3221,24 +1809,24 @@
           <a:bodyPr wrap="square" lIns="0" tIns="0" rIns="0" bIns="0" rtlCol="0" anchor="ctr"/>
           <a:lstStyle/>
           <a:p>
-            <a:pPr indent="0" marL="0">
+            <a:pPr marL="0" indent="0">
               <a:lnSpc>
                 <a:spcPts val="1200"/>
               </a:lnSpc>
               <a:buNone/>
             </a:pPr>
             <a:r>
-              <a:rPr lang="en-US" sz="800" dirty="0">
+              <a:rPr lang="en-US" sz="800">
                 <a:solidFill>
                   <a:srgbClr val="475569"/>
                 </a:solidFill>
-                <a:latin typeface="Malgun Gothic" pitchFamily="34" charset="0"/>
-                <a:ea typeface="Malgun Gothic" pitchFamily="34" charset="-122"/>
-                <a:cs typeface="Malgun Gothic" pitchFamily="34" charset="-120"/>
+                <a:latin typeface="Malgun Gothic"/>
+                <a:ea typeface="Malgun Gothic"/>
+                <a:cs typeface="Malgun Gothic"/>
               </a:rPr>
               <a:t>동아리별 정기 모임 활성화 수준과 임직원 자부담 변동성 모니터링</a:t>
             </a:r>
-            <a:endParaRPr lang="en-US" sz="800" dirty="0"/>
+            <a:endParaRPr lang="en-US" sz="800"/>
           </a:p>
         </p:txBody>
       </p:sp>
@@ -3290,24 +1878,24 @@
           <a:bodyPr wrap="square" lIns="0" tIns="0" rIns="0" bIns="0" rtlCol="0" anchor="ctr"/>
           <a:lstStyle/>
           <a:p>
-            <a:pPr indent="0" marL="0">
+            <a:pPr marL="0" indent="0">
               <a:lnSpc>
                 <a:spcPts val="1100"/>
               </a:lnSpc>
               <a:buNone/>
             </a:pPr>
             <a:r>
-              <a:rPr lang="en-US" sz="780" dirty="0">
+              <a:rPr lang="en-US" sz="780">
                 <a:solidFill>
                   <a:srgbClr val="1D4ED8"/>
                 </a:solidFill>
-                <a:latin typeface="Malgun Gothic" pitchFamily="34" charset="0"/>
-                <a:ea typeface="Malgun Gothic" pitchFamily="34" charset="-122"/>
-                <a:cs typeface="Malgun Gothic" pitchFamily="34" charset="-120"/>
+                <a:latin typeface="Malgun Gothic"/>
+                <a:ea typeface="Malgun Gothic"/>
+                <a:cs typeface="Malgun Gothic"/>
               </a:rPr>
               <a:t>✓ 클럽 필터 칩으로 특정 클럽만 선택하여 비교하거나 [전체 선택]으로 전사 총괄 비교가 가능합니다.</a:t>
             </a:r>
-            <a:endParaRPr lang="en-US" sz="780" dirty="0"/>
+            <a:endParaRPr lang="en-US" sz="780"/>
           </a:p>
         </p:txBody>
       </p:sp>
@@ -3434,21 +2022,21 @@
           <a:bodyPr wrap="square" lIns="0" tIns="0" rIns="0" bIns="0" rtlCol="0" anchor="ctr"/>
           <a:lstStyle/>
           <a:p>
-            <a:pPr algn="ctr" indent="0" marL="0">
-              <a:buNone/>
-            </a:pPr>
-            <a:r>
-              <a:rPr lang="en-US" sz="900" b="1" dirty="0">
+            <a:pPr marL="0" indent="0" algn="ctr">
+              <a:buNone/>
+            </a:pPr>
+            <a:r>
+              <a:rPr lang="en-US" sz="900" b="1">
                 <a:solidFill>
                   <a:srgbClr val="1D4ED8"/>
                 </a:solidFill>
-                <a:latin typeface="Malgun Gothic" pitchFamily="34" charset="0"/>
-                <a:ea typeface="Malgun Gothic" pitchFamily="34" charset="-122"/>
-                <a:cs typeface="Malgun Gothic" pitchFamily="34" charset="-120"/>
+                <a:latin typeface="Malgun Gothic"/>
+                <a:ea typeface="Malgun Gothic"/>
+                <a:cs typeface="Malgun Gothic"/>
               </a:rPr>
               <a:t>관리자 전용 기능 (회장단)</a:t>
             </a:r>
-            <a:endParaRPr lang="en-US" sz="900" dirty="0"/>
+            <a:endParaRPr lang="en-US" sz="900"/>
           </a:p>
         </p:txBody>
       </p:sp>
@@ -3473,21 +2061,21 @@
           <a:bodyPr wrap="square" lIns="0" tIns="0" rIns="0" bIns="0" rtlCol="0" anchor="ctr"/>
           <a:lstStyle/>
           <a:p>
-            <a:pPr indent="0" marL="0">
-              <a:buNone/>
-            </a:pPr>
-            <a:r>
-              <a:rPr lang="en-US" sz="1800" b="1" dirty="0">
+            <a:pPr marL="0" indent="0">
+              <a:buNone/>
+            </a:pPr>
+            <a:r>
+              <a:rPr lang="en-US" sz="1800" b="1">
                 <a:solidFill>
                   <a:srgbClr val="0F172A"/>
                 </a:solidFill>
-                <a:latin typeface="Malgun Gothic" pitchFamily="34" charset="0"/>
-                <a:ea typeface="Malgun Gothic" pitchFamily="34" charset="-122"/>
-                <a:cs typeface="Malgun Gothic" pitchFamily="34" charset="-120"/>
+                <a:latin typeface="Malgun Gothic"/>
+                <a:ea typeface="Malgun Gothic"/>
+                <a:cs typeface="Malgun Gothic"/>
               </a:rPr>
               <a:t>[관리자] 1클릭 연간 클럽 결산 PPT 보고서 자동 생성</a:t>
             </a:r>
-            <a:endParaRPr lang="en-US" sz="1800" dirty="0"/>
+            <a:endParaRPr lang="en-US" sz="1800"/>
           </a:p>
         </p:txBody>
       </p:sp>
@@ -3512,21 +2100,21 @@
           <a:bodyPr wrap="square" lIns="0" tIns="0" rIns="0" bIns="0" rtlCol="0" anchor="ctr"/>
           <a:lstStyle/>
           <a:p>
-            <a:pPr indent="0" marL="0">
-              <a:buNone/>
-            </a:pPr>
-            <a:r>
-              <a:rPr lang="en-US" sz="1050" dirty="0">
+            <a:pPr marL="0" indent="0">
+              <a:buNone/>
+            </a:pPr>
+            <a:r>
+              <a:rPr lang="en-US" sz="1050">
                 <a:solidFill>
                   <a:srgbClr val="475569"/>
                 </a:solidFill>
-                <a:latin typeface="Malgun Gothic" pitchFamily="34" charset="0"/>
-                <a:ea typeface="Malgun Gothic" pitchFamily="34" charset="-122"/>
-                <a:cs typeface="Malgun Gothic" pitchFamily="34" charset="-120"/>
+                <a:latin typeface="Malgun Gothic"/>
+                <a:ea typeface="Malgun Gothic"/>
+                <a:cs typeface="Malgun Gothic"/>
               </a:rPr>
               <a:t>수작업으로 며칠씩 걸리던 경영진 연말 결산 보고서가 클릭 한 번에 16:9 와이드 PPTX로 자동 빌드됩니다.</a:t>
             </a:r>
-            <a:endParaRPr lang="en-US" sz="1050" dirty="0"/>
+            <a:endParaRPr lang="en-US" sz="1050"/>
           </a:p>
         </p:txBody>
       </p:sp>
@@ -3574,21 +2162,21 @@
           <a:bodyPr wrap="square" lIns="0" tIns="0" rIns="0" bIns="0" rtlCol="0" anchor="ctr"/>
           <a:lstStyle/>
           <a:p>
-            <a:pPr indent="0" marL="0">
-              <a:buNone/>
-            </a:pPr>
-            <a:r>
-              <a:rPr lang="en-US" sz="800" dirty="0">
+            <a:pPr marL="0" indent="0">
+              <a:buNone/>
+            </a:pPr>
+            <a:r>
+              <a:rPr lang="en-US" sz="800">
                 <a:solidFill>
                   <a:srgbClr val="64748B"/>
                 </a:solidFill>
-                <a:latin typeface="Malgun Gothic" pitchFamily="34" charset="0"/>
-                <a:ea typeface="Malgun Gothic" pitchFamily="34" charset="-122"/>
-                <a:cs typeface="Malgun Gothic" pitchFamily="34" charset="-120"/>
+                <a:latin typeface="Malgun Gothic"/>
+                <a:ea typeface="Malgun Gothic"/>
+                <a:cs typeface="Malgun Gothic"/>
               </a:rPr>
               <a:t>3M 사내 동아리·클럽 비용 정산기 (v1.6.310) | 실무 사용자 설명회</a:t>
             </a:r>
-            <a:endParaRPr lang="en-US" sz="800" dirty="0"/>
+            <a:endParaRPr lang="en-US" sz="800"/>
           </a:p>
         </p:txBody>
       </p:sp>
@@ -3613,34 +2201,34 @@
           <a:bodyPr wrap="square" lIns="0" tIns="0" rIns="0" bIns="0" rtlCol="0" anchor="ctr"/>
           <a:lstStyle/>
           <a:p>
-            <a:pPr algn="r" indent="0" marL="0">
-              <a:buNone/>
-            </a:pPr>
-            <a:r>
-              <a:rPr lang="en-US" sz="750" dirty="0">
+            <a:pPr marL="0" indent="0" algn="r">
+              <a:buNone/>
+            </a:pPr>
+            <a:r>
+              <a:rPr lang="en-US" sz="750">
                 <a:solidFill>
                   <a:srgbClr val="64748B"/>
                 </a:solidFill>
-                <a:latin typeface="Malgun Gothic" pitchFamily="34" charset="0"/>
-                <a:ea typeface="Malgun Gothic" pitchFamily="34" charset="-122"/>
-                <a:cs typeface="Malgun Gothic" pitchFamily="34" charset="-120"/>
+                <a:latin typeface="Malgun Gothic"/>
+                <a:ea typeface="Malgun Gothic"/>
+                <a:cs typeface="Malgun Gothic"/>
               </a:rPr>
               <a:t>COPYRIGHT © 2026 3M ALL RIGHTS RESERVED</a:t>
             </a:r>
-            <a:endParaRPr lang="en-US" sz="750" dirty="0"/>
+            <a:endParaRPr lang="en-US" sz="750"/>
           </a:p>
         </p:txBody>
       </p:sp>
       <p:pic>
         <p:nvPicPr>
-          <p:cNvPr id="11" name="Image 0" descr="preencoded.png">    </p:cNvPr>
+          <p:cNvPr id="11" name="Image 0" descr="preencoded.png"/>
           <p:cNvPicPr>
             <a:picLocks noChangeAspect="1"/>
           </p:cNvPicPr>
           <p:nvPr/>
         </p:nvPicPr>
-        <p:blipFill>
-          <a:blip r:embed="rId1"/>
+        <p:blipFill rotWithShape="1">
+          <a:blip r:embed="rId2"/>
           <a:stretch>
             <a:fillRect/>
           </a:stretch>
@@ -3703,21 +2291,21 @@
           <a:bodyPr wrap="square" lIns="0" tIns="0" rIns="0" bIns="0" rtlCol="0" anchor="ctr"/>
           <a:lstStyle/>
           <a:p>
-            <a:pPr indent="0" marL="0">
-              <a:buNone/>
-            </a:pPr>
-            <a:r>
-              <a:rPr lang="en-US" sz="1250" b="1" dirty="0">
+            <a:pPr marL="0" indent="0">
+              <a:buNone/>
+            </a:pPr>
+            <a:r>
+              <a:rPr lang="en-US" sz="1250" b="1">
                 <a:solidFill>
                   <a:srgbClr val="D97706"/>
                 </a:solidFill>
-                <a:latin typeface="Malgun Gothic" pitchFamily="34" charset="0"/>
-                <a:ea typeface="Malgun Gothic" pitchFamily="34" charset="-122"/>
-                <a:cs typeface="Malgun Gothic" pitchFamily="34" charset="-120"/>
+                <a:latin typeface="Malgun Gothic"/>
+                <a:ea typeface="Malgun Gothic"/>
+                <a:cs typeface="Malgun Gothic"/>
               </a:rPr>
               <a:t>🚀 연간 결산 PPT 자동화 3대 핵심 강점</a:t>
             </a:r>
-            <a:endParaRPr lang="en-US" sz="1250" dirty="0"/>
+            <a:endParaRPr lang="en-US" sz="1250"/>
           </a:p>
         </p:txBody>
       </p:sp>
@@ -3742,21 +2330,21 @@
           <a:bodyPr wrap="square" lIns="0" tIns="0" rIns="0" bIns="0" rtlCol="0" anchor="ctr"/>
           <a:lstStyle/>
           <a:p>
-            <a:pPr indent="0" marL="0">
-              <a:buNone/>
-            </a:pPr>
-            <a:r>
-              <a:rPr lang="en-US" sz="1050" b="1" dirty="0">
+            <a:pPr marL="0" indent="0">
+              <a:buNone/>
+            </a:pPr>
+            <a:r>
+              <a:rPr lang="en-US" sz="1050" b="1">
                 <a:solidFill>
                   <a:srgbClr val="0F172A"/>
                 </a:solidFill>
-                <a:latin typeface="Malgun Gothic" pitchFamily="34" charset="0"/>
-                <a:ea typeface="Malgun Gothic" pitchFamily="34" charset="-122"/>
-                <a:cs typeface="Malgun Gothic" pitchFamily="34" charset="-120"/>
+                <a:latin typeface="Malgun Gothic"/>
+                <a:ea typeface="Malgun Gothic"/>
+                <a:cs typeface="Malgun Gothic"/>
               </a:rPr>
               <a:t>① 경영진 보고용 16:9 와이드 디자인 자동 적용</a:t>
             </a:r>
-            <a:endParaRPr lang="en-US" sz="1050" dirty="0"/>
+            <a:endParaRPr lang="en-US" sz="1050"/>
           </a:p>
         </p:txBody>
       </p:sp>
@@ -3781,24 +2369,24 @@
           <a:bodyPr wrap="square" lIns="0" tIns="0" rIns="0" bIns="0" rtlCol="0" anchor="ctr"/>
           <a:lstStyle/>
           <a:p>
-            <a:pPr indent="0" marL="0">
+            <a:pPr marL="0" indent="0">
               <a:lnSpc>
                 <a:spcPts val="1350"/>
               </a:lnSpc>
               <a:buNone/>
             </a:pPr>
             <a:r>
-              <a:rPr lang="en-US" sz="880" dirty="0">
+              <a:rPr lang="en-US" sz="880">
                 <a:solidFill>
                   <a:srgbClr val="475569"/>
                 </a:solidFill>
-                <a:latin typeface="Malgun Gothic" pitchFamily="34" charset="0"/>
-                <a:ea typeface="Malgun Gothic" pitchFamily="34" charset="-122"/>
-                <a:cs typeface="Malgun Gothic" pitchFamily="34" charset="-120"/>
+                <a:latin typeface="Malgun Gothic"/>
+                <a:ea typeface="Malgun Gothic"/>
+                <a:cs typeface="Malgun Gothic"/>
               </a:rPr>
               <a:t>표지, 전사 총괄 KPI 요약, 재원·용도 2대 도넛 차트, 클럽별 소진율 바 차트, 10개 클럽 종합 비교표, 상세 활동 내역까지 풀 패키지 슬라이드 자동 생성</a:t>
             </a:r>
-            <a:endParaRPr lang="en-US" sz="880" dirty="0"/>
+            <a:endParaRPr lang="en-US" sz="880"/>
           </a:p>
         </p:txBody>
       </p:sp>
@@ -3823,21 +2411,21 @@
           <a:bodyPr wrap="square" lIns="0" tIns="0" rIns="0" bIns="0" rtlCol="0" anchor="ctr"/>
           <a:lstStyle/>
           <a:p>
-            <a:pPr indent="0" marL="0">
-              <a:buNone/>
-            </a:pPr>
-            <a:r>
-              <a:rPr lang="en-US" sz="1050" b="1" dirty="0">
+            <a:pPr marL="0" indent="0">
+              <a:buNone/>
+            </a:pPr>
+            <a:r>
+              <a:rPr lang="en-US" sz="1050" b="1">
                 <a:solidFill>
                   <a:srgbClr val="0F172A"/>
                 </a:solidFill>
-                <a:latin typeface="Malgun Gothic" pitchFamily="34" charset="0"/>
-                <a:ea typeface="Malgun Gothic" pitchFamily="34" charset="-122"/>
-                <a:cs typeface="Malgun Gothic" pitchFamily="34" charset="-120"/>
+                <a:latin typeface="Malgun Gothic"/>
+                <a:ea typeface="Malgun Gothic"/>
+                <a:cs typeface="Malgun Gothic"/>
               </a:rPr>
               <a:t>② 데이터 100% 실시간 동기화 및 오차 제로</a:t>
             </a:r>
-            <a:endParaRPr lang="en-US" sz="1050" dirty="0"/>
+            <a:endParaRPr lang="en-US" sz="1050"/>
           </a:p>
         </p:txBody>
       </p:sp>
@@ -3862,24 +2450,24 @@
           <a:bodyPr wrap="square" lIns="0" tIns="0" rIns="0" bIns="0" rtlCol="0" anchor="ctr"/>
           <a:lstStyle/>
           <a:p>
-            <a:pPr indent="0" marL="0">
+            <a:pPr marL="0" indent="0">
               <a:lnSpc>
                 <a:spcPts val="1350"/>
               </a:lnSpc>
               <a:buNone/>
             </a:pPr>
             <a:r>
-              <a:rPr lang="en-US" sz="880" dirty="0">
+              <a:rPr lang="en-US" sz="880">
                 <a:solidFill>
                   <a:srgbClr val="475569"/>
                 </a:solidFill>
-                <a:latin typeface="Malgun Gothic" pitchFamily="34" charset="0"/>
-                <a:ea typeface="Malgun Gothic" pitchFamily="34" charset="-122"/>
-                <a:cs typeface="Malgun Gothic" pitchFamily="34" charset="-120"/>
+                <a:latin typeface="Malgun Gothic"/>
+                <a:ea typeface="Malgun Gothic"/>
+                <a:cs typeface="Malgun Gothic"/>
               </a:rPr>
               <a:t>총 집행액, 연간 예산, 회사 지원금 비율, 임직원 자부담, 상품비 등 당일 최신 확정 데이터가 오차 없이 즉시 차트화</a:t>
             </a:r>
-            <a:endParaRPr lang="en-US" sz="880" dirty="0"/>
+            <a:endParaRPr lang="en-US" sz="880"/>
           </a:p>
         </p:txBody>
       </p:sp>
@@ -3904,21 +2492,21 @@
           <a:bodyPr wrap="square" lIns="0" tIns="0" rIns="0" bIns="0" rtlCol="0" anchor="ctr"/>
           <a:lstStyle/>
           <a:p>
-            <a:pPr indent="0" marL="0">
-              <a:buNone/>
-            </a:pPr>
-            <a:r>
-              <a:rPr lang="en-US" sz="1050" b="1" dirty="0">
+            <a:pPr marL="0" indent="0">
+              <a:buNone/>
+            </a:pPr>
+            <a:r>
+              <a:rPr lang="en-US" sz="1050" b="1">
                 <a:solidFill>
                   <a:srgbClr val="0F172A"/>
                 </a:solidFill>
-                <a:latin typeface="Malgun Gothic" pitchFamily="34" charset="0"/>
-                <a:ea typeface="Malgun Gothic" pitchFamily="34" charset="-122"/>
-                <a:cs typeface="Malgun Gothic" pitchFamily="34" charset="-120"/>
+                <a:latin typeface="Malgun Gothic"/>
+                <a:ea typeface="Malgun Gothic"/>
+                <a:cs typeface="Malgun Gothic"/>
               </a:rPr>
               <a:t>③ 즉시 편집 가능한 네이티브 PPTX 파일 다운로드</a:t>
             </a:r>
-            <a:endParaRPr lang="en-US" sz="1050" dirty="0"/>
+            <a:endParaRPr lang="en-US" sz="1050"/>
           </a:p>
         </p:txBody>
       </p:sp>
@@ -3943,24 +2531,24 @@
           <a:bodyPr wrap="square" lIns="0" tIns="0" rIns="0" bIns="0" rtlCol="0" anchor="ctr"/>
           <a:lstStyle/>
           <a:p>
-            <a:pPr indent="0" marL="0">
+            <a:pPr marL="0" indent="0">
               <a:lnSpc>
                 <a:spcPts val="1350"/>
               </a:lnSpc>
               <a:buNone/>
             </a:pPr>
             <a:r>
-              <a:rPr lang="en-US" sz="880" dirty="0">
+              <a:rPr lang="en-US" sz="880">
                 <a:solidFill>
                   <a:srgbClr val="475569"/>
                 </a:solidFill>
-                <a:latin typeface="Malgun Gothic" pitchFamily="34" charset="0"/>
-                <a:ea typeface="Malgun Gothic" pitchFamily="34" charset="-122"/>
-                <a:cs typeface="Malgun Gothic" pitchFamily="34" charset="-120"/>
+                <a:latin typeface="Malgun Gothic"/>
+                <a:ea typeface="Malgun Gothic"/>
+                <a:cs typeface="Malgun Gothic"/>
               </a:rPr>
               <a:t>단순 캡처 이미지가 아니라 파워포인트 도형, 표, 차트 객체로 생성되므로 다운로드 후 발표자가 폰트, 색상, 코멘트를 자유롭게 추가 편집 가능</a:t>
             </a:r>
-            <a:endParaRPr lang="en-US" sz="880" dirty="0"/>
+            <a:endParaRPr lang="en-US" sz="880"/>
           </a:p>
         </p:txBody>
       </p:sp>
@@ -4012,21 +2600,21 @@
           <a:bodyPr wrap="square" lIns="0" tIns="0" rIns="0" bIns="0" rtlCol="0" anchor="ctr"/>
           <a:lstStyle/>
           <a:p>
-            <a:pPr algn="ctr" indent="0" marL="0">
-              <a:buNone/>
-            </a:pPr>
-            <a:r>
-              <a:rPr lang="en-US" sz="900" b="1" dirty="0">
+            <a:pPr marL="0" indent="0" algn="ctr">
+              <a:buNone/>
+            </a:pPr>
+            <a:r>
+              <a:rPr lang="en-US" sz="900" b="1">
                 <a:solidFill>
                   <a:srgbClr val="92400E"/>
                 </a:solidFill>
-                <a:latin typeface="Malgun Gothic" pitchFamily="34" charset="0"/>
-                <a:ea typeface="Malgun Gothic" pitchFamily="34" charset="-122"/>
-                <a:cs typeface="Malgun Gothic" pitchFamily="34" charset="-120"/>
+                <a:latin typeface="Malgun Gothic"/>
+                <a:ea typeface="Malgun Gothic"/>
+                <a:cs typeface="Malgun Gothic"/>
               </a:rPr>
               <a:t>📥 [PPTX 다운로드] 클릭 ➔ 3초 만에 파일 다운로드 완료! 연말 감사 및 예산 심의 보고 완벽 대응!</a:t>
             </a:r>
-            <a:endParaRPr lang="en-US" sz="900" dirty="0"/>
+            <a:endParaRPr lang="en-US" sz="900"/>
           </a:p>
         </p:txBody>
       </p:sp>
@@ -4126,21 +2714,21 @@
           <a:bodyPr wrap="square" lIns="0" tIns="0" rIns="0" bIns="0" rtlCol="0" anchor="ctr"/>
           <a:lstStyle/>
           <a:p>
-            <a:pPr indent="0" marL="0">
-              <a:buNone/>
-            </a:pPr>
-            <a:r>
-              <a:rPr lang="en-US" sz="1800" b="1" dirty="0">
+            <a:pPr marL="0" indent="0">
+              <a:buNone/>
+            </a:pPr>
+            <a:r>
+              <a:rPr lang="en-US" sz="1800" b="1">
                 <a:solidFill>
                   <a:srgbClr val="0F172A"/>
                 </a:solidFill>
-                <a:latin typeface="Malgun Gothic" pitchFamily="34" charset="0"/>
-                <a:ea typeface="Malgun Gothic" pitchFamily="34" charset="-122"/>
-                <a:cs typeface="Malgun Gothic" pitchFamily="34" charset="-120"/>
+                <a:latin typeface="Malgun Gothic"/>
+                <a:ea typeface="Malgun Gothic"/>
+                <a:cs typeface="Malgun Gothic"/>
               </a:rPr>
               <a:t>자주 묻는 질문 (FAQ) &amp; 클럽 운영 지원 안내</a:t>
             </a:r>
-            <a:endParaRPr lang="en-US" sz="1800" dirty="0"/>
+            <a:endParaRPr lang="en-US" sz="1800"/>
           </a:p>
         </p:txBody>
       </p:sp>
@@ -4165,21 +2753,21 @@
           <a:bodyPr wrap="square" lIns="0" tIns="0" rIns="0" bIns="0" rtlCol="0" anchor="ctr"/>
           <a:lstStyle/>
           <a:p>
-            <a:pPr indent="0" marL="0">
-              <a:buNone/>
-            </a:pPr>
-            <a:r>
-              <a:rPr lang="en-US" sz="1000" dirty="0">
+            <a:pPr marL="0" indent="0">
+              <a:buNone/>
+            </a:pPr>
+            <a:r>
+              <a:rPr lang="en-US" sz="1000">
                 <a:solidFill>
                   <a:srgbClr val="475569"/>
                 </a:solidFill>
-                <a:latin typeface="Malgun Gothic" pitchFamily="34" charset="0"/>
-                <a:ea typeface="Malgun Gothic" pitchFamily="34" charset="-122"/>
-                <a:cs typeface="Malgun Gothic" pitchFamily="34" charset="-120"/>
+                <a:latin typeface="Malgun Gothic"/>
+                <a:ea typeface="Malgun Gothic"/>
+                <a:cs typeface="Malgun Gothic"/>
               </a:rPr>
               <a:t>정산 시스템 사용 중 궁금한 점과 특수 상황 처리 방법입니다.</a:t>
             </a:r>
-            <a:endParaRPr lang="en-US" sz="1000" dirty="0"/>
+            <a:endParaRPr lang="en-US" sz="1000"/>
           </a:p>
         </p:txBody>
       </p:sp>
@@ -4231,21 +2819,21 @@
           <a:bodyPr wrap="square" lIns="0" tIns="0" rIns="0" bIns="0" rtlCol="0" anchor="ctr"/>
           <a:lstStyle/>
           <a:p>
-            <a:pPr indent="0" marL="0">
-              <a:buNone/>
-            </a:pPr>
-            <a:r>
-              <a:rPr lang="en-US" sz="980" b="1" dirty="0">
+            <a:pPr marL="0" indent="0">
+              <a:buNone/>
+            </a:pPr>
+            <a:r>
+              <a:rPr lang="en-US" sz="980" b="1">
                 <a:solidFill>
                   <a:srgbClr val="2563EB"/>
                 </a:solidFill>
-                <a:latin typeface="Malgun Gothic" pitchFamily="34" charset="0"/>
-                <a:ea typeface="Malgun Gothic" pitchFamily="34" charset="-122"/>
-                <a:cs typeface="Malgun Gothic" pitchFamily="34" charset="-120"/>
+                <a:latin typeface="Malgun Gothic"/>
+                <a:ea typeface="Malgun Gothic"/>
+                <a:cs typeface="Malgun Gothic"/>
               </a:rPr>
               <a:t>Q1. 인당 지원 한도(85,000원)를 초과하는 특별 행사는 어떻게 하나요?</a:t>
             </a:r>
-            <a:endParaRPr lang="en-US" sz="980" dirty="0"/>
+            <a:endParaRPr lang="en-US" sz="980"/>
           </a:p>
         </p:txBody>
       </p:sp>
@@ -4270,24 +2858,24 @@
           <a:bodyPr wrap="square" lIns="0" tIns="0" rIns="0" bIns="0" rtlCol="0" anchor="ctr"/>
           <a:lstStyle/>
           <a:p>
-            <a:pPr indent="0" marL="0">
+            <a:pPr marL="0" indent="0">
               <a:lnSpc>
                 <a:spcPts val="1350"/>
               </a:lnSpc>
               <a:buNone/>
             </a:pPr>
             <a:r>
-              <a:rPr lang="en-US" sz="850" dirty="0">
+              <a:rPr lang="en-US" sz="850">
                 <a:solidFill>
                   <a:srgbClr val="334155"/>
                 </a:solidFill>
-                <a:latin typeface="Malgun Gothic" pitchFamily="34" charset="0"/>
-                <a:ea typeface="Malgun Gothic" pitchFamily="34" charset="-122"/>
-                <a:cs typeface="Malgun Gothic" pitchFamily="34" charset="-120"/>
+                <a:latin typeface="Malgun Gothic"/>
+                <a:ea typeface="Malgun Gothic"/>
+                <a:cs typeface="Malgun Gothic"/>
               </a:rPr>
               <a:t>A: 임원진 사전 승인을 득한 특별 행사는 관리자(회장단)가 클럽 관리 메뉴에서 해당 클럽의 [1회성 초과 지원 승인] 토글을 활성화하여 잔여 예산 내에서 최대치로 정산할 수 있습니다 (정산 확정 시 1회 사용 후 자동 리셋).</a:t>
             </a:r>
-            <a:endParaRPr lang="en-US" sz="850" dirty="0"/>
+            <a:endParaRPr lang="en-US" sz="850"/>
           </a:p>
         </p:txBody>
       </p:sp>
@@ -4339,21 +2927,21 @@
           <a:bodyPr wrap="square" lIns="0" tIns="0" rIns="0" bIns="0" rtlCol="0" anchor="ctr"/>
           <a:lstStyle/>
           <a:p>
-            <a:pPr indent="0" marL="0">
-              <a:buNone/>
-            </a:pPr>
-            <a:r>
-              <a:rPr lang="en-US" sz="980" b="1" dirty="0">
+            <a:pPr marL="0" indent="0">
+              <a:buNone/>
+            </a:pPr>
+            <a:r>
+              <a:rPr lang="en-US" sz="980" b="1">
                 <a:solidFill>
                   <a:srgbClr val="2563EB"/>
                 </a:solidFill>
-                <a:latin typeface="Malgun Gothic" pitchFamily="34" charset="0"/>
-                <a:ea typeface="Malgun Gothic" pitchFamily="34" charset="-122"/>
-                <a:cs typeface="Malgun Gothic" pitchFamily="34" charset="-120"/>
+                <a:latin typeface="Malgun Gothic"/>
+                <a:ea typeface="Malgun Gothic"/>
+                <a:cs typeface="Malgun Gothic"/>
               </a:rPr>
               <a:t>Q2. 실제 영수증 상황에 맞춰 자부담 금액을 수동 수정할 수 있나요?</a:t>
             </a:r>
-            <a:endParaRPr lang="en-US" sz="980" dirty="0"/>
+            <a:endParaRPr lang="en-US" sz="980"/>
           </a:p>
         </p:txBody>
       </p:sp>
@@ -4378,24 +2966,24 @@
           <a:bodyPr wrap="square" lIns="0" tIns="0" rIns="0" bIns="0" rtlCol="0" anchor="ctr"/>
           <a:lstStyle/>
           <a:p>
-            <a:pPr indent="0" marL="0">
+            <a:pPr marL="0" indent="0">
               <a:lnSpc>
                 <a:spcPts val="1350"/>
               </a:lnSpc>
               <a:buNone/>
             </a:pPr>
             <a:r>
-              <a:rPr lang="en-US" sz="850" dirty="0">
+              <a:rPr lang="en-US" sz="850">
                 <a:solidFill>
                   <a:srgbClr val="334155"/>
                 </a:solidFill>
-                <a:latin typeface="Malgun Gothic" pitchFamily="34" charset="0"/>
-                <a:ea typeface="Malgun Gothic" pitchFamily="34" charset="-122"/>
-                <a:cs typeface="Malgun Gothic" pitchFamily="34" charset="-120"/>
+                <a:latin typeface="Malgun Gothic"/>
+                <a:ea typeface="Malgun Gothic"/>
+                <a:cs typeface="Malgun Gothic"/>
               </a:rPr>
               <a:t>A: 네! 결과 카드의 [총 자부담 금액 (수정 가능)] 입력창에서 원하는 금액을 직접 입력하시면 수동 입력값이 최우선 반영되어 최종 지원금이 자동 재조정됩니다.</a:t>
             </a:r>
-            <a:endParaRPr lang="en-US" sz="850" dirty="0"/>
+            <a:endParaRPr lang="en-US" sz="850"/>
           </a:p>
         </p:txBody>
       </p:sp>
@@ -4447,21 +3035,21 @@
           <a:bodyPr wrap="square" lIns="0" tIns="0" rIns="0" bIns="0" rtlCol="0" anchor="ctr"/>
           <a:lstStyle/>
           <a:p>
-            <a:pPr indent="0" marL="0">
-              <a:buNone/>
-            </a:pPr>
-            <a:r>
-              <a:rPr lang="en-US" sz="980" b="1" dirty="0">
+            <a:pPr marL="0" indent="0">
+              <a:buNone/>
+            </a:pPr>
+            <a:r>
+              <a:rPr lang="en-US" sz="980" b="1">
                 <a:solidFill>
                   <a:srgbClr val="2563EB"/>
                 </a:solidFill>
-                <a:latin typeface="Malgun Gothic" pitchFamily="34" charset="0"/>
-                <a:ea typeface="Malgun Gothic" pitchFamily="34" charset="-122"/>
-                <a:cs typeface="Malgun Gothic" pitchFamily="34" charset="-120"/>
+                <a:latin typeface="Malgun Gothic"/>
+                <a:ea typeface="Malgun Gothic"/>
+                <a:cs typeface="Malgun Gothic"/>
               </a:rPr>
               <a:t>Q3. 모바일 스마트폰에서도 컴퓨터와 똑같이 사용할 수 있나요?</a:t>
             </a:r>
-            <a:endParaRPr lang="en-US" sz="980" dirty="0"/>
+            <a:endParaRPr lang="en-US" sz="980"/>
           </a:p>
         </p:txBody>
       </p:sp>
@@ -4486,24 +3074,24 @@
           <a:bodyPr wrap="square" lIns="0" tIns="0" rIns="0" bIns="0" rtlCol="0" anchor="ctr"/>
           <a:lstStyle/>
           <a:p>
-            <a:pPr indent="0" marL="0">
+            <a:pPr marL="0" indent="0">
               <a:lnSpc>
                 <a:spcPts val="1350"/>
               </a:lnSpc>
               <a:buNone/>
             </a:pPr>
             <a:r>
-              <a:rPr lang="en-US" sz="850" dirty="0">
+              <a:rPr lang="en-US" sz="850">
                 <a:solidFill>
                   <a:srgbClr val="334155"/>
                 </a:solidFill>
-                <a:latin typeface="Malgun Gothic" pitchFamily="34" charset="0"/>
-                <a:ea typeface="Malgun Gothic" pitchFamily="34" charset="-122"/>
-                <a:cs typeface="Malgun Gothic" pitchFamily="34" charset="-120"/>
+                <a:latin typeface="Malgun Gothic"/>
+                <a:ea typeface="Malgun Gothic"/>
+                <a:cs typeface="Malgun Gothic"/>
               </a:rPr>
               <a:t>A: 100% 동일합니다. 반응형 모바일 PWA로 개발되어 스마트폰 화면에서도 터치 키패드, 명부 검색, 영수증 사진 업로드, 엑셀 다운로드가 원활하게 동작합니다.</a:t>
             </a:r>
-            <a:endParaRPr lang="en-US" sz="850" dirty="0"/>
+            <a:endParaRPr lang="en-US" sz="850"/>
           </a:p>
         </p:txBody>
       </p:sp>
@@ -4555,21 +3143,21 @@
           <a:bodyPr wrap="square" lIns="0" tIns="0" rIns="0" bIns="0" rtlCol="0" anchor="ctr"/>
           <a:lstStyle/>
           <a:p>
-            <a:pPr indent="0" marL="0">
-              <a:buNone/>
-            </a:pPr>
-            <a:r>
-              <a:rPr lang="en-US" sz="980" b="1" dirty="0">
+            <a:pPr marL="0" indent="0">
+              <a:buNone/>
+            </a:pPr>
+            <a:r>
+              <a:rPr lang="en-US" sz="980" b="1">
                 <a:solidFill>
                   <a:srgbClr val="2563EB"/>
                 </a:solidFill>
-                <a:latin typeface="Malgun Gothic" pitchFamily="34" charset="0"/>
-                <a:ea typeface="Malgun Gothic" pitchFamily="34" charset="-122"/>
-                <a:cs typeface="Malgun Gothic" pitchFamily="34" charset="-120"/>
+                <a:latin typeface="Malgun Gothic"/>
+                <a:ea typeface="Malgun Gothic"/>
+                <a:cs typeface="Malgun Gothic"/>
               </a:rPr>
               <a:t>Q4. 새해가 되면 전사원 명부의 참석 횟수는 삭제되나요?</a:t>
             </a:r>
-            <a:endParaRPr lang="en-US" sz="980" dirty="0"/>
+            <a:endParaRPr lang="en-US" sz="980"/>
           </a:p>
         </p:txBody>
       </p:sp>
@@ -4594,24 +3182,24 @@
           <a:bodyPr wrap="square" lIns="0" tIns="0" rIns="0" bIns="0" rtlCol="0" anchor="ctr"/>
           <a:lstStyle/>
           <a:p>
-            <a:pPr indent="0" marL="0">
+            <a:pPr marL="0" indent="0">
               <a:lnSpc>
                 <a:spcPts val="1350"/>
               </a:lnSpc>
               <a:buNone/>
             </a:pPr>
             <a:r>
-              <a:rPr lang="en-US" sz="850" dirty="0">
+              <a:rPr lang="en-US" sz="850">
                 <a:solidFill>
                   <a:srgbClr val="334155"/>
                 </a:solidFill>
-                <a:latin typeface="Malgun Gothic" pitchFamily="34" charset="0"/>
-                <a:ea typeface="Malgun Gothic" pitchFamily="34" charset="-122"/>
-                <a:cs typeface="Malgun Gothic" pitchFamily="34" charset="-120"/>
+                <a:latin typeface="Malgun Gothic"/>
+                <a:ea typeface="Malgun Gothic"/>
+                <a:cs typeface="Malgun Gothic"/>
               </a:rPr>
               <a:t>A: 삭제되지 않습니다! 매년 1월 1일 첫 로그인 시 직전 연도 카운트는 연도별 히스토리로 안전하게 영구 아카이빙된 후 새해 카운트만 0회로 자동 리셋됩니다.</a:t>
             </a:r>
-            <a:endParaRPr lang="en-US" sz="850" dirty="0"/>
+            <a:endParaRPr lang="en-US" sz="850"/>
           </a:p>
         </p:txBody>
       </p:sp>
@@ -4663,21 +3251,21 @@
           <a:bodyPr wrap="square" lIns="0" tIns="0" rIns="0" bIns="0" rtlCol="0" anchor="ctr"/>
           <a:lstStyle/>
           <a:p>
-            <a:pPr indent="0" marL="0">
-              <a:buNone/>
-            </a:pPr>
-            <a:r>
-              <a:rPr lang="en-US" sz="1150" b="1" dirty="0">
+            <a:pPr marL="0" indent="0">
+              <a:buNone/>
+            </a:pPr>
+            <a:r>
+              <a:rPr lang="en-US" sz="1150" b="1">
                 <a:solidFill>
                   <a:srgbClr val="1D4ED8"/>
                 </a:solidFill>
-                <a:latin typeface="Malgun Gothic" pitchFamily="34" charset="0"/>
-                <a:ea typeface="Malgun Gothic" pitchFamily="34" charset="-122"/>
-                <a:cs typeface="Malgun Gothic" pitchFamily="34" charset="-120"/>
+                <a:latin typeface="Malgun Gothic"/>
+                <a:ea typeface="Malgun Gothic"/>
+                <a:cs typeface="Malgun Gothic"/>
               </a:rPr>
               <a:t>👏 경청해 주셔서 감사합니다! 즐겁고 투명한 사내 동아리 활동을 응원합니다.</a:t>
             </a:r>
-            <a:endParaRPr lang="en-US" sz="1150" dirty="0"/>
+            <a:endParaRPr lang="en-US" sz="1150"/>
           </a:p>
         </p:txBody>
       </p:sp>
@@ -4702,21 +3290,21 @@
           <a:bodyPr wrap="square" lIns="0" tIns="0" rIns="0" bIns="0" rtlCol="0" anchor="ctr"/>
           <a:lstStyle/>
           <a:p>
-            <a:pPr indent="0" marL="0">
-              <a:buNone/>
-            </a:pPr>
-            <a:r>
-              <a:rPr lang="en-US" sz="900" dirty="0">
+            <a:pPr marL="0" indent="0">
+              <a:buNone/>
+            </a:pPr>
+            <a:r>
+              <a:rPr lang="en-US" sz="900">
                 <a:solidFill>
                   <a:srgbClr val="2563EB"/>
                 </a:solidFill>
-                <a:latin typeface="Malgun Gothic" pitchFamily="34" charset="0"/>
-                <a:ea typeface="Malgun Gothic" pitchFamily="34" charset="-122"/>
-                <a:cs typeface="Malgun Gothic" pitchFamily="34" charset="-120"/>
+                <a:latin typeface="Malgun Gothic"/>
+                <a:ea typeface="Malgun Gothic"/>
+                <a:cs typeface="Malgun Gothic"/>
               </a:rPr>
               <a:t>시스템 문의 및 신규 동아리 등록 신청: 김종필 (사내 메신저 / 시스템 개발 담당)</a:t>
             </a:r>
-            <a:endParaRPr lang="en-US" sz="900" dirty="0"/>
+            <a:endParaRPr lang="en-US" sz="900"/>
           </a:p>
         </p:txBody>
       </p:sp>
@@ -4768,21 +3356,21 @@
           <a:bodyPr wrap="square" lIns="0" tIns="0" rIns="0" bIns="0" rtlCol="0" anchor="ctr"/>
           <a:lstStyle/>
           <a:p>
-            <a:pPr algn="ctr" indent="0" marL="0">
-              <a:buNone/>
-            </a:pPr>
-            <a:r>
-              <a:rPr lang="en-US" sz="1000" b="1" dirty="0">
+            <a:pPr marL="0" indent="0" algn="ctr">
+              <a:buNone/>
+            </a:pPr>
+            <a:r>
+              <a:rPr lang="en-US" sz="1000" b="1">
                 <a:solidFill>
                   <a:srgbClr val="FFFFFF"/>
                 </a:solidFill>
-                <a:latin typeface="Malgun Gothic" pitchFamily="34" charset="0"/>
-                <a:ea typeface="Malgun Gothic" pitchFamily="34" charset="-122"/>
-                <a:cs typeface="Malgun Gothic" pitchFamily="34" charset="-120"/>
+                <a:latin typeface="Malgun Gothic"/>
+                <a:ea typeface="Malgun Gothic"/>
+                <a:cs typeface="Malgun Gothic"/>
               </a:rPr>
               <a:t>⚡ 지금 바로 시작하기</a:t>
             </a:r>
-            <a:endParaRPr lang="en-US" sz="1000" dirty="0"/>
+            <a:endParaRPr lang="en-US" sz="1000"/>
           </a:p>
         </p:txBody>
       </p:sp>
@@ -4909,21 +3497,21 @@
           <a:bodyPr wrap="square" lIns="0" tIns="0" rIns="0" bIns="0" rtlCol="0" anchor="ctr"/>
           <a:lstStyle/>
           <a:p>
-            <a:pPr algn="ctr" indent="0" marL="0">
-              <a:buNone/>
-            </a:pPr>
-            <a:r>
-              <a:rPr lang="en-US" sz="900" b="1" dirty="0">
+            <a:pPr marL="0" indent="0" algn="ctr">
+              <a:buNone/>
+            </a:pPr>
+            <a:r>
+              <a:rPr lang="en-US" sz="900" b="1">
                 <a:solidFill>
                   <a:srgbClr val="1D4ED8"/>
                 </a:solidFill>
-                <a:latin typeface="Malgun Gothic" pitchFamily="34" charset="0"/>
-                <a:ea typeface="Malgun Gothic" pitchFamily="34" charset="-122"/>
-                <a:cs typeface="Malgun Gothic" pitchFamily="34" charset="-120"/>
+                <a:latin typeface="Malgun Gothic"/>
+                <a:ea typeface="Malgun Gothic"/>
+                <a:cs typeface="Malgun Gothic"/>
               </a:rPr>
               <a:t>3M 사내 클럽 비용 정산 시스템</a:t>
             </a:r>
-            <a:endParaRPr lang="en-US" sz="900" dirty="0"/>
+            <a:endParaRPr lang="en-US" sz="900"/>
           </a:p>
         </p:txBody>
       </p:sp>
@@ -4948,21 +3536,21 @@
           <a:bodyPr wrap="square" lIns="0" tIns="0" rIns="0" bIns="0" rtlCol="0" anchor="ctr"/>
           <a:lstStyle/>
           <a:p>
-            <a:pPr indent="0" marL="0">
-              <a:buNone/>
-            </a:pPr>
-            <a:r>
-              <a:rPr lang="en-US" sz="1800" b="1" dirty="0">
+            <a:pPr marL="0" indent="0">
+              <a:buNone/>
+            </a:pPr>
+            <a:r>
+              <a:rPr lang="en-US" sz="1800" b="1">
                 <a:solidFill>
                   <a:srgbClr val="0F172A"/>
                 </a:solidFill>
-                <a:latin typeface="Malgun Gothic" pitchFamily="34" charset="0"/>
-                <a:ea typeface="Malgun Gothic" pitchFamily="34" charset="-122"/>
-                <a:cs typeface="Malgun Gothic" pitchFamily="34" charset="-120"/>
+                <a:latin typeface="Malgun Gothic"/>
+                <a:ea typeface="Malgun Gothic"/>
+                <a:cs typeface="Malgun Gothic"/>
               </a:rPr>
               <a:t>정산 전체 프로세스: 4단계 완성 로드맵</a:t>
             </a:r>
-            <a:endParaRPr lang="en-US" sz="1800" dirty="0"/>
+            <a:endParaRPr lang="en-US" sz="1800"/>
           </a:p>
         </p:txBody>
       </p:sp>
@@ -4987,21 +3575,21 @@
           <a:bodyPr wrap="square" lIns="0" tIns="0" rIns="0" bIns="0" rtlCol="0" anchor="ctr"/>
           <a:lstStyle/>
           <a:p>
-            <a:pPr indent="0" marL="0">
-              <a:buNone/>
-            </a:pPr>
-            <a:r>
-              <a:rPr lang="en-US" sz="1050" dirty="0">
+            <a:pPr marL="0" indent="0">
+              <a:buNone/>
+            </a:pPr>
+            <a:r>
+              <a:rPr lang="en-US" sz="1050">
                 <a:solidFill>
                   <a:srgbClr val="475569"/>
                 </a:solidFill>
-                <a:latin typeface="Malgun Gothic" pitchFamily="34" charset="0"/>
-                <a:ea typeface="Malgun Gothic" pitchFamily="34" charset="-122"/>
-                <a:cs typeface="Malgun Gothic" pitchFamily="34" charset="-120"/>
+                <a:latin typeface="Malgun Gothic"/>
+                <a:ea typeface="Malgun Gothic"/>
+                <a:cs typeface="Malgun Gothic"/>
               </a:rPr>
               <a:t>복잡했던 서류 작성과 수기 계산 없이, 단 4단계 클릭만으로 공식 정산 품의가 완료됩니다.</a:t>
             </a:r>
-            <a:endParaRPr lang="en-US" sz="1050" dirty="0"/>
+            <a:endParaRPr lang="en-US" sz="1050"/>
           </a:p>
         </p:txBody>
       </p:sp>
@@ -5049,21 +3637,21 @@
           <a:bodyPr wrap="square" lIns="0" tIns="0" rIns="0" bIns="0" rtlCol="0" anchor="ctr"/>
           <a:lstStyle/>
           <a:p>
-            <a:pPr indent="0" marL="0">
-              <a:buNone/>
-            </a:pPr>
-            <a:r>
-              <a:rPr lang="en-US" sz="800" dirty="0">
+            <a:pPr marL="0" indent="0">
+              <a:buNone/>
+            </a:pPr>
+            <a:r>
+              <a:rPr lang="en-US" sz="800">
                 <a:solidFill>
                   <a:srgbClr val="64748B"/>
                 </a:solidFill>
-                <a:latin typeface="Malgun Gothic" pitchFamily="34" charset="0"/>
-                <a:ea typeface="Malgun Gothic" pitchFamily="34" charset="-122"/>
-                <a:cs typeface="Malgun Gothic" pitchFamily="34" charset="-120"/>
+                <a:latin typeface="Malgun Gothic"/>
+                <a:ea typeface="Malgun Gothic"/>
+                <a:cs typeface="Malgun Gothic"/>
               </a:rPr>
               <a:t>3M 사내 동아리·클럽 비용 정산기 (v1.6.310) | 실무 사용자 설명회</a:t>
             </a:r>
-            <a:endParaRPr lang="en-US" sz="800" dirty="0"/>
+            <a:endParaRPr lang="en-US" sz="800"/>
           </a:p>
         </p:txBody>
       </p:sp>
@@ -5088,21 +3676,21 @@
           <a:bodyPr wrap="square" lIns="0" tIns="0" rIns="0" bIns="0" rtlCol="0" anchor="ctr"/>
           <a:lstStyle/>
           <a:p>
-            <a:pPr algn="r" indent="0" marL="0">
-              <a:buNone/>
-            </a:pPr>
-            <a:r>
-              <a:rPr lang="en-US" sz="750" dirty="0">
+            <a:pPr marL="0" indent="0" algn="r">
+              <a:buNone/>
+            </a:pPr>
+            <a:r>
+              <a:rPr lang="en-US" sz="750">
                 <a:solidFill>
                   <a:srgbClr val="64748B"/>
                 </a:solidFill>
-                <a:latin typeface="Malgun Gothic" pitchFamily="34" charset="0"/>
-                <a:ea typeface="Malgun Gothic" pitchFamily="34" charset="-122"/>
-                <a:cs typeface="Malgun Gothic" pitchFamily="34" charset="-120"/>
+                <a:latin typeface="Malgun Gothic"/>
+                <a:ea typeface="Malgun Gothic"/>
+                <a:cs typeface="Malgun Gothic"/>
               </a:rPr>
               <a:t>COPYRIGHT © 2026 3M ALL RIGHTS RESERVED</a:t>
             </a:r>
-            <a:endParaRPr lang="en-US" sz="750" dirty="0"/>
+            <a:endParaRPr lang="en-US" sz="750"/>
           </a:p>
         </p:txBody>
       </p:sp>
@@ -5181,21 +3769,21 @@
           <a:bodyPr wrap="square" lIns="0" tIns="0" rIns="0" bIns="0" rtlCol="0" anchor="ctr"/>
           <a:lstStyle/>
           <a:p>
-            <a:pPr algn="ctr" indent="0" marL="0">
-              <a:buNone/>
-            </a:pPr>
-            <a:r>
-              <a:rPr lang="en-US" sz="900" b="1" dirty="0">
+            <a:pPr marL="0" indent="0" algn="ctr">
+              <a:buNone/>
+            </a:pPr>
+            <a:r>
+              <a:rPr lang="en-US" sz="900" b="1">
                 <a:solidFill>
                   <a:srgbClr val="2563EB"/>
                 </a:solidFill>
-                <a:latin typeface="Malgun Gothic" pitchFamily="34" charset="0"/>
-                <a:ea typeface="Malgun Gothic" pitchFamily="34" charset="-122"/>
-                <a:cs typeface="Malgun Gothic" pitchFamily="34" charset="-120"/>
+                <a:latin typeface="Malgun Gothic"/>
+                <a:ea typeface="Malgun Gothic"/>
+                <a:cs typeface="Malgun Gothic"/>
               </a:rPr>
               <a:t>STEP 1</a:t>
             </a:r>
-            <a:endParaRPr lang="en-US" sz="900" dirty="0"/>
+            <a:endParaRPr lang="en-US" sz="900"/>
           </a:p>
         </p:txBody>
       </p:sp>
@@ -5220,21 +3808,21 @@
           <a:bodyPr wrap="square" lIns="0" tIns="0" rIns="0" bIns="0" rtlCol="0" anchor="ctr"/>
           <a:lstStyle/>
           <a:p>
-            <a:pPr indent="0" marL="0">
-              <a:buNone/>
-            </a:pPr>
-            <a:r>
-              <a:rPr lang="en-US" sz="1200" b="1" dirty="0">
+            <a:pPr marL="0" indent="0">
+              <a:buNone/>
+            </a:pPr>
+            <a:r>
+              <a:rPr lang="en-US" sz="1200" b="1">
                 <a:solidFill>
                   <a:srgbClr val="0F172A"/>
                 </a:solidFill>
-                <a:latin typeface="Malgun Gothic" pitchFamily="34" charset="0"/>
-                <a:ea typeface="Malgun Gothic" pitchFamily="34" charset="-122"/>
-                <a:cs typeface="Malgun Gothic" pitchFamily="34" charset="-120"/>
+                <a:latin typeface="Malgun Gothic"/>
+                <a:ea typeface="Malgun Gothic"/>
+                <a:cs typeface="Malgun Gothic"/>
               </a:rPr>
               <a:t>간편 접속 &amp; 로그인</a:t>
             </a:r>
-            <a:endParaRPr lang="en-US" sz="1200" dirty="0"/>
+            <a:endParaRPr lang="en-US" sz="1200"/>
           </a:p>
         </p:txBody>
       </p:sp>
@@ -5259,44 +3847,44 @@
           <a:bodyPr wrap="square" lIns="0" tIns="0" rIns="0" bIns="0" rtlCol="0" anchor="ctr"/>
           <a:lstStyle/>
           <a:p>
-            <a:pPr indent="0" marL="0">
+            <a:pPr marL="0" indent="0">
               <a:lnSpc>
                 <a:spcPts val="1450"/>
               </a:lnSpc>
               <a:buNone/>
             </a:pPr>
             <a:r>
-              <a:rPr lang="en-US" sz="950" dirty="0">
+              <a:rPr lang="en-US" sz="950">
                 <a:solidFill>
                   <a:srgbClr val="475569"/>
                 </a:solidFill>
-                <a:latin typeface="Malgun Gothic" pitchFamily="34" charset="0"/>
-                <a:ea typeface="Malgun Gothic" pitchFamily="34" charset="-122"/>
-                <a:cs typeface="Malgun Gothic" pitchFamily="34" charset="-120"/>
+                <a:latin typeface="Malgun Gothic"/>
+                <a:ea typeface="Malgun Gothic"/>
+                <a:cs typeface="Malgun Gothic"/>
               </a:rPr>
               <a:t>사번 6자리 PIN 입력</a:t>
             </a:r>
-            <a:endParaRPr lang="en-US" sz="950" dirty="0"/>
-          </a:p>
-          <a:p>
-            <a:pPr indent="0" marL="0">
+            <a:endParaRPr lang="en-US" sz="950"/>
+          </a:p>
+          <a:p>
+            <a:pPr marL="0" indent="0">
               <a:lnSpc>
                 <a:spcPts val="1450"/>
               </a:lnSpc>
               <a:buNone/>
             </a:pPr>
             <a:r>
-              <a:rPr lang="en-US" sz="950" dirty="0">
+              <a:rPr lang="en-US" sz="950">
                 <a:solidFill>
                   <a:srgbClr val="475569"/>
                 </a:solidFill>
-                <a:latin typeface="Malgun Gothic" pitchFamily="34" charset="0"/>
-                <a:ea typeface="Malgun Gothic" pitchFamily="34" charset="-122"/>
-                <a:cs typeface="Malgun Gothic" pitchFamily="34" charset="-120"/>
+                <a:latin typeface="Malgun Gothic"/>
+                <a:ea typeface="Malgun Gothic"/>
+                <a:cs typeface="Malgun Gothic"/>
               </a:rPr>
               <a:t>(신규 회원은 1초 등록)</a:t>
             </a:r>
-            <a:endParaRPr lang="en-US" sz="950" dirty="0"/>
+            <a:endParaRPr lang="en-US" sz="950"/>
           </a:p>
         </p:txBody>
       </p:sp>
@@ -5348,21 +3936,21 @@
           <a:bodyPr wrap="square" lIns="0" tIns="0" rIns="0" bIns="0" rtlCol="0" anchor="ctr"/>
           <a:lstStyle/>
           <a:p>
-            <a:pPr algn="ctr" indent="0" marL="0">
-              <a:buNone/>
-            </a:pPr>
-            <a:r>
-              <a:rPr lang="en-US" sz="850" dirty="0">
+            <a:pPr marL="0" indent="0" algn="ctr">
+              <a:buNone/>
+            </a:pPr>
+            <a:r>
+              <a:rPr lang="en-US" sz="850">
                 <a:solidFill>
                   <a:srgbClr val="2563EB"/>
                 </a:solidFill>
-                <a:latin typeface="Malgun Gothic" pitchFamily="34" charset="0"/>
-                <a:ea typeface="Malgun Gothic" pitchFamily="34" charset="-122"/>
-                <a:cs typeface="Malgun Gothic" pitchFamily="34" charset="-120"/>
+                <a:latin typeface="Malgun Gothic"/>
+                <a:ea typeface="Malgun Gothic"/>
+                <a:cs typeface="Malgun Gothic"/>
               </a:rPr>
               <a:t>✓ 로그인 모달</a:t>
             </a:r>
-            <a:endParaRPr lang="en-US" sz="850" dirty="0"/>
+            <a:endParaRPr lang="en-US" sz="850"/>
           </a:p>
         </p:txBody>
       </p:sp>
@@ -5441,21 +4029,21 @@
           <a:bodyPr wrap="square" lIns="0" tIns="0" rIns="0" bIns="0" rtlCol="0" anchor="ctr"/>
           <a:lstStyle/>
           <a:p>
-            <a:pPr algn="ctr" indent="0" marL="0">
-              <a:buNone/>
-            </a:pPr>
-            <a:r>
-              <a:rPr lang="en-US" sz="900" b="1" dirty="0">
+            <a:pPr marL="0" indent="0" algn="ctr">
+              <a:buNone/>
+            </a:pPr>
+            <a:r>
+              <a:rPr lang="en-US" sz="900" b="1">
                 <a:solidFill>
                   <a:srgbClr val="2563EB"/>
                 </a:solidFill>
-                <a:latin typeface="Malgun Gothic" pitchFamily="34" charset="0"/>
-                <a:ea typeface="Malgun Gothic" pitchFamily="34" charset="-122"/>
-                <a:cs typeface="Malgun Gothic" pitchFamily="34" charset="-120"/>
+                <a:latin typeface="Malgun Gothic"/>
+                <a:ea typeface="Malgun Gothic"/>
+                <a:cs typeface="Malgun Gothic"/>
               </a:rPr>
               <a:t>STEP 2</a:t>
             </a:r>
-            <a:endParaRPr lang="en-US" sz="900" dirty="0"/>
+            <a:endParaRPr lang="en-US" sz="900"/>
           </a:p>
         </p:txBody>
       </p:sp>
@@ -5480,21 +4068,21 @@
           <a:bodyPr wrap="square" lIns="0" tIns="0" rIns="0" bIns="0" rtlCol="0" anchor="ctr"/>
           <a:lstStyle/>
           <a:p>
-            <a:pPr indent="0" marL="0">
-              <a:buNone/>
-            </a:pPr>
-            <a:r>
-              <a:rPr lang="en-US" sz="1200" b="1" dirty="0">
+            <a:pPr marL="0" indent="0">
+              <a:buNone/>
+            </a:pPr>
+            <a:r>
+              <a:rPr lang="en-US" sz="1200" b="1">
                 <a:solidFill>
                   <a:srgbClr val="0F172A"/>
                 </a:solidFill>
-                <a:latin typeface="Malgun Gothic" pitchFamily="34" charset="0"/>
-                <a:ea typeface="Malgun Gothic" pitchFamily="34" charset="-122"/>
-                <a:cs typeface="Malgun Gothic" pitchFamily="34" charset="-120"/>
+                <a:latin typeface="Malgun Gothic"/>
+                <a:ea typeface="Malgun Gothic"/>
+                <a:cs typeface="Malgun Gothic"/>
               </a:rPr>
               <a:t>참석자 명부 담기</a:t>
             </a:r>
-            <a:endParaRPr lang="en-US" sz="1200" dirty="0"/>
+            <a:endParaRPr lang="en-US" sz="1200"/>
           </a:p>
         </p:txBody>
       </p:sp>
@@ -5519,44 +4107,44 @@
           <a:bodyPr wrap="square" lIns="0" tIns="0" rIns="0" bIns="0" rtlCol="0" anchor="ctr"/>
           <a:lstStyle/>
           <a:p>
-            <a:pPr indent="0" marL="0">
+            <a:pPr marL="0" indent="0">
               <a:lnSpc>
                 <a:spcPts val="1450"/>
               </a:lnSpc>
               <a:buNone/>
             </a:pPr>
             <a:r>
-              <a:rPr lang="en-US" sz="950" dirty="0">
+              <a:rPr lang="en-US" sz="950">
                 <a:solidFill>
                   <a:srgbClr val="475569"/>
                 </a:solidFill>
-                <a:latin typeface="Malgun Gothic" pitchFamily="34" charset="0"/>
-                <a:ea typeface="Malgun Gothic" pitchFamily="34" charset="-122"/>
-                <a:cs typeface="Malgun Gothic" pitchFamily="34" charset="-120"/>
+                <a:latin typeface="Malgun Gothic"/>
+                <a:ea typeface="Malgun Gothic"/>
+                <a:cs typeface="Malgun Gothic"/>
               </a:rPr>
               <a:t>전사원 명부(1,317명) 검색</a:t>
             </a:r>
-            <a:endParaRPr lang="en-US" sz="950" dirty="0"/>
-          </a:p>
-          <a:p>
-            <a:pPr indent="0" marL="0">
+            <a:endParaRPr lang="en-US" sz="950"/>
+          </a:p>
+          <a:p>
+            <a:pPr marL="0" indent="0">
               <a:lnSpc>
                 <a:spcPts val="1450"/>
               </a:lnSpc>
               <a:buNone/>
             </a:pPr>
             <a:r>
-              <a:rPr lang="en-US" sz="950" dirty="0">
+              <a:rPr lang="en-US" sz="950">
                 <a:solidFill>
                   <a:srgbClr val="475569"/>
                 </a:solidFill>
-                <a:latin typeface="Malgun Gothic" pitchFamily="34" charset="0"/>
-                <a:ea typeface="Malgun Gothic" pitchFamily="34" charset="-122"/>
-                <a:cs typeface="Malgun Gothic" pitchFamily="34" charset="-120"/>
+                <a:latin typeface="Malgun Gothic"/>
+                <a:ea typeface="Malgun Gothic"/>
+                <a:cs typeface="Malgun Gothic"/>
               </a:rPr>
               <a:t>[추가] 버튼 1클릭 반영</a:t>
             </a:r>
-            <a:endParaRPr lang="en-US" sz="950" dirty="0"/>
+            <a:endParaRPr lang="en-US" sz="950"/>
           </a:p>
         </p:txBody>
       </p:sp>
@@ -5608,21 +4196,21 @@
           <a:bodyPr wrap="square" lIns="0" tIns="0" rIns="0" bIns="0" rtlCol="0" anchor="ctr"/>
           <a:lstStyle/>
           <a:p>
-            <a:pPr algn="ctr" indent="0" marL="0">
-              <a:buNone/>
-            </a:pPr>
-            <a:r>
-              <a:rPr lang="en-US" sz="850" dirty="0">
+            <a:pPr marL="0" indent="0" algn="ctr">
+              <a:buNone/>
+            </a:pPr>
+            <a:r>
+              <a:rPr lang="en-US" sz="850">
                 <a:solidFill>
                   <a:srgbClr val="2563EB"/>
                 </a:solidFill>
-                <a:latin typeface="Malgun Gothic" pitchFamily="34" charset="0"/>
-                <a:ea typeface="Malgun Gothic" pitchFamily="34" charset="-122"/>
-                <a:cs typeface="Malgun Gothic" pitchFamily="34" charset="-120"/>
+                <a:latin typeface="Malgun Gothic"/>
+                <a:ea typeface="Malgun Gothic"/>
+                <a:cs typeface="Malgun Gothic"/>
               </a:rPr>
               <a:t>✓ 명부 연동</a:t>
             </a:r>
-            <a:endParaRPr lang="en-US" sz="850" dirty="0"/>
+            <a:endParaRPr lang="en-US" sz="850"/>
           </a:p>
         </p:txBody>
       </p:sp>
@@ -5701,21 +4289,21 @@
           <a:bodyPr wrap="square" lIns="0" tIns="0" rIns="0" bIns="0" rtlCol="0" anchor="ctr"/>
           <a:lstStyle/>
           <a:p>
-            <a:pPr algn="ctr" indent="0" marL="0">
-              <a:buNone/>
-            </a:pPr>
-            <a:r>
-              <a:rPr lang="en-US" sz="900" b="1" dirty="0">
+            <a:pPr marL="0" indent="0" algn="ctr">
+              <a:buNone/>
+            </a:pPr>
+            <a:r>
+              <a:rPr lang="en-US" sz="900" b="1">
                 <a:solidFill>
                   <a:srgbClr val="D97706"/>
                 </a:solidFill>
-                <a:latin typeface="Malgun Gothic" pitchFamily="34" charset="0"/>
-                <a:ea typeface="Malgun Gothic" pitchFamily="34" charset="-122"/>
-                <a:cs typeface="Malgun Gothic" pitchFamily="34" charset="-120"/>
+                <a:latin typeface="Malgun Gothic"/>
+                <a:ea typeface="Malgun Gothic"/>
+                <a:cs typeface="Malgun Gothic"/>
               </a:rPr>
               <a:t>STEP 3</a:t>
             </a:r>
-            <a:endParaRPr lang="en-US" sz="900" dirty="0"/>
+            <a:endParaRPr lang="en-US" sz="900"/>
           </a:p>
         </p:txBody>
       </p:sp>
@@ -5740,21 +4328,21 @@
           <a:bodyPr wrap="square" lIns="0" tIns="0" rIns="0" bIns="0" rtlCol="0" anchor="ctr"/>
           <a:lstStyle/>
           <a:p>
-            <a:pPr indent="0" marL="0">
-              <a:buNone/>
-            </a:pPr>
-            <a:r>
-              <a:rPr lang="en-US" sz="1200" b="1" dirty="0">
+            <a:pPr marL="0" indent="0">
+              <a:buNone/>
+            </a:pPr>
+            <a:r>
+              <a:rPr lang="en-US" sz="1200" b="1">
                 <a:solidFill>
                   <a:srgbClr val="0F172A"/>
                 </a:solidFill>
-                <a:latin typeface="Malgun Gothic" pitchFamily="34" charset="0"/>
-                <a:ea typeface="Malgun Gothic" pitchFamily="34" charset="-122"/>
-                <a:cs typeface="Malgun Gothic" pitchFamily="34" charset="-120"/>
+                <a:latin typeface="Malgun Gothic"/>
+                <a:ea typeface="Malgun Gothic"/>
+                <a:cs typeface="Malgun Gothic"/>
               </a:rPr>
               <a:t>비용 입력 &amp; 자동계산</a:t>
             </a:r>
-            <a:endParaRPr lang="en-US" sz="1200" dirty="0"/>
+            <a:endParaRPr lang="en-US" sz="1200"/>
           </a:p>
         </p:txBody>
       </p:sp>
@@ -5779,44 +4367,44 @@
           <a:bodyPr wrap="square" lIns="0" tIns="0" rIns="0" bIns="0" rtlCol="0" anchor="ctr"/>
           <a:lstStyle/>
           <a:p>
-            <a:pPr indent="0" marL="0">
+            <a:pPr marL="0" indent="0">
               <a:lnSpc>
                 <a:spcPts val="1450"/>
               </a:lnSpc>
               <a:buNone/>
             </a:pPr>
             <a:r>
-              <a:rPr lang="en-US" sz="950" dirty="0">
+              <a:rPr lang="en-US" sz="950">
                 <a:solidFill>
                   <a:srgbClr val="475569"/>
                 </a:solidFill>
-                <a:latin typeface="Malgun Gothic" pitchFamily="34" charset="0"/>
-                <a:ea typeface="Malgun Gothic" pitchFamily="34" charset="-122"/>
-                <a:cs typeface="Malgun Gothic" pitchFamily="34" charset="-120"/>
+                <a:latin typeface="Malgun Gothic"/>
+                <a:ea typeface="Malgun Gothic"/>
+                <a:cs typeface="Malgun Gothic"/>
               </a:rPr>
               <a:t>영수증 금액 및 카드 구분</a:t>
             </a:r>
-            <a:endParaRPr lang="en-US" sz="950" dirty="0"/>
-          </a:p>
-          <a:p>
-            <a:pPr indent="0" marL="0">
+            <a:endParaRPr lang="en-US" sz="950"/>
+          </a:p>
+          <a:p>
+            <a:pPr marL="0" indent="0">
               <a:lnSpc>
                 <a:spcPts val="1450"/>
               </a:lnSpc>
               <a:buNone/>
             </a:pPr>
             <a:r>
-              <a:rPr lang="en-US" sz="950" dirty="0">
+              <a:rPr lang="en-US" sz="950">
                 <a:solidFill>
                   <a:srgbClr val="475569"/>
                 </a:solidFill>
-                <a:latin typeface="Malgun Gothic" pitchFamily="34" charset="0"/>
-                <a:ea typeface="Malgun Gothic" pitchFamily="34" charset="-122"/>
-                <a:cs typeface="Malgun Gothic" pitchFamily="34" charset="-120"/>
+                <a:latin typeface="Malgun Gothic"/>
+                <a:ea typeface="Malgun Gothic"/>
+                <a:cs typeface="Malgun Gothic"/>
               </a:rPr>
               <a:t>4구간 자부담 실시간 산출</a:t>
             </a:r>
-            <a:endParaRPr lang="en-US" sz="950" dirty="0"/>
+            <a:endParaRPr lang="en-US" sz="950"/>
           </a:p>
         </p:txBody>
       </p:sp>
@@ -5868,21 +4456,21 @@
           <a:bodyPr wrap="square" lIns="0" tIns="0" rIns="0" bIns="0" rtlCol="0" anchor="ctr"/>
           <a:lstStyle/>
           <a:p>
-            <a:pPr algn="ctr" indent="0" marL="0">
-              <a:buNone/>
-            </a:pPr>
-            <a:r>
-              <a:rPr lang="en-US" sz="850" dirty="0">
+            <a:pPr marL="0" indent="0" algn="ctr">
+              <a:buNone/>
+            </a:pPr>
+            <a:r>
+              <a:rPr lang="en-US" sz="850">
                 <a:solidFill>
                   <a:srgbClr val="D97706"/>
                 </a:solidFill>
-                <a:latin typeface="Malgun Gothic" pitchFamily="34" charset="0"/>
-                <a:ea typeface="Malgun Gothic" pitchFamily="34" charset="-122"/>
-                <a:cs typeface="Malgun Gothic" pitchFamily="34" charset="-120"/>
+                <a:latin typeface="Malgun Gothic"/>
+                <a:ea typeface="Malgun Gothic"/>
+                <a:cs typeface="Malgun Gothic"/>
               </a:rPr>
               <a:t>✓ 실시간 검증</a:t>
             </a:r>
-            <a:endParaRPr lang="en-US" sz="850" dirty="0"/>
+            <a:endParaRPr lang="en-US" sz="850"/>
           </a:p>
         </p:txBody>
       </p:sp>
@@ -5961,21 +4549,21 @@
           <a:bodyPr wrap="square" lIns="0" tIns="0" rIns="0" bIns="0" rtlCol="0" anchor="ctr"/>
           <a:lstStyle/>
           <a:p>
-            <a:pPr algn="ctr" indent="0" marL="0">
-              <a:buNone/>
-            </a:pPr>
-            <a:r>
-              <a:rPr lang="en-US" sz="900" b="1" dirty="0">
+            <a:pPr marL="0" indent="0" algn="ctr">
+              <a:buNone/>
+            </a:pPr>
+            <a:r>
+              <a:rPr lang="en-US" sz="900" b="1">
                 <a:solidFill>
                   <a:srgbClr val="059669"/>
                 </a:solidFill>
-                <a:latin typeface="Malgun Gothic" pitchFamily="34" charset="0"/>
-                <a:ea typeface="Malgun Gothic" pitchFamily="34" charset="-122"/>
-                <a:cs typeface="Malgun Gothic" pitchFamily="34" charset="-120"/>
+                <a:latin typeface="Malgun Gothic"/>
+                <a:ea typeface="Malgun Gothic"/>
+                <a:cs typeface="Malgun Gothic"/>
               </a:rPr>
               <a:t>STEP 4</a:t>
             </a:r>
-            <a:endParaRPr lang="en-US" sz="900" dirty="0"/>
+            <a:endParaRPr lang="en-US" sz="900"/>
           </a:p>
         </p:txBody>
       </p:sp>
@@ -6000,21 +4588,21 @@
           <a:bodyPr wrap="square" lIns="0" tIns="0" rIns="0" bIns="0" rtlCol="0" anchor="ctr"/>
           <a:lstStyle/>
           <a:p>
-            <a:pPr indent="0" marL="0">
-              <a:buNone/>
-            </a:pPr>
-            <a:r>
-              <a:rPr lang="en-US" sz="1200" b="1" dirty="0">
+            <a:pPr marL="0" indent="0">
+              <a:buNone/>
+            </a:pPr>
+            <a:r>
+              <a:rPr lang="en-US" sz="1200" b="1">
                 <a:solidFill>
                   <a:srgbClr val="0F172A"/>
                 </a:solidFill>
-                <a:latin typeface="Malgun Gothic" pitchFamily="34" charset="0"/>
-                <a:ea typeface="Malgun Gothic" pitchFamily="34" charset="-122"/>
-                <a:cs typeface="Malgun Gothic" pitchFamily="34" charset="-120"/>
+                <a:latin typeface="Malgun Gothic"/>
+                <a:ea typeface="Malgun Gothic"/>
+                <a:cs typeface="Malgun Gothic"/>
               </a:rPr>
               <a:t>1클릭 마감 &amp; 엑셀</a:t>
             </a:r>
-            <a:endParaRPr lang="en-US" sz="1200" dirty="0"/>
+            <a:endParaRPr lang="en-US" sz="1200"/>
           </a:p>
         </p:txBody>
       </p:sp>
@@ -6039,44 +4627,44 @@
           <a:bodyPr wrap="square" lIns="0" tIns="0" rIns="0" bIns="0" rtlCol="0" anchor="ctr"/>
           <a:lstStyle/>
           <a:p>
-            <a:pPr indent="0" marL="0">
+            <a:pPr marL="0" indent="0">
               <a:lnSpc>
                 <a:spcPts val="1450"/>
               </a:lnSpc>
               <a:buNone/>
             </a:pPr>
             <a:r>
-              <a:rPr lang="en-US" sz="950" dirty="0">
+              <a:rPr lang="en-US" sz="950">
                 <a:solidFill>
                   <a:srgbClr val="475569"/>
                 </a:solidFill>
-                <a:latin typeface="Malgun Gothic" pitchFamily="34" charset="0"/>
-                <a:ea typeface="Malgun Gothic" pitchFamily="34" charset="-122"/>
-                <a:cs typeface="Malgun Gothic" pitchFamily="34" charset="-120"/>
+                <a:latin typeface="Malgun Gothic"/>
+                <a:ea typeface="Malgun Gothic"/>
+                <a:cs typeface="Malgun Gothic"/>
               </a:rPr>
               <a:t>[정산 완료] 버튼 클릭 시</a:t>
             </a:r>
-            <a:endParaRPr lang="en-US" sz="950" dirty="0"/>
-          </a:p>
-          <a:p>
-            <a:pPr indent="0" marL="0">
+            <a:endParaRPr lang="en-US" sz="950"/>
+          </a:p>
+          <a:p>
+            <a:pPr marL="0" indent="0">
               <a:lnSpc>
                 <a:spcPts val="1450"/>
               </a:lnSpc>
               <a:buNone/>
             </a:pPr>
             <a:r>
-              <a:rPr lang="en-US" sz="950" dirty="0">
+              <a:rPr lang="en-US" sz="950">
                 <a:solidFill>
                   <a:srgbClr val="475569"/>
                 </a:solidFill>
-                <a:latin typeface="Malgun Gothic" pitchFamily="34" charset="0"/>
-                <a:ea typeface="Malgun Gothic" pitchFamily="34" charset="-122"/>
-                <a:cs typeface="Malgun Gothic" pitchFamily="34" charset="-120"/>
+                <a:latin typeface="Malgun Gothic"/>
+                <a:ea typeface="Malgun Gothic"/>
+                <a:cs typeface="Malgun Gothic"/>
               </a:rPr>
               <a:t>공식 엑셀 품의서 즉시 다운</a:t>
             </a:r>
-            <a:endParaRPr lang="en-US" sz="950" dirty="0"/>
+            <a:endParaRPr lang="en-US" sz="950"/>
           </a:p>
         </p:txBody>
       </p:sp>
@@ -6128,21 +4716,21 @@
           <a:bodyPr wrap="square" lIns="0" tIns="0" rIns="0" bIns="0" rtlCol="0" anchor="ctr"/>
           <a:lstStyle/>
           <a:p>
-            <a:pPr algn="ctr" indent="0" marL="0">
-              <a:buNone/>
-            </a:pPr>
-            <a:r>
-              <a:rPr lang="en-US" sz="850" dirty="0">
+            <a:pPr marL="0" indent="0" algn="ctr">
+              <a:buNone/>
+            </a:pPr>
+            <a:r>
+              <a:rPr lang="en-US" sz="850">
                 <a:solidFill>
                   <a:srgbClr val="059669"/>
                 </a:solidFill>
-                <a:latin typeface="Malgun Gothic" pitchFamily="34" charset="0"/>
-                <a:ea typeface="Malgun Gothic" pitchFamily="34" charset="-122"/>
-                <a:cs typeface="Malgun Gothic" pitchFamily="34" charset="-120"/>
+                <a:latin typeface="Malgun Gothic"/>
+                <a:ea typeface="Malgun Gothic"/>
+                <a:cs typeface="Malgun Gothic"/>
               </a:rPr>
               <a:t>✓ 품의 완료</a:t>
             </a:r>
-            <a:endParaRPr lang="en-US" sz="850" dirty="0"/>
+            <a:endParaRPr lang="en-US" sz="850"/>
           </a:p>
         </p:txBody>
       </p:sp>
@@ -6194,21 +4782,21 @@
           <a:bodyPr wrap="square" lIns="0" tIns="0" rIns="0" bIns="0" rtlCol="0" anchor="ctr"/>
           <a:lstStyle/>
           <a:p>
-            <a:pPr indent="0" marL="0">
-              <a:buNone/>
-            </a:pPr>
-            <a:r>
-              <a:rPr lang="en-US" sz="1100" b="1" dirty="0">
+            <a:pPr marL="0" indent="0">
+              <a:buNone/>
+            </a:pPr>
+            <a:r>
+              <a:rPr lang="en-US" sz="1100" b="1">
                 <a:solidFill>
                   <a:srgbClr val="1D4ED8"/>
                 </a:solidFill>
-                <a:latin typeface="Malgun Gothic" pitchFamily="34" charset="0"/>
-                <a:ea typeface="Malgun Gothic" pitchFamily="34" charset="-122"/>
-                <a:cs typeface="Malgun Gothic" pitchFamily="34" charset="-120"/>
+                <a:latin typeface="Malgun Gothic"/>
+                <a:ea typeface="Malgun Gothic"/>
+                <a:cs typeface="Malgun Gothic"/>
               </a:rPr>
               <a:t>💡 시스템 도입 전후 핵심 변화 비교</a:t>
             </a:r>
-            <a:endParaRPr lang="en-US" sz="1100" dirty="0"/>
+            <a:endParaRPr lang="en-US" sz="1100"/>
           </a:p>
         </p:txBody>
       </p:sp>
@@ -6233,44 +4821,44 @@
           <a:bodyPr wrap="square" lIns="0" tIns="0" rIns="0" bIns="0" rtlCol="0" anchor="ctr"/>
           <a:lstStyle/>
           <a:p>
-            <a:pPr indent="0" marL="0">
+            <a:pPr marL="0" indent="0">
               <a:lnSpc>
                 <a:spcPts val="1500"/>
               </a:lnSpc>
               <a:buNone/>
             </a:pPr>
             <a:r>
-              <a:rPr lang="en-US" sz="900" dirty="0">
+              <a:rPr lang="en-US" sz="900">
                 <a:solidFill>
                   <a:srgbClr val="1E293B"/>
                 </a:solidFill>
-                <a:latin typeface="Malgun Gothic" pitchFamily="34" charset="0"/>
-                <a:ea typeface="Malgun Gothic" pitchFamily="34" charset="-122"/>
-                <a:cs typeface="Malgun Gothic" pitchFamily="34" charset="-120"/>
+                <a:latin typeface="Malgun Gothic"/>
+                <a:ea typeface="Malgun Gothic"/>
+                <a:cs typeface="Malgun Gothic"/>
               </a:rPr>
               <a:t>• 과거 방식: 엑셀 양식 수동 다운로드 ➔ 구간표 보고 계산기 두드리기 ➔ 동명이인/사번 수기 확인 ➔ 30분 이상 소요 및 계산 오류 빈발</a:t>
             </a:r>
-            <a:endParaRPr lang="en-US" sz="900" dirty="0"/>
-          </a:p>
-          <a:p>
-            <a:pPr indent="0" marL="0">
+            <a:endParaRPr lang="en-US" sz="900"/>
+          </a:p>
+          <a:p>
+            <a:pPr marL="0" indent="0">
               <a:lnSpc>
                 <a:spcPts val="1500"/>
               </a:lnSpc>
               <a:buNone/>
             </a:pPr>
             <a:r>
-              <a:rPr lang="en-US" sz="900" dirty="0">
+              <a:rPr lang="en-US" sz="900">
                 <a:solidFill>
                   <a:srgbClr val="1E293B"/>
                 </a:solidFill>
-                <a:latin typeface="Malgun Gothic" pitchFamily="34" charset="0"/>
-                <a:ea typeface="Malgun Gothic" pitchFamily="34" charset="-122"/>
-                <a:cs typeface="Malgun Gothic" pitchFamily="34" charset="-120"/>
+                <a:latin typeface="Malgun Gothic"/>
+                <a:ea typeface="Malgun Gothic"/>
+                <a:cs typeface="Malgun Gothic"/>
               </a:rPr>
               <a:t>• 신규 시스템: 웹 접속 ➔ 참석자 클릭 ➔ 금액 입력 ➔ 4구간 자부담 &amp; 공식 엑셀이 3분 안에 100% 무결점으로 자동 완성!</a:t>
             </a:r>
-            <a:endParaRPr lang="en-US" sz="900" dirty="0"/>
+            <a:endParaRPr lang="en-US" sz="900"/>
           </a:p>
         </p:txBody>
       </p:sp>
@@ -6397,21 +4985,21 @@
           <a:bodyPr wrap="square" lIns="0" tIns="0" rIns="0" bIns="0" rtlCol="0" anchor="ctr"/>
           <a:lstStyle/>
           <a:p>
-            <a:pPr algn="ctr" indent="0" marL="0">
-              <a:buNone/>
-            </a:pPr>
-            <a:r>
-              <a:rPr lang="en-US" sz="900" b="1" dirty="0">
+            <a:pPr marL="0" indent="0" algn="ctr">
+              <a:buNone/>
+            </a:pPr>
+            <a:r>
+              <a:rPr lang="en-US" sz="900" b="1">
                 <a:solidFill>
                   <a:srgbClr val="1D4ED8"/>
                 </a:solidFill>
-                <a:latin typeface="Malgun Gothic" pitchFamily="34" charset="0"/>
-                <a:ea typeface="Malgun Gothic" pitchFamily="34" charset="-122"/>
-                <a:cs typeface="Malgun Gothic" pitchFamily="34" charset="-120"/>
+                <a:latin typeface="Malgun Gothic"/>
+                <a:ea typeface="Malgun Gothic"/>
+                <a:cs typeface="Malgun Gothic"/>
               </a:rPr>
               <a:t>3M 사내 클럽 비용 정산 시스템</a:t>
             </a:r>
-            <a:endParaRPr lang="en-US" sz="900" dirty="0"/>
+            <a:endParaRPr lang="en-US" sz="900"/>
           </a:p>
         </p:txBody>
       </p:sp>
@@ -6436,21 +5024,21 @@
           <a:bodyPr wrap="square" lIns="0" tIns="0" rIns="0" bIns="0" rtlCol="0" anchor="ctr"/>
           <a:lstStyle/>
           <a:p>
-            <a:pPr indent="0" marL="0">
-              <a:buNone/>
-            </a:pPr>
-            <a:r>
-              <a:rPr lang="en-US" sz="1800" b="1" dirty="0">
+            <a:pPr marL="0" indent="0">
+              <a:buNone/>
+            </a:pPr>
+            <a:r>
+              <a:rPr lang="en-US" sz="1800" b="1">
                 <a:solidFill>
                   <a:srgbClr val="0F172A"/>
                 </a:solidFill>
-                <a:latin typeface="Malgun Gothic" pitchFamily="34" charset="0"/>
-                <a:ea typeface="Malgun Gothic" pitchFamily="34" charset="-122"/>
-                <a:cs typeface="Malgun Gothic" pitchFamily="34" charset="-120"/>
+                <a:latin typeface="Malgun Gothic"/>
+                <a:ea typeface="Malgun Gothic"/>
+                <a:cs typeface="Malgun Gothic"/>
               </a:rPr>
               <a:t>Step 1. 1초 초간편 PIN 로그인 &amp; 회원 등록</a:t>
             </a:r>
-            <a:endParaRPr lang="en-US" sz="1800" dirty="0"/>
+            <a:endParaRPr lang="en-US" sz="1800"/>
           </a:p>
         </p:txBody>
       </p:sp>
@@ -6475,21 +5063,21 @@
           <a:bodyPr wrap="square" lIns="0" tIns="0" rIns="0" bIns="0" rtlCol="0" anchor="ctr"/>
           <a:lstStyle/>
           <a:p>
-            <a:pPr indent="0" marL="0">
-              <a:buNone/>
-            </a:pPr>
-            <a:r>
-              <a:rPr lang="en-US" sz="1050" dirty="0">
+            <a:pPr marL="0" indent="0">
+              <a:buNone/>
+            </a:pPr>
+            <a:r>
+              <a:rPr lang="en-US" sz="1050">
                 <a:solidFill>
                   <a:srgbClr val="475569"/>
                 </a:solidFill>
-                <a:latin typeface="Malgun Gothic" pitchFamily="34" charset="0"/>
-                <a:ea typeface="Malgun Gothic" pitchFamily="34" charset="-122"/>
-                <a:cs typeface="Malgun Gothic" pitchFamily="34" charset="-120"/>
+                <a:latin typeface="Malgun Gothic"/>
+                <a:ea typeface="Malgun Gothic"/>
+                <a:cs typeface="Malgun Gothic"/>
               </a:rPr>
               <a:t>아이디/비밀번호 분실 걱정 없이, 사번 뒷자리 6개 숫자로 모바일·PC 어디서나 즉시 접속합니다.</a:t>
             </a:r>
-            <a:endParaRPr lang="en-US" sz="1050" dirty="0"/>
+            <a:endParaRPr lang="en-US" sz="1050"/>
           </a:p>
         </p:txBody>
       </p:sp>
@@ -6537,21 +5125,21 @@
           <a:bodyPr wrap="square" lIns="0" tIns="0" rIns="0" bIns="0" rtlCol="0" anchor="ctr"/>
           <a:lstStyle/>
           <a:p>
-            <a:pPr indent="0" marL="0">
-              <a:buNone/>
-            </a:pPr>
-            <a:r>
-              <a:rPr lang="en-US" sz="800" dirty="0">
+            <a:pPr marL="0" indent="0">
+              <a:buNone/>
+            </a:pPr>
+            <a:r>
+              <a:rPr lang="en-US" sz="800">
                 <a:solidFill>
                   <a:srgbClr val="64748B"/>
                 </a:solidFill>
-                <a:latin typeface="Malgun Gothic" pitchFamily="34" charset="0"/>
-                <a:ea typeface="Malgun Gothic" pitchFamily="34" charset="-122"/>
-                <a:cs typeface="Malgun Gothic" pitchFamily="34" charset="-120"/>
+                <a:latin typeface="Malgun Gothic"/>
+                <a:ea typeface="Malgun Gothic"/>
+                <a:cs typeface="Malgun Gothic"/>
               </a:rPr>
               <a:t>3M 사내 동아리·클럽 비용 정산기 (v1.6.310) | 실무 사용자 설명회</a:t>
             </a:r>
-            <a:endParaRPr lang="en-US" sz="800" dirty="0"/>
+            <a:endParaRPr lang="en-US" sz="800"/>
           </a:p>
         </p:txBody>
       </p:sp>
@@ -6576,57 +5164,33 @@
           <a:bodyPr wrap="square" lIns="0" tIns="0" rIns="0" bIns="0" rtlCol="0" anchor="ctr"/>
           <a:lstStyle/>
           <a:p>
-            <a:pPr algn="r" indent="0" marL="0">
-              <a:buNone/>
-            </a:pPr>
-            <a:r>
-              <a:rPr lang="en-US" sz="750" dirty="0">
+            <a:pPr marL="0" indent="0" algn="r">
+              <a:buNone/>
+            </a:pPr>
+            <a:r>
+              <a:rPr lang="en-US" sz="750">
                 <a:solidFill>
                   <a:srgbClr val="64748B"/>
                 </a:solidFill>
-                <a:latin typeface="Malgun Gothic" pitchFamily="34" charset="0"/>
-                <a:ea typeface="Malgun Gothic" pitchFamily="34" charset="-122"/>
-                <a:cs typeface="Malgun Gothic" pitchFamily="34" charset="-120"/>
+                <a:latin typeface="Malgun Gothic"/>
+                <a:ea typeface="Malgun Gothic"/>
+                <a:cs typeface="Malgun Gothic"/>
               </a:rPr>
               <a:t>COPYRIGHT © 2026 3M ALL RIGHTS RESERVED</a:t>
             </a:r>
-            <a:endParaRPr lang="en-US" sz="750" dirty="0"/>
+            <a:endParaRPr lang="en-US" sz="750"/>
           </a:p>
         </p:txBody>
       </p:sp>
       <p:pic>
         <p:nvPicPr>
-          <p:cNvPr id="11" name="Image 0" descr="preencoded.png">    </p:cNvPr>
+          <p:cNvPr id="11" name="Image 0" descr="preencoded.png"/>
           <p:cNvPicPr>
             <a:picLocks noChangeAspect="1"/>
           </p:cNvPicPr>
           <p:nvPr/>
         </p:nvPicPr>
-        <p:blipFill>
-          <a:blip r:embed="rId1"/>
-          <a:stretch>
-            <a:fillRect/>
-          </a:stretch>
-        </p:blipFill>
-        <p:spPr>
-          <a:xfrm>
-            <a:off x="548640" y="1280160"/>
-            <a:ext cx="1600200" cy="3337560"/>
-          </a:xfrm>
-          <a:prstGeom prst="rect">
-            <a:avLst/>
-          </a:prstGeom>
-        </p:spPr>
-      </p:pic>
-      <p:pic>
-        <p:nvPicPr>
-          <p:cNvPr id="12" name="Image 1" descr="preencoded.png">    </p:cNvPr>
-          <p:cNvPicPr>
-            <a:picLocks noChangeAspect="1"/>
-          </p:cNvPicPr>
-          <p:nvPr/>
-        </p:nvPicPr>
-        <p:blipFill>
+        <p:blipFill rotWithShape="1">
           <a:blip r:embed="rId2"/>
           <a:stretch>
             <a:fillRect/>
@@ -6634,8 +5198,8 @@
         </p:blipFill>
         <p:spPr>
           <a:xfrm>
-            <a:off x="2286000" y="1280160"/>
-            <a:ext cx="1920240" cy="2834640"/>
+            <a:off x="548640" y="1280160"/>
+            <a:ext cx="1600200" cy="3337560"/>
           </a:xfrm>
           <a:prstGeom prst="rect">
             <a:avLst/>
@@ -6644,14 +5208,38 @@
       </p:pic>
       <p:pic>
         <p:nvPicPr>
-          <p:cNvPr id="13" name="Image 2" descr="preencoded.png">    </p:cNvPr>
+          <p:cNvPr id="12" name="Image 1" descr="preencoded.png"/>
           <p:cNvPicPr>
             <a:picLocks noChangeAspect="1"/>
           </p:cNvPicPr>
           <p:nvPr/>
         </p:nvPicPr>
-        <p:blipFill>
+        <p:blipFill rotWithShape="1">
           <a:blip r:embed="rId3"/>
+          <a:stretch>
+            <a:fillRect/>
+          </a:stretch>
+        </p:blipFill>
+        <p:spPr>
+          <a:xfrm>
+            <a:off x="2286000" y="1280160"/>
+            <a:ext cx="1920240" cy="2834640"/>
+          </a:xfrm>
+          <a:prstGeom prst="rect">
+            <a:avLst/>
+          </a:prstGeom>
+        </p:spPr>
+      </p:pic>
+      <p:pic>
+        <p:nvPicPr>
+          <p:cNvPr id="13" name="Image 2" descr="preencoded.png"/>
+          <p:cNvPicPr>
+            <a:picLocks noChangeAspect="1"/>
+          </p:cNvPicPr>
+          <p:nvPr/>
+        </p:nvPicPr>
+        <p:blipFill rotWithShape="1">
+          <a:blip r:embed="rId4"/>
           <a:stretch>
             <a:fillRect/>
           </a:stretch>
@@ -6714,21 +5302,21 @@
           <a:bodyPr wrap="square" lIns="0" tIns="0" rIns="0" bIns="0" rtlCol="0" anchor="ctr"/>
           <a:lstStyle/>
           <a:p>
-            <a:pPr indent="0" marL="0">
-              <a:buNone/>
-            </a:pPr>
-            <a:r>
-              <a:rPr lang="en-US" sz="1250" b="1" dirty="0">
+            <a:pPr marL="0" indent="0">
+              <a:buNone/>
+            </a:pPr>
+            <a:r>
+              <a:rPr lang="en-US" sz="1250" b="1">
                 <a:solidFill>
                   <a:srgbClr val="2563EB"/>
                 </a:solidFill>
-                <a:latin typeface="Malgun Gothic" pitchFamily="34" charset="0"/>
-                <a:ea typeface="Malgun Gothic" pitchFamily="34" charset="-122"/>
-                <a:cs typeface="Malgun Gothic" pitchFamily="34" charset="-120"/>
+                <a:latin typeface="Malgun Gothic"/>
+                <a:ea typeface="Malgun Gothic"/>
+                <a:cs typeface="Malgun Gothic"/>
               </a:rPr>
               <a:t>📱 조작 가이드 및 핵심 기능</a:t>
             </a:r>
-            <a:endParaRPr lang="en-US" sz="1250" dirty="0"/>
+            <a:endParaRPr lang="en-US" sz="1250"/>
           </a:p>
         </p:txBody>
       </p:sp>
@@ -6753,21 +5341,21 @@
           <a:bodyPr wrap="square" lIns="0" tIns="0" rIns="0" bIns="0" rtlCol="0" anchor="ctr"/>
           <a:lstStyle/>
           <a:p>
-            <a:pPr indent="0" marL="0">
-              <a:buNone/>
-            </a:pPr>
-            <a:r>
-              <a:rPr lang="en-US" sz="1050" b="1" dirty="0">
+            <a:pPr marL="0" indent="0">
+              <a:buNone/>
+            </a:pPr>
+            <a:r>
+              <a:rPr lang="en-US" sz="1050" b="1">
                 <a:solidFill>
                   <a:srgbClr val="0F172A"/>
                 </a:solidFill>
-                <a:latin typeface="Malgun Gothic" pitchFamily="34" charset="0"/>
-                <a:ea typeface="Malgun Gothic" pitchFamily="34" charset="-122"/>
-                <a:cs typeface="Malgun Gothic" pitchFamily="34" charset="-120"/>
+                <a:latin typeface="Malgun Gothic"/>
+                <a:ea typeface="Malgun Gothic"/>
+                <a:cs typeface="Malgun Gothic"/>
               </a:rPr>
               <a:t>① 6자리 사번 PIN 원터치 로그인</a:t>
             </a:r>
-            <a:endParaRPr lang="en-US" sz="1050" dirty="0"/>
+            <a:endParaRPr lang="en-US" sz="1050"/>
           </a:p>
         </p:txBody>
       </p:sp>
@@ -6792,24 +5380,24 @@
           <a:bodyPr wrap="square" lIns="0" tIns="0" rIns="0" bIns="0" rtlCol="0" anchor="ctr"/>
           <a:lstStyle/>
           <a:p>
-            <a:pPr indent="0" marL="0">
+            <a:pPr marL="0" indent="0">
               <a:lnSpc>
                 <a:spcPts val="1400"/>
               </a:lnSpc>
               <a:buNone/>
             </a:pPr>
             <a:r>
-              <a:rPr lang="en-US" sz="900" dirty="0">
+              <a:rPr lang="en-US" sz="900">
                 <a:solidFill>
                   <a:srgbClr val="475569"/>
                 </a:solidFill>
-                <a:latin typeface="Malgun Gothic" pitchFamily="34" charset="0"/>
-                <a:ea typeface="Malgun Gothic" pitchFamily="34" charset="-122"/>
-                <a:cs typeface="Malgun Gothic" pitchFamily="34" charset="-120"/>
+                <a:latin typeface="Malgun Gothic"/>
+                <a:ea typeface="Malgun Gothic"/>
+                <a:cs typeface="Malgun Gothic"/>
               </a:rPr>
               <a:t>화면 터치패드 또는 키보드로 본인의 6자리 PIN을 누르면 별도 엔터 없이 즉시 메인 화면으로 이동합니다.</a:t>
             </a:r>
-            <a:endParaRPr lang="en-US" sz="900" dirty="0"/>
+            <a:endParaRPr lang="en-US" sz="900"/>
           </a:p>
         </p:txBody>
       </p:sp>
@@ -6834,21 +5422,21 @@
           <a:bodyPr wrap="square" lIns="0" tIns="0" rIns="0" bIns="0" rtlCol="0" anchor="ctr"/>
           <a:lstStyle/>
           <a:p>
-            <a:pPr indent="0" marL="0">
-              <a:buNone/>
-            </a:pPr>
-            <a:r>
-              <a:rPr lang="en-US" sz="1050" b="1" dirty="0">
+            <a:pPr marL="0" indent="0">
+              <a:buNone/>
+            </a:pPr>
+            <a:r>
+              <a:rPr lang="en-US" sz="1050" b="1">
                 <a:solidFill>
                   <a:srgbClr val="0F172A"/>
                 </a:solidFill>
-                <a:latin typeface="Malgun Gothic" pitchFamily="34" charset="0"/>
-                <a:ea typeface="Malgun Gothic" pitchFamily="34" charset="-122"/>
-                <a:cs typeface="Malgun Gothic" pitchFamily="34" charset="-120"/>
+                <a:latin typeface="Malgun Gothic"/>
+                <a:ea typeface="Malgun Gothic"/>
+                <a:cs typeface="Malgun Gothic"/>
               </a:rPr>
               <a:t>② 신규 회원 1회 등록 (30초)</a:t>
             </a:r>
-            <a:endParaRPr lang="en-US" sz="1050" dirty="0"/>
+            <a:endParaRPr lang="en-US" sz="1050"/>
           </a:p>
         </p:txBody>
       </p:sp>
@@ -6873,24 +5461,24 @@
           <a:bodyPr wrap="square" lIns="0" tIns="0" rIns="0" bIns="0" rtlCol="0" anchor="ctr"/>
           <a:lstStyle/>
           <a:p>
-            <a:pPr indent="0" marL="0">
+            <a:pPr marL="0" indent="0">
               <a:lnSpc>
                 <a:spcPts val="1400"/>
               </a:lnSpc>
               <a:buNone/>
             </a:pPr>
             <a:r>
-              <a:rPr lang="en-US" sz="900" dirty="0">
+              <a:rPr lang="en-US" sz="900">
                 <a:solidFill>
                   <a:srgbClr val="475569"/>
                 </a:solidFill>
-                <a:latin typeface="Malgun Gothic" pitchFamily="34" charset="0"/>
-                <a:ea typeface="Malgun Gothic" pitchFamily="34" charset="-122"/>
-                <a:cs typeface="Malgun Gothic" pitchFamily="34" charset="-120"/>
+                <a:latin typeface="Malgun Gothic"/>
+                <a:ea typeface="Malgun Gothic"/>
+                <a:cs typeface="Malgun Gothic"/>
               </a:rPr>
               <a:t>처음 사용자는 하단 '회원 등록하기'를 눌러 이름과 6자리 PIN(사번 CG001234인 경우 '001234')만 등록하면 완료됩니다.</a:t>
             </a:r>
-            <a:endParaRPr lang="en-US" sz="900" dirty="0"/>
+            <a:endParaRPr lang="en-US" sz="900"/>
           </a:p>
         </p:txBody>
       </p:sp>
@@ -6915,21 +5503,21 @@
           <a:bodyPr wrap="square" lIns="0" tIns="0" rIns="0" bIns="0" rtlCol="0" anchor="ctr"/>
           <a:lstStyle/>
           <a:p>
-            <a:pPr indent="0" marL="0">
-              <a:buNone/>
-            </a:pPr>
-            <a:r>
-              <a:rPr lang="en-US" sz="1050" b="1" dirty="0">
+            <a:pPr marL="0" indent="0">
+              <a:buNone/>
+            </a:pPr>
+            <a:r>
+              <a:rPr lang="en-US" sz="1050" b="1">
                 <a:solidFill>
                   <a:srgbClr val="0F172A"/>
                 </a:solidFill>
-                <a:latin typeface="Malgun Gothic" pitchFamily="34" charset="0"/>
-                <a:ea typeface="Malgun Gothic" pitchFamily="34" charset="-122"/>
-                <a:cs typeface="Malgun Gothic" pitchFamily="34" charset="-120"/>
+                <a:latin typeface="Malgun Gothic"/>
+                <a:ea typeface="Malgun Gothic"/>
+                <a:cs typeface="Malgun Gothic"/>
               </a:rPr>
               <a:t>③ 다크 / 라이트 모드 상시 지원</a:t>
             </a:r>
-            <a:endParaRPr lang="en-US" sz="1050" dirty="0"/>
+            <a:endParaRPr lang="en-US" sz="1050"/>
           </a:p>
         </p:txBody>
       </p:sp>
@@ -6954,24 +5542,24 @@
           <a:bodyPr wrap="square" lIns="0" tIns="0" rIns="0" bIns="0" rtlCol="0" anchor="ctr"/>
           <a:lstStyle/>
           <a:p>
-            <a:pPr indent="0" marL="0">
+            <a:pPr marL="0" indent="0">
               <a:lnSpc>
                 <a:spcPts val="1400"/>
               </a:lnSpc>
               <a:buNone/>
             </a:pPr>
             <a:r>
-              <a:rPr lang="en-US" sz="900" dirty="0">
+              <a:rPr lang="en-US" sz="900">
                 <a:solidFill>
                   <a:srgbClr val="475569"/>
                 </a:solidFill>
-                <a:latin typeface="Malgun Gothic" pitchFamily="34" charset="0"/>
-                <a:ea typeface="Malgun Gothic" pitchFamily="34" charset="-122"/>
-                <a:cs typeface="Malgun Gothic" pitchFamily="34" charset="-120"/>
+                <a:latin typeface="Malgun Gothic"/>
+                <a:ea typeface="Malgun Gothic"/>
+                <a:cs typeface="Malgun Gothic"/>
               </a:rPr>
               <a:t>상단 우측 [Dark / Light] 토글 스위치로 야간이나 주간 어디서든 눈이 편안한 테마로 즉시 전환됩니다.</a:t>
             </a:r>
-            <a:endParaRPr lang="en-US" sz="900" dirty="0"/>
+            <a:endParaRPr lang="en-US" sz="900"/>
           </a:p>
         </p:txBody>
       </p:sp>
@@ -7023,24 +5611,24 @@
           <a:bodyPr wrap="square" lIns="0" tIns="0" rIns="0" bIns="0" rtlCol="0" anchor="ctr"/>
           <a:lstStyle/>
           <a:p>
-            <a:pPr indent="0" marL="0">
+            <a:pPr marL="0" indent="0">
               <a:lnSpc>
                 <a:spcPts val="1300"/>
               </a:lnSpc>
               <a:buNone/>
             </a:pPr>
             <a:r>
-              <a:rPr lang="en-US" sz="850" dirty="0">
+              <a:rPr lang="en-US" sz="850">
                 <a:solidFill>
                   <a:srgbClr val="1D4ED8"/>
                 </a:solidFill>
-                <a:latin typeface="Malgun Gothic" pitchFamily="34" charset="0"/>
-                <a:ea typeface="Malgun Gothic" pitchFamily="34" charset="-122"/>
-                <a:cs typeface="Malgun Gothic" pitchFamily="34" charset="-120"/>
+                <a:latin typeface="Malgun Gothic"/>
+                <a:ea typeface="Malgun Gothic"/>
+                <a:cs typeface="Malgun Gothic"/>
               </a:rPr>
               <a:t>💡 모바일 PWA 앱 설치 팁: 스마트폰 브라우저에서 [홈 화면에 추가]를 누르면 별도 설치 없이 모바일 앱 아이콘으로 상시 원터치 실행됩니다.</a:t>
             </a:r>
-            <a:endParaRPr lang="en-US" sz="850" dirty="0"/>
+            <a:endParaRPr lang="en-US" sz="850"/>
           </a:p>
         </p:txBody>
       </p:sp>
@@ -7093,6 +5681,11 @@
             <a:prstDash val="solid"/>
           </a:ln>
         </p:spPr>
+        <p:txBody>
+          <a:bodyPr/>
+          <a:lstStyle/>
+          <a:p/>
+        </p:txBody>
       </p:sp>
       <p:sp>
         <p:nvSpPr>
@@ -7167,21 +5760,21 @@
           <a:bodyPr wrap="square" lIns="0" tIns="0" rIns="0" bIns="0" rtlCol="0" anchor="ctr"/>
           <a:lstStyle/>
           <a:p>
-            <a:pPr algn="ctr" indent="0" marL="0">
-              <a:buNone/>
-            </a:pPr>
-            <a:r>
-              <a:rPr lang="en-US" sz="900" b="1" dirty="0">
+            <a:pPr marL="0" indent="0" algn="ctr">
+              <a:buNone/>
+            </a:pPr>
+            <a:r>
+              <a:rPr lang="en-US" sz="900" b="1">
                 <a:solidFill>
                   <a:srgbClr val="1D4ED8"/>
                 </a:solidFill>
-                <a:latin typeface="Malgun Gothic" pitchFamily="34" charset="0"/>
-                <a:ea typeface="Malgun Gothic" pitchFamily="34" charset="-122"/>
-                <a:cs typeface="Malgun Gothic" pitchFamily="34" charset="-120"/>
+                <a:latin typeface="Malgun Gothic"/>
+                <a:ea typeface="Malgun Gothic"/>
+                <a:cs typeface="Malgun Gothic"/>
               </a:rPr>
               <a:t>3M 사내 클럽 비용 정산 시스템</a:t>
             </a:r>
-            <a:endParaRPr lang="en-US" sz="900" dirty="0"/>
+            <a:endParaRPr lang="en-US" sz="900"/>
           </a:p>
         </p:txBody>
       </p:sp>
@@ -7206,21 +5799,21 @@
           <a:bodyPr wrap="square" lIns="0" tIns="0" rIns="0" bIns="0" rtlCol="0" anchor="ctr"/>
           <a:lstStyle/>
           <a:p>
-            <a:pPr indent="0" marL="0">
-              <a:buNone/>
-            </a:pPr>
-            <a:r>
-              <a:rPr lang="en-US" sz="1800" b="1" dirty="0">
+            <a:pPr marL="0" indent="0">
+              <a:buNone/>
+            </a:pPr>
+            <a:r>
+              <a:rPr lang="en-US" sz="1800" b="1">
                 <a:solidFill>
                   <a:srgbClr val="0F172A"/>
                 </a:solidFill>
-                <a:latin typeface="Malgun Gothic" pitchFamily="34" charset="0"/>
-                <a:ea typeface="Malgun Gothic" pitchFamily="34" charset="-122"/>
-                <a:cs typeface="Malgun Gothic" pitchFamily="34" charset="-120"/>
+                <a:latin typeface="Malgun Gothic"/>
+                <a:ea typeface="Malgun Gothic"/>
+                <a:cs typeface="Malgun Gothic"/>
               </a:rPr>
               <a:t>Step 2. 전사원 명부 검색 &amp; 참석자 원클릭 담기</a:t>
             </a:r>
-            <a:endParaRPr lang="en-US" sz="1800" dirty="0"/>
+            <a:endParaRPr lang="en-US" sz="1800"/>
           </a:p>
         </p:txBody>
       </p:sp>
@@ -7245,21 +5838,21 @@
           <a:bodyPr wrap="square" lIns="0" tIns="0" rIns="0" bIns="0" rtlCol="0" anchor="ctr"/>
           <a:lstStyle/>
           <a:p>
-            <a:pPr indent="0" marL="0">
-              <a:buNone/>
-            </a:pPr>
-            <a:r>
-              <a:rPr lang="en-US" sz="1050" dirty="0">
+            <a:pPr marL="0" indent="0">
+              <a:buNone/>
+            </a:pPr>
+            <a:r>
+              <a:rPr lang="en-US" sz="1050">
                 <a:solidFill>
                   <a:srgbClr val="475569"/>
                 </a:solidFill>
-                <a:latin typeface="Malgun Gothic" pitchFamily="34" charset="0"/>
-                <a:ea typeface="Malgun Gothic" pitchFamily="34" charset="-122"/>
-                <a:cs typeface="Malgun Gothic" pitchFamily="34" charset="-120"/>
+                <a:latin typeface="Malgun Gothic"/>
+                <a:ea typeface="Malgun Gothic"/>
+                <a:cs typeface="Malgun Gothic"/>
               </a:rPr>
               <a:t>전사 1,317명 임직원 DB가 완벽 연동되어, 오타나 동명이인 착오 없이 정확하게 참석자를 등록합니다.</a:t>
             </a:r>
-            <a:endParaRPr lang="en-US" sz="1050" dirty="0"/>
+            <a:endParaRPr lang="en-US" sz="1050"/>
           </a:p>
         </p:txBody>
       </p:sp>
@@ -7307,21 +5900,21 @@
           <a:bodyPr wrap="square" lIns="0" tIns="0" rIns="0" bIns="0" rtlCol="0" anchor="ctr"/>
           <a:lstStyle/>
           <a:p>
-            <a:pPr indent="0" marL="0">
-              <a:buNone/>
-            </a:pPr>
-            <a:r>
-              <a:rPr lang="en-US" sz="800" dirty="0">
+            <a:pPr marL="0" indent="0">
+              <a:buNone/>
+            </a:pPr>
+            <a:r>
+              <a:rPr lang="en-US" sz="800">
                 <a:solidFill>
                   <a:srgbClr val="64748B"/>
                 </a:solidFill>
-                <a:latin typeface="Malgun Gothic" pitchFamily="34" charset="0"/>
-                <a:ea typeface="Malgun Gothic" pitchFamily="34" charset="-122"/>
-                <a:cs typeface="Malgun Gothic" pitchFamily="34" charset="-120"/>
+                <a:latin typeface="Malgun Gothic"/>
+                <a:ea typeface="Malgun Gothic"/>
+                <a:cs typeface="Malgun Gothic"/>
               </a:rPr>
               <a:t>3M 사내 동아리·클럽 비용 정산기 (v1.6.310) | 실무 사용자 설명회</a:t>
             </a:r>
-            <a:endParaRPr lang="en-US" sz="800" dirty="0"/>
+            <a:endParaRPr lang="en-US" sz="800"/>
           </a:p>
         </p:txBody>
       </p:sp>
@@ -7346,41 +5939,41 @@
           <a:bodyPr wrap="square" lIns="0" tIns="0" rIns="0" bIns="0" rtlCol="0" anchor="ctr"/>
           <a:lstStyle/>
           <a:p>
-            <a:pPr algn="r" indent="0" marL="0">
-              <a:buNone/>
-            </a:pPr>
-            <a:r>
-              <a:rPr lang="en-US" sz="750" dirty="0">
+            <a:pPr marL="0" indent="0" algn="r">
+              <a:buNone/>
+            </a:pPr>
+            <a:r>
+              <a:rPr lang="en-US" sz="750">
                 <a:solidFill>
                   <a:srgbClr val="64748B"/>
                 </a:solidFill>
-                <a:latin typeface="Malgun Gothic" pitchFamily="34" charset="0"/>
-                <a:ea typeface="Malgun Gothic" pitchFamily="34" charset="-122"/>
-                <a:cs typeface="Malgun Gothic" pitchFamily="34" charset="-120"/>
+                <a:latin typeface="Malgun Gothic"/>
+                <a:ea typeface="Malgun Gothic"/>
+                <a:cs typeface="Malgun Gothic"/>
               </a:rPr>
               <a:t>COPYRIGHT © 2026 3M ALL RIGHTS RESERVED</a:t>
             </a:r>
-            <a:endParaRPr lang="en-US" sz="750" dirty="0"/>
+            <a:endParaRPr lang="en-US" sz="750"/>
           </a:p>
         </p:txBody>
       </p:sp>
       <p:pic>
         <p:nvPicPr>
-          <p:cNvPr id="11" name="Image 0" descr="preencoded.png">    </p:cNvPr>
+          <p:cNvPr id="11" name="Image 0" descr="preencoded.png"/>
           <p:cNvPicPr>
             <a:picLocks noChangeAspect="1"/>
           </p:cNvPicPr>
           <p:nvPr/>
         </p:nvPicPr>
-        <p:blipFill>
-          <a:blip r:embed="rId1"/>
+        <p:blipFill rotWithShape="1">
+          <a:blip r:embed="rId2"/>
           <a:stretch>
             <a:fillRect/>
           </a:stretch>
         </p:blipFill>
         <p:spPr>
           <a:xfrm>
-            <a:off x="548640" y="1280160"/>
+            <a:off x="1219200" y="1207008"/>
             <a:ext cx="4572000" cy="3337560"/>
           </a:xfrm>
           <a:prstGeom prst="rect">
@@ -7436,21 +6029,21 @@
           <a:bodyPr wrap="square" lIns="0" tIns="0" rIns="0" bIns="0" rtlCol="0" anchor="ctr"/>
           <a:lstStyle/>
           <a:p>
-            <a:pPr indent="0" marL="0">
-              <a:buNone/>
-            </a:pPr>
-            <a:r>
-              <a:rPr lang="en-US" sz="1250" b="1" dirty="0">
+            <a:pPr marL="0" indent="0">
+              <a:buNone/>
+            </a:pPr>
+            <a:r>
+              <a:rPr lang="en-US" sz="1250" b="1">
                 <a:solidFill>
                   <a:srgbClr val="2563EB"/>
                 </a:solidFill>
-                <a:latin typeface="Malgun Gothic" pitchFamily="34" charset="0"/>
-                <a:ea typeface="Malgun Gothic" pitchFamily="34" charset="-122"/>
-                <a:cs typeface="Malgun Gothic" pitchFamily="34" charset="-120"/>
+                <a:latin typeface="Malgun Gothic"/>
+                <a:ea typeface="Malgun Gothic"/>
+                <a:cs typeface="Malgun Gothic"/>
               </a:rPr>
               <a:t>👥 참석자 관리 4대 핵심 포인트</a:t>
             </a:r>
-            <a:endParaRPr lang="en-US" sz="1250" dirty="0"/>
+            <a:endParaRPr lang="en-US" sz="1250"/>
           </a:p>
         </p:txBody>
       </p:sp>
@@ -7475,21 +6068,21 @@
           <a:bodyPr wrap="square" lIns="0" tIns="0" rIns="0" bIns="0" rtlCol="0" anchor="ctr"/>
           <a:lstStyle/>
           <a:p>
-            <a:pPr indent="0" marL="0">
-              <a:buNone/>
-            </a:pPr>
-            <a:r>
-              <a:rPr lang="en-US" sz="980" b="1" dirty="0">
+            <a:pPr marL="0" indent="0">
+              <a:buNone/>
+            </a:pPr>
+            <a:r>
+              <a:rPr lang="en-US" sz="980" b="1">
                 <a:solidFill>
                   <a:srgbClr val="0F172A"/>
                 </a:solidFill>
-                <a:latin typeface="Malgun Gothic" pitchFamily="34" charset="0"/>
-                <a:ea typeface="Malgun Gothic" pitchFamily="34" charset="-122"/>
-                <a:cs typeface="Malgun Gothic" pitchFamily="34" charset="-120"/>
+                <a:latin typeface="Malgun Gothic"/>
+                <a:ea typeface="Malgun Gothic"/>
+                <a:cs typeface="Malgun Gothic"/>
               </a:rPr>
               <a:t>① 전사 임직원 1,317명 완벽 탑재</a:t>
             </a:r>
-            <a:endParaRPr lang="en-US" sz="980" dirty="0"/>
+            <a:endParaRPr lang="en-US" sz="980"/>
           </a:p>
         </p:txBody>
       </p:sp>
@@ -7514,24 +6107,24 @@
           <a:bodyPr wrap="square" lIns="0" tIns="0" rIns="0" bIns="0" rtlCol="0" anchor="ctr"/>
           <a:lstStyle/>
           <a:p>
-            <a:pPr indent="0" marL="0">
+            <a:pPr marL="0" indent="0">
               <a:lnSpc>
                 <a:spcPts val="1300"/>
               </a:lnSpc>
               <a:buNone/>
             </a:pPr>
             <a:r>
-              <a:rPr lang="en-US" sz="840" dirty="0">
+              <a:rPr lang="en-US" sz="700">
                 <a:solidFill>
                   <a:srgbClr val="475569"/>
                 </a:solidFill>
-                <a:latin typeface="Malgun Gothic" pitchFamily="34" charset="0"/>
-                <a:ea typeface="Malgun Gothic" pitchFamily="34" charset="-122"/>
-                <a:cs typeface="Malgun Gothic" pitchFamily="34" charset="-120"/>
+                <a:latin typeface="Malgun Gothic"/>
+                <a:ea typeface="Malgun Gothic"/>
+                <a:cs typeface="Malgun Gothic"/>
               </a:rPr>
               <a:t>사내 전 직원의 이름과 사번(EMP ID)이 사전 등록되어 있어 이름이나 사번 검색으로 즉시 조회됩니다.</a:t>
             </a:r>
-            <a:endParaRPr lang="en-US" sz="840" dirty="0"/>
+            <a:endParaRPr lang="en-US" sz="700"/>
           </a:p>
         </p:txBody>
       </p:sp>
@@ -7556,21 +6149,21 @@
           <a:bodyPr wrap="square" lIns="0" tIns="0" rIns="0" bIns="0" rtlCol="0" anchor="ctr"/>
           <a:lstStyle/>
           <a:p>
-            <a:pPr indent="0" marL="0">
-              <a:buNone/>
-            </a:pPr>
-            <a:r>
-              <a:rPr lang="en-US" sz="980" b="1" dirty="0">
+            <a:pPr marL="0" indent="0">
+              <a:buNone/>
+            </a:pPr>
+            <a:r>
+              <a:rPr lang="en-US" sz="980" b="1">
                 <a:solidFill>
                   <a:srgbClr val="0F172A"/>
                 </a:solidFill>
-                <a:latin typeface="Malgun Gothic" pitchFamily="34" charset="0"/>
-                <a:ea typeface="Malgun Gothic" pitchFamily="34" charset="-122"/>
-                <a:cs typeface="Malgun Gothic" pitchFamily="34" charset="-120"/>
+                <a:latin typeface="Malgun Gothic"/>
+                <a:ea typeface="Malgun Gothic"/>
+                <a:cs typeface="Malgun Gothic"/>
               </a:rPr>
               <a:t>② [추가] 버튼 1클릭으로 반영</a:t>
             </a:r>
-            <a:endParaRPr lang="en-US" sz="980" dirty="0"/>
+            <a:endParaRPr lang="en-US" sz="980"/>
           </a:p>
         </p:txBody>
       </p:sp>
@@ -7595,24 +6188,24 @@
           <a:bodyPr wrap="square" lIns="0" tIns="0" rIns="0" bIns="0" rtlCol="0" anchor="ctr"/>
           <a:lstStyle/>
           <a:p>
-            <a:pPr indent="0" marL="0">
+            <a:pPr marL="0" indent="0">
               <a:lnSpc>
                 <a:spcPts val="1300"/>
               </a:lnSpc>
               <a:buNone/>
             </a:pPr>
             <a:r>
-              <a:rPr lang="en-US" sz="840" dirty="0">
+              <a:rPr lang="en-US" sz="700">
                 <a:solidFill>
                   <a:srgbClr val="475569"/>
                 </a:solidFill>
-                <a:latin typeface="Malgun Gothic" pitchFamily="34" charset="0"/>
-                <a:ea typeface="Malgun Gothic" pitchFamily="34" charset="-122"/>
-                <a:cs typeface="Malgun Gothic" pitchFamily="34" charset="-120"/>
+                <a:latin typeface="Malgun Gothic"/>
+                <a:ea typeface="Malgun Gothic"/>
+                <a:cs typeface="Malgun Gothic"/>
               </a:rPr>
               <a:t>검색된 사원 옆의 [추가] 버튼을 누르면 즉시 '✓ 추가됨'으로 변경되며 현재 정산 참석자 명단에 자동 등록됩니다.</a:t>
             </a:r>
-            <a:endParaRPr lang="en-US" sz="840" dirty="0"/>
+            <a:endParaRPr lang="en-US" sz="700"/>
           </a:p>
         </p:txBody>
       </p:sp>
@@ -7637,21 +6230,21 @@
           <a:bodyPr wrap="square" lIns="0" tIns="0" rIns="0" bIns="0" rtlCol="0" anchor="ctr"/>
           <a:lstStyle/>
           <a:p>
-            <a:pPr indent="0" marL="0">
-              <a:buNone/>
-            </a:pPr>
-            <a:r>
-              <a:rPr lang="en-US" sz="980" b="1" dirty="0">
+            <a:pPr marL="0" indent="0">
+              <a:buNone/>
+            </a:pPr>
+            <a:r>
+              <a:rPr lang="en-US" sz="980" b="1">
                 <a:solidFill>
                   <a:srgbClr val="0F172A"/>
                 </a:solidFill>
-                <a:latin typeface="Malgun Gothic" pitchFamily="34" charset="0"/>
-                <a:ea typeface="Malgun Gothic" pitchFamily="34" charset="-122"/>
-                <a:cs typeface="Malgun Gothic" pitchFamily="34" charset="-120"/>
+                <a:latin typeface="Malgun Gothic"/>
+                <a:ea typeface="Malgun Gothic"/>
+                <a:cs typeface="Malgun Gothic"/>
               </a:rPr>
               <a:t>③ 올해 누적 참석 횟수 자동 표시</a:t>
             </a:r>
-            <a:endParaRPr lang="en-US" sz="980" dirty="0"/>
+            <a:endParaRPr lang="en-US" sz="980"/>
           </a:p>
         </p:txBody>
       </p:sp>
@@ -7676,24 +6269,24 @@
           <a:bodyPr wrap="square" lIns="0" tIns="0" rIns="0" bIns="0" rtlCol="0" anchor="ctr"/>
           <a:lstStyle/>
           <a:p>
-            <a:pPr indent="0" marL="0">
+            <a:pPr marL="0" indent="0">
               <a:lnSpc>
                 <a:spcPts val="1300"/>
               </a:lnSpc>
               <a:buNone/>
             </a:pPr>
             <a:r>
-              <a:rPr lang="en-US" sz="840" dirty="0">
+              <a:rPr lang="en-US" sz="700">
                 <a:solidFill>
                   <a:srgbClr val="475569"/>
                 </a:solidFill>
-                <a:latin typeface="Malgun Gothic" pitchFamily="34" charset="0"/>
-                <a:ea typeface="Malgun Gothic" pitchFamily="34" charset="-122"/>
-                <a:cs typeface="Malgun Gothic" pitchFamily="34" charset="-120"/>
+                <a:latin typeface="Malgun Gothic"/>
+                <a:ea typeface="Malgun Gothic"/>
+                <a:cs typeface="Malgun Gothic"/>
               </a:rPr>
               <a:t>'홍준영(올해 누적: 17회)'처럼 연간 참여 횟수가 자동 표시되어 공평한 활동 기회 관리가 가능합니다.</a:t>
             </a:r>
-            <a:endParaRPr lang="en-US" sz="840" dirty="0"/>
+            <a:endParaRPr lang="en-US" sz="700"/>
           </a:p>
         </p:txBody>
       </p:sp>
@@ -7718,21 +6311,21 @@
           <a:bodyPr wrap="square" lIns="0" tIns="0" rIns="0" bIns="0" rtlCol="0" anchor="ctr"/>
           <a:lstStyle/>
           <a:p>
-            <a:pPr indent="0" marL="0">
-              <a:buNone/>
-            </a:pPr>
-            <a:r>
-              <a:rPr lang="en-US" sz="980" b="1" dirty="0">
+            <a:pPr marL="0" indent="0">
+              <a:buNone/>
+            </a:pPr>
+            <a:r>
+              <a:rPr lang="en-US" sz="980" b="1">
                 <a:solidFill>
                   <a:srgbClr val="0F172A"/>
                 </a:solidFill>
-                <a:latin typeface="Malgun Gothic" pitchFamily="34" charset="0"/>
-                <a:ea typeface="Malgun Gothic" pitchFamily="34" charset="-122"/>
-                <a:cs typeface="Malgun Gothic" pitchFamily="34" charset="-120"/>
+                <a:latin typeface="Malgun Gothic"/>
+                <a:ea typeface="Malgun Gothic"/>
+                <a:cs typeface="Malgun Gothic"/>
               </a:rPr>
               <a:t>④ 동명이인 사번 완벽 식별</a:t>
             </a:r>
-            <a:endParaRPr lang="en-US" sz="980" dirty="0"/>
+            <a:endParaRPr lang="en-US" sz="980"/>
           </a:p>
         </p:txBody>
       </p:sp>
@@ -7757,24 +6350,24 @@
           <a:bodyPr wrap="square" lIns="0" tIns="0" rIns="0" bIns="0" rtlCol="0" anchor="ctr"/>
           <a:lstStyle/>
           <a:p>
-            <a:pPr indent="0" marL="0">
+            <a:pPr marL="0" indent="0">
               <a:lnSpc>
                 <a:spcPts val="1300"/>
               </a:lnSpc>
               <a:buNone/>
             </a:pPr>
             <a:r>
-              <a:rPr lang="en-US" sz="840" dirty="0">
+              <a:rPr lang="en-US" sz="700">
                 <a:solidFill>
                   <a:srgbClr val="475569"/>
                 </a:solidFill>
-                <a:latin typeface="Malgun Gothic" pitchFamily="34" charset="0"/>
-                <a:ea typeface="Malgun Gothic" pitchFamily="34" charset="-122"/>
-                <a:cs typeface="Malgun Gothic" pitchFamily="34" charset="-120"/>
+                <a:latin typeface="Malgun Gothic"/>
+                <a:ea typeface="Malgun Gothic"/>
+                <a:cs typeface="Malgun Gothic"/>
               </a:rPr>
               <a:t>이진호(4035) 등 동명이인이 존재해도 고유 사번 기준으로 참석 횟수가 독립 관리되어 오귀속이 원천 차단됩니다.</a:t>
             </a:r>
-            <a:endParaRPr lang="en-US" sz="840" dirty="0"/>
+            <a:endParaRPr lang="en-US" sz="700"/>
           </a:p>
         </p:txBody>
       </p:sp>
@@ -7826,27 +6419,51 @@
           <a:bodyPr wrap="square" lIns="0" tIns="0" rIns="0" bIns="0" rtlCol="0" anchor="ctr"/>
           <a:lstStyle/>
           <a:p>
-            <a:pPr indent="0" marL="0">
+            <a:pPr marL="0" indent="0">
               <a:lnSpc>
                 <a:spcPts val="1200"/>
               </a:lnSpc>
               <a:buNone/>
             </a:pPr>
             <a:r>
-              <a:rPr lang="en-US" sz="800" dirty="0">
+              <a:rPr lang="en-US" sz="800">
                 <a:solidFill>
                   <a:srgbClr val="065F46"/>
                 </a:solidFill>
-                <a:latin typeface="Malgun Gothic" pitchFamily="34" charset="0"/>
-                <a:ea typeface="Malgun Gothic" pitchFamily="34" charset="-122"/>
-                <a:cs typeface="Malgun Gothic" pitchFamily="34" charset="-120"/>
+                <a:latin typeface="Malgun Gothic"/>
+                <a:ea typeface="Malgun Gothic"/>
+                <a:cs typeface="Malgun Gothic"/>
               </a:rPr>
               <a:t>✓ 명부에서 선택된 인원수는 정산 탭에 실시간 자동 반영되어 1인당 비용을 자동 나눗셈합니다.</a:t>
             </a:r>
-            <a:endParaRPr lang="en-US" sz="800" dirty="0"/>
-          </a:p>
-        </p:txBody>
-      </p:sp>
+            <a:endParaRPr lang="en-US" sz="800"/>
+          </a:p>
+        </p:txBody>
+      </p:sp>
+      <p:pic>
+        <p:nvPicPr>
+          <p:cNvPr id="69" name="Picture 23" descr="이진호.png"/>
+          <p:cNvPicPr>
+            <a:picLocks noChangeAspect="1"/>
+          </p:cNvPicPr>
+          <p:nvPr/>
+        </p:nvPicPr>
+        <p:blipFill rotWithShape="1">
+          <a:blip r:embed="rId3"/>
+          <a:stretch>
+            <a:fillRect/>
+          </a:stretch>
+        </p:blipFill>
+        <p:spPr>
+          <a:xfrm>
+            <a:off x="1600200" y="2571750"/>
+            <a:ext cx="1140130" cy="979138"/>
+          </a:xfrm>
+          <a:prstGeom prst="rect">
+            <a:avLst/>
+          </a:prstGeom>
+        </p:spPr>
+      </p:pic>
     </p:spTree>
   </p:cSld>
   <p:clrMapOvr>
@@ -7970,21 +6587,21 @@
           <a:bodyPr wrap="square" lIns="0" tIns="0" rIns="0" bIns="0" rtlCol="0" anchor="ctr"/>
           <a:lstStyle/>
           <a:p>
-            <a:pPr algn="ctr" indent="0" marL="0">
-              <a:buNone/>
-            </a:pPr>
-            <a:r>
-              <a:rPr lang="en-US" sz="900" b="1" dirty="0">
+            <a:pPr marL="0" indent="0" algn="ctr">
+              <a:buNone/>
+            </a:pPr>
+            <a:r>
+              <a:rPr lang="en-US" sz="900" b="1">
                 <a:solidFill>
                   <a:srgbClr val="1D4ED8"/>
                 </a:solidFill>
-                <a:latin typeface="Malgun Gothic" pitchFamily="34" charset="0"/>
-                <a:ea typeface="Malgun Gothic" pitchFamily="34" charset="-122"/>
-                <a:cs typeface="Malgun Gothic" pitchFamily="34" charset="-120"/>
+                <a:latin typeface="Malgun Gothic"/>
+                <a:ea typeface="Malgun Gothic"/>
+                <a:cs typeface="Malgun Gothic"/>
               </a:rPr>
               <a:t>3M 사내 클럽 비용 정산 시스템</a:t>
             </a:r>
-            <a:endParaRPr lang="en-US" sz="900" dirty="0"/>
+            <a:endParaRPr lang="en-US" sz="900"/>
           </a:p>
         </p:txBody>
       </p:sp>
@@ -8009,21 +6626,21 @@
           <a:bodyPr wrap="square" lIns="0" tIns="0" rIns="0" bIns="0" rtlCol="0" anchor="ctr"/>
           <a:lstStyle/>
           <a:p>
-            <a:pPr indent="0" marL="0">
-              <a:buNone/>
-            </a:pPr>
-            <a:r>
-              <a:rPr lang="en-US" sz="1800" b="1" dirty="0">
+            <a:pPr marL="0" indent="0">
+              <a:buNone/>
+            </a:pPr>
+            <a:r>
+              <a:rPr lang="en-US" sz="1800" b="1">
                 <a:solidFill>
                   <a:srgbClr val="0F172A"/>
                 </a:solidFill>
-                <a:latin typeface="Malgun Gothic" pitchFamily="34" charset="0"/>
-                <a:ea typeface="Malgun Gothic" pitchFamily="34" charset="-122"/>
-                <a:cs typeface="Malgun Gothic" pitchFamily="34" charset="-120"/>
+                <a:latin typeface="Malgun Gothic"/>
+                <a:ea typeface="Malgun Gothic"/>
+                <a:cs typeface="Malgun Gothic"/>
               </a:rPr>
               <a:t>Step 3. 비용 항목 추가 &amp; 3대 카테고리 규정 분류</a:t>
             </a:r>
-            <a:endParaRPr lang="en-US" sz="1800" dirty="0"/>
+            <a:endParaRPr lang="en-US" sz="1800"/>
           </a:p>
         </p:txBody>
       </p:sp>
@@ -8048,21 +6665,21 @@
           <a:bodyPr wrap="square" lIns="0" tIns="0" rIns="0" bIns="0" rtlCol="0" anchor="ctr"/>
           <a:lstStyle/>
           <a:p>
-            <a:pPr indent="0" marL="0">
-              <a:buNone/>
-            </a:pPr>
-            <a:r>
-              <a:rPr lang="en-US" sz="1050" dirty="0">
+            <a:pPr marL="0" indent="0">
+              <a:buNone/>
+            </a:pPr>
+            <a:r>
+              <a:rPr lang="en-US" sz="1050">
                 <a:solidFill>
                   <a:srgbClr val="475569"/>
                 </a:solidFill>
-                <a:latin typeface="Malgun Gothic" pitchFamily="34" charset="0"/>
-                <a:ea typeface="Malgun Gothic" pitchFamily="34" charset="-122"/>
-                <a:cs typeface="Malgun Gothic" pitchFamily="34" charset="-120"/>
+                <a:latin typeface="Malgun Gothic"/>
+                <a:ea typeface="Malgun Gothic"/>
+                <a:cs typeface="Malgun Gothic"/>
               </a:rPr>
               <a:t>식대, 장비 대관료, 상품비 등 항목별 특성에 맞춰 최적의 지원 규정이 자동으로 적용됩니다.</a:t>
             </a:r>
-            <a:endParaRPr lang="en-US" sz="1050" dirty="0"/>
+            <a:endParaRPr lang="en-US" sz="1050"/>
           </a:p>
         </p:txBody>
       </p:sp>
@@ -8110,21 +6727,21 @@
           <a:bodyPr wrap="square" lIns="0" tIns="0" rIns="0" bIns="0" rtlCol="0" anchor="ctr"/>
           <a:lstStyle/>
           <a:p>
-            <a:pPr indent="0" marL="0">
-              <a:buNone/>
-            </a:pPr>
-            <a:r>
-              <a:rPr lang="en-US" sz="800" dirty="0">
+            <a:pPr marL="0" indent="0">
+              <a:buNone/>
+            </a:pPr>
+            <a:r>
+              <a:rPr lang="en-US" sz="800">
                 <a:solidFill>
                   <a:srgbClr val="64748B"/>
                 </a:solidFill>
-                <a:latin typeface="Malgun Gothic" pitchFamily="34" charset="0"/>
-                <a:ea typeface="Malgun Gothic" pitchFamily="34" charset="-122"/>
-                <a:cs typeface="Malgun Gothic" pitchFamily="34" charset="-120"/>
+                <a:latin typeface="Malgun Gothic"/>
+                <a:ea typeface="Malgun Gothic"/>
+                <a:cs typeface="Malgun Gothic"/>
               </a:rPr>
               <a:t>3M 사내 동아리·클럽 비용 정산기 (v1.6.310) | 실무 사용자 설명회</a:t>
             </a:r>
-            <a:endParaRPr lang="en-US" sz="800" dirty="0"/>
+            <a:endParaRPr lang="en-US" sz="800"/>
           </a:p>
         </p:txBody>
       </p:sp>
@@ -8149,34 +6766,34 @@
           <a:bodyPr wrap="square" lIns="0" tIns="0" rIns="0" bIns="0" rtlCol="0" anchor="ctr"/>
           <a:lstStyle/>
           <a:p>
-            <a:pPr algn="r" indent="0" marL="0">
-              <a:buNone/>
-            </a:pPr>
-            <a:r>
-              <a:rPr lang="en-US" sz="750" dirty="0">
+            <a:pPr marL="0" indent="0" algn="r">
+              <a:buNone/>
+            </a:pPr>
+            <a:r>
+              <a:rPr lang="en-US" sz="750">
                 <a:solidFill>
                   <a:srgbClr val="64748B"/>
                 </a:solidFill>
-                <a:latin typeface="Malgun Gothic" pitchFamily="34" charset="0"/>
-                <a:ea typeface="Malgun Gothic" pitchFamily="34" charset="-122"/>
-                <a:cs typeface="Malgun Gothic" pitchFamily="34" charset="-120"/>
+                <a:latin typeface="Malgun Gothic"/>
+                <a:ea typeface="Malgun Gothic"/>
+                <a:cs typeface="Malgun Gothic"/>
               </a:rPr>
               <a:t>COPYRIGHT © 2026 3M ALL RIGHTS RESERVED</a:t>
             </a:r>
-            <a:endParaRPr lang="en-US" sz="750" dirty="0"/>
+            <a:endParaRPr lang="en-US" sz="750"/>
           </a:p>
         </p:txBody>
       </p:sp>
       <p:pic>
         <p:nvPicPr>
-          <p:cNvPr id="11" name="Image 0" descr="preencoded.png">    </p:cNvPr>
+          <p:cNvPr id="11" name="Image 0" descr="preencoded.png"/>
           <p:cNvPicPr>
             <a:picLocks noChangeAspect="1"/>
           </p:cNvPicPr>
           <p:nvPr/>
         </p:nvPicPr>
-        <p:blipFill>
-          <a:blip r:embed="rId1"/>
+        <p:blipFill rotWithShape="1">
+          <a:blip r:embed="rId2"/>
           <a:stretch>
             <a:fillRect/>
           </a:stretch>
@@ -8239,21 +6856,21 @@
           <a:bodyPr wrap="square" lIns="0" tIns="0" rIns="0" bIns="0" rtlCol="0" anchor="ctr"/>
           <a:lstStyle/>
           <a:p>
-            <a:pPr indent="0" marL="0">
-              <a:buNone/>
-            </a:pPr>
-            <a:r>
-              <a:rPr lang="en-US" sz="1250" b="1" dirty="0">
+            <a:pPr marL="0" indent="0">
+              <a:buNone/>
+            </a:pPr>
+            <a:r>
+              <a:rPr lang="en-US" sz="1250" b="1">
                 <a:solidFill>
                   <a:srgbClr val="D97706"/>
                 </a:solidFill>
-                <a:latin typeface="Malgun Gothic" pitchFamily="34" charset="0"/>
-                <a:ea typeface="Malgun Gothic" pitchFamily="34" charset="-122"/>
-                <a:cs typeface="Malgun Gothic" pitchFamily="34" charset="-120"/>
+                <a:latin typeface="Malgun Gothic"/>
+                <a:ea typeface="Malgun Gothic"/>
+                <a:cs typeface="Malgun Gothic"/>
               </a:rPr>
               <a:t>📋 비용 입력 방법 및 3대 카테고리 규정</a:t>
             </a:r>
-            <a:endParaRPr lang="en-US" sz="1250" dirty="0"/>
+            <a:endParaRPr lang="en-US" sz="1250"/>
           </a:p>
         </p:txBody>
       </p:sp>
@@ -8278,21 +6895,21 @@
           <a:bodyPr wrap="square" lIns="0" tIns="0" rIns="0" bIns="0" rtlCol="0" anchor="ctr"/>
           <a:lstStyle/>
           <a:p>
-            <a:pPr indent="0" marL="0">
-              <a:buNone/>
-            </a:pPr>
-            <a:r>
-              <a:rPr lang="en-US" sz="1050" b="1" dirty="0">
+            <a:pPr marL="0" indent="0">
+              <a:buNone/>
+            </a:pPr>
+            <a:r>
+              <a:rPr lang="en-US" sz="1050" b="1">
                 <a:solidFill>
                   <a:srgbClr val="0F172A"/>
                 </a:solidFill>
-                <a:latin typeface="Malgun Gothic" pitchFamily="34" charset="0"/>
-                <a:ea typeface="Malgun Gothic" pitchFamily="34" charset="-122"/>
-                <a:cs typeface="Malgun Gothic" pitchFamily="34" charset="-120"/>
+                <a:latin typeface="Malgun Gothic"/>
+                <a:ea typeface="Malgun Gothic"/>
+                <a:cs typeface="Malgun Gothic"/>
               </a:rPr>
               <a:t>① 행사비 (식대, 다과비 등)</a:t>
             </a:r>
-            <a:endParaRPr lang="en-US" sz="1050" dirty="0"/>
+            <a:endParaRPr lang="en-US" sz="1050"/>
           </a:p>
         </p:txBody>
       </p:sp>
@@ -8344,21 +6961,21 @@
           <a:bodyPr wrap="square" lIns="0" tIns="0" rIns="0" bIns="0" rtlCol="0" anchor="ctr"/>
           <a:lstStyle/>
           <a:p>
-            <a:pPr algn="ctr" indent="0" marL="0">
-              <a:buNone/>
-            </a:pPr>
-            <a:r>
-              <a:rPr lang="en-US" sz="750" dirty="0">
+            <a:pPr marL="0" indent="0" algn="ctr">
+              <a:buNone/>
+            </a:pPr>
+            <a:r>
+              <a:rPr lang="en-US" sz="750">
                 <a:solidFill>
                   <a:srgbClr val="2563EB"/>
                 </a:solidFill>
-                <a:latin typeface="Malgun Gothic" pitchFamily="34" charset="0"/>
-                <a:ea typeface="Malgun Gothic" pitchFamily="34" charset="-122"/>
-                <a:cs typeface="Malgun Gothic" pitchFamily="34" charset="-120"/>
+                <a:latin typeface="Malgun Gothic"/>
+                <a:ea typeface="Malgun Gothic"/>
+                <a:cs typeface="Malgun Gothic"/>
               </a:rPr>
               <a:t>인원수 비례 4구간 분할</a:t>
             </a:r>
-            <a:endParaRPr lang="en-US" sz="750" dirty="0"/>
+            <a:endParaRPr lang="en-US" sz="750"/>
           </a:p>
         </p:txBody>
       </p:sp>
@@ -8383,24 +7000,24 @@
           <a:bodyPr wrap="square" lIns="0" tIns="0" rIns="0" bIns="0" rtlCol="0" anchor="ctr"/>
           <a:lstStyle/>
           <a:p>
-            <a:pPr indent="0" marL="0">
+            <a:pPr marL="0" indent="0">
               <a:lnSpc>
                 <a:spcPts val="1350"/>
               </a:lnSpc>
               <a:buNone/>
             </a:pPr>
             <a:r>
-              <a:rPr lang="en-US" sz="880" dirty="0">
+              <a:rPr lang="en-US" sz="880">
                 <a:solidFill>
                   <a:srgbClr val="475569"/>
                 </a:solidFill>
-                <a:latin typeface="Malgun Gothic" pitchFamily="34" charset="0"/>
-                <a:ea typeface="Malgun Gothic" pitchFamily="34" charset="-122"/>
-                <a:cs typeface="Malgun Gothic" pitchFamily="34" charset="-120"/>
+                <a:latin typeface="Malgun Gothic"/>
+                <a:ea typeface="Malgun Gothic"/>
+                <a:cs typeface="Malgun Gothic"/>
               </a:rPr>
               <a:t>참석자 1인당 비용으로 자동 환산되어 [가/나/다/라] 4단계 규정 구간에 따라 회사 지원금과 자부담으로 정밀 분할됩니다.</a:t>
             </a:r>
-            <a:endParaRPr lang="en-US" sz="880" dirty="0"/>
+            <a:endParaRPr lang="en-US" sz="880"/>
           </a:p>
         </p:txBody>
       </p:sp>
@@ -8425,21 +7042,21 @@
           <a:bodyPr wrap="square" lIns="0" tIns="0" rIns="0" bIns="0" rtlCol="0" anchor="ctr"/>
           <a:lstStyle/>
           <a:p>
-            <a:pPr indent="0" marL="0">
-              <a:buNone/>
-            </a:pPr>
-            <a:r>
-              <a:rPr lang="en-US" sz="1050" b="1" dirty="0">
+            <a:pPr marL="0" indent="0">
+              <a:buNone/>
+            </a:pPr>
+            <a:r>
+              <a:rPr lang="en-US" sz="1050" b="1">
                 <a:solidFill>
                   <a:srgbClr val="0F172A"/>
                 </a:solidFill>
-                <a:latin typeface="Malgun Gothic" pitchFamily="34" charset="0"/>
-                <a:ea typeface="Malgun Gothic" pitchFamily="34" charset="-122"/>
-                <a:cs typeface="Malgun Gothic" pitchFamily="34" charset="-120"/>
+                <a:latin typeface="Malgun Gothic"/>
+                <a:ea typeface="Malgun Gothic"/>
+                <a:cs typeface="Malgun Gothic"/>
               </a:rPr>
               <a:t>② 시설 및 장비 (대관료, 장비 렌탈)</a:t>
             </a:r>
-            <a:endParaRPr lang="en-US" sz="1050" dirty="0"/>
+            <a:endParaRPr lang="en-US" sz="1050"/>
           </a:p>
         </p:txBody>
       </p:sp>
@@ -8491,21 +7108,21 @@
           <a:bodyPr wrap="square" lIns="0" tIns="0" rIns="0" bIns="0" rtlCol="0" anchor="ctr"/>
           <a:lstStyle/>
           <a:p>
-            <a:pPr algn="ctr" indent="0" marL="0">
-              <a:buNone/>
-            </a:pPr>
-            <a:r>
-              <a:rPr lang="en-US" sz="750" dirty="0">
+            <a:pPr marL="0" indent="0" algn="ctr">
+              <a:buNone/>
+            </a:pPr>
+            <a:r>
+              <a:rPr lang="en-US" sz="750">
                 <a:solidFill>
                   <a:srgbClr val="2563EB"/>
                 </a:solidFill>
-                <a:latin typeface="Malgun Gothic" pitchFamily="34" charset="0"/>
-                <a:ea typeface="Malgun Gothic" pitchFamily="34" charset="-122"/>
-                <a:cs typeface="Malgun Gothic" pitchFamily="34" charset="-120"/>
+                <a:latin typeface="Malgun Gothic"/>
+                <a:ea typeface="Malgun Gothic"/>
+                <a:cs typeface="Malgun Gothic"/>
               </a:rPr>
               <a:t>인당 85,000원 Flat 한도</a:t>
             </a:r>
-            <a:endParaRPr lang="en-US" sz="750" dirty="0"/>
+            <a:endParaRPr lang="en-US" sz="750"/>
           </a:p>
         </p:txBody>
       </p:sp>
@@ -8530,24 +7147,24 @@
           <a:bodyPr wrap="square" lIns="0" tIns="0" rIns="0" bIns="0" rtlCol="0" anchor="ctr"/>
           <a:lstStyle/>
           <a:p>
-            <a:pPr indent="0" marL="0">
+            <a:pPr marL="0" indent="0">
               <a:lnSpc>
                 <a:spcPts val="1350"/>
               </a:lnSpc>
               <a:buNone/>
             </a:pPr>
             <a:r>
-              <a:rPr lang="en-US" sz="880" dirty="0">
+              <a:rPr lang="en-US" sz="880">
                 <a:solidFill>
                   <a:srgbClr val="475569"/>
                 </a:solidFill>
-                <a:latin typeface="Malgun Gothic" pitchFamily="34" charset="0"/>
-                <a:ea typeface="Malgun Gothic" pitchFamily="34" charset="-122"/>
-                <a:cs typeface="Malgun Gothic" pitchFamily="34" charset="-120"/>
+                <a:latin typeface="Malgun Gothic"/>
+                <a:ea typeface="Malgun Gothic"/>
+                <a:cs typeface="Malgun Gothic"/>
               </a:rPr>
               <a:t>인원수와 무관한 정액 비용 특성을 반영하여, 인당 85,000원 × 인원수 한도 내에서 전액 법인카드로 우선 지원 제안됩니다.</a:t>
             </a:r>
-            <a:endParaRPr lang="en-US" sz="880" dirty="0"/>
+            <a:endParaRPr lang="en-US" sz="880"/>
           </a:p>
         </p:txBody>
       </p:sp>
@@ -8572,21 +7189,21 @@
           <a:bodyPr wrap="square" lIns="0" tIns="0" rIns="0" bIns="0" rtlCol="0" anchor="ctr"/>
           <a:lstStyle/>
           <a:p>
-            <a:pPr indent="0" marL="0">
-              <a:buNone/>
-            </a:pPr>
-            <a:r>
-              <a:rPr lang="en-US" sz="1050" b="1" dirty="0">
+            <a:pPr marL="0" indent="0">
+              <a:buNone/>
+            </a:pPr>
+            <a:r>
+              <a:rPr lang="en-US" sz="1050" b="1">
                 <a:solidFill>
                   <a:srgbClr val="0F172A"/>
                 </a:solidFill>
-                <a:latin typeface="Malgun Gothic" pitchFamily="34" charset="0"/>
-                <a:ea typeface="Malgun Gothic" pitchFamily="34" charset="-122"/>
-                <a:cs typeface="Malgun Gothic" pitchFamily="34" charset="-120"/>
+                <a:latin typeface="Malgun Gothic"/>
+                <a:ea typeface="Malgun Gothic"/>
+                <a:cs typeface="Malgun Gothic"/>
               </a:rPr>
               <a:t>③ 상품비 (기념품, 시상품)</a:t>
             </a:r>
-            <a:endParaRPr lang="en-US" sz="1050" dirty="0"/>
+            <a:endParaRPr lang="en-US" sz="1050"/>
           </a:p>
         </p:txBody>
       </p:sp>
@@ -8638,21 +7255,21 @@
           <a:bodyPr wrap="square" lIns="0" tIns="0" rIns="0" bIns="0" rtlCol="0" anchor="ctr"/>
           <a:lstStyle/>
           <a:p>
-            <a:pPr algn="ctr" indent="0" marL="0">
-              <a:buNone/>
-            </a:pPr>
-            <a:r>
-              <a:rPr lang="en-US" sz="750" dirty="0">
+            <a:pPr marL="0" indent="0" algn="ctr">
+              <a:buNone/>
+            </a:pPr>
+            <a:r>
+              <a:rPr lang="en-US" sz="750">
                 <a:solidFill>
                   <a:srgbClr val="E11D48"/>
                 </a:solidFill>
-                <a:latin typeface="Malgun Gothic" pitchFamily="34" charset="0"/>
-                <a:ea typeface="Malgun Gothic" pitchFamily="34" charset="-122"/>
-                <a:cs typeface="Malgun Gothic" pitchFamily="34" charset="-120"/>
+                <a:latin typeface="Malgun Gothic"/>
+                <a:ea typeface="Malgun Gothic"/>
+                <a:cs typeface="Malgun Gothic"/>
               </a:rPr>
               <a:t>연간 50만원 한도 실시간 감시</a:t>
             </a:r>
-            <a:endParaRPr lang="en-US" sz="750" dirty="0"/>
+            <a:endParaRPr lang="en-US" sz="750"/>
           </a:p>
         </p:txBody>
       </p:sp>
@@ -8677,24 +7294,24 @@
           <a:bodyPr wrap="square" lIns="0" tIns="0" rIns="0" bIns="0" rtlCol="0" anchor="ctr"/>
           <a:lstStyle/>
           <a:p>
-            <a:pPr indent="0" marL="0">
+            <a:pPr marL="0" indent="0">
               <a:lnSpc>
                 <a:spcPts val="1350"/>
               </a:lnSpc>
               <a:buNone/>
             </a:pPr>
             <a:r>
-              <a:rPr lang="en-US" sz="880" dirty="0">
+              <a:rPr lang="en-US" sz="880">
                 <a:solidFill>
                   <a:srgbClr val="475569"/>
                 </a:solidFill>
-                <a:latin typeface="Malgun Gothic" pitchFamily="34" charset="0"/>
-                <a:ea typeface="Malgun Gothic" pitchFamily="34" charset="-122"/>
-                <a:cs typeface="Malgun Gothic" pitchFamily="34" charset="-120"/>
+                <a:latin typeface="Malgun Gothic"/>
+                <a:ea typeface="Malgun Gothic"/>
+                <a:cs typeface="Malgun Gothic"/>
               </a:rPr>
               <a:t>동아리당 연간 총 상품비 누적 한도(500,000원)를 실시간 감시하며, 잔여 한도 초과 시 자동으로 등록이 차단됩니다.</a:t>
             </a:r>
-            <a:endParaRPr lang="en-US" sz="880" dirty="0"/>
+            <a:endParaRPr lang="en-US" sz="880"/>
           </a:p>
         </p:txBody>
       </p:sp>
@@ -8746,24 +7363,24 @@
           <a:bodyPr wrap="square" lIns="0" tIns="0" rIns="0" bIns="0" rtlCol="0" anchor="ctr"/>
           <a:lstStyle/>
           <a:p>
-            <a:pPr indent="0" marL="0">
+            <a:pPr marL="0" indent="0">
               <a:lnSpc>
                 <a:spcPts val="1250"/>
               </a:lnSpc>
               <a:buNone/>
             </a:pPr>
             <a:r>
-              <a:rPr lang="en-US" sz="830" dirty="0">
+              <a:rPr lang="en-US" sz="830">
                 <a:solidFill>
                   <a:srgbClr val="1D4ED8"/>
                 </a:solidFill>
-                <a:latin typeface="Malgun Gothic" pitchFamily="34" charset="0"/>
-                <a:ea typeface="Malgun Gothic" pitchFamily="34" charset="-122"/>
-                <a:cs typeface="Malgun Gothic" pitchFamily="34" charset="-120"/>
+                <a:latin typeface="Malgun Gothic"/>
+                <a:ea typeface="Malgun Gothic"/>
+                <a:cs typeface="Malgun Gothic"/>
               </a:rPr>
               <a:t>💳 결제 수단 간편 스위치: 상단 [법인카드 / 개인카드] 토글 스위치로 결제 방식을 선택하면, 회사 지원금과 개인 정산금이 100% 자동 분리됩니다.</a:t>
             </a:r>
-            <a:endParaRPr lang="en-US" sz="830" dirty="0"/>
+            <a:endParaRPr lang="en-US" sz="830"/>
           </a:p>
         </p:txBody>
       </p:sp>
@@ -8890,21 +7507,21 @@
           <a:bodyPr wrap="square" lIns="0" tIns="0" rIns="0" bIns="0" rtlCol="0" anchor="ctr"/>
           <a:lstStyle/>
           <a:p>
-            <a:pPr algn="ctr" indent="0" marL="0">
-              <a:buNone/>
-            </a:pPr>
-            <a:r>
-              <a:rPr lang="en-US" sz="900" b="1" dirty="0">
+            <a:pPr marL="0" indent="0" algn="ctr">
+              <a:buNone/>
+            </a:pPr>
+            <a:r>
+              <a:rPr lang="en-US" sz="900" b="1">
                 <a:solidFill>
                   <a:srgbClr val="1D4ED8"/>
                 </a:solidFill>
-                <a:latin typeface="Malgun Gothic" pitchFamily="34" charset="0"/>
-                <a:ea typeface="Malgun Gothic" pitchFamily="34" charset="-122"/>
-                <a:cs typeface="Malgun Gothic" pitchFamily="34" charset="-120"/>
+                <a:latin typeface="Malgun Gothic"/>
+                <a:ea typeface="Malgun Gothic"/>
+                <a:cs typeface="Malgun Gothic"/>
               </a:rPr>
               <a:t>3M 사내 클럽 비용 정산 시스템</a:t>
             </a:r>
-            <a:endParaRPr lang="en-US" sz="900" dirty="0"/>
+            <a:endParaRPr lang="en-US" sz="900"/>
           </a:p>
         </p:txBody>
       </p:sp>
@@ -8929,21 +7546,21 @@
           <a:bodyPr wrap="square" lIns="0" tIns="0" rIns="0" bIns="0" rtlCol="0" anchor="ctr"/>
           <a:lstStyle/>
           <a:p>
-            <a:pPr indent="0" marL="0">
-              <a:buNone/>
-            </a:pPr>
-            <a:r>
-              <a:rPr lang="en-US" sz="1800" b="1" dirty="0">
+            <a:pPr marL="0" indent="0">
+              <a:buNone/>
+            </a:pPr>
+            <a:r>
+              <a:rPr lang="en-US" sz="1800" b="1">
                 <a:solidFill>
                   <a:srgbClr val="0F172A"/>
                 </a:solidFill>
-                <a:latin typeface="Malgun Gothic" pitchFamily="34" charset="0"/>
-                <a:ea typeface="Malgun Gothic" pitchFamily="34" charset="-122"/>
-                <a:cs typeface="Malgun Gothic" pitchFamily="34" charset="-120"/>
+                <a:latin typeface="Malgun Gothic"/>
+                <a:ea typeface="Malgun Gothic"/>
+                <a:cs typeface="Malgun Gothic"/>
               </a:rPr>
               <a:t>Step 4. 실시간 자동 정산 결과 &amp; 규정 100% 검증</a:t>
             </a:r>
-            <a:endParaRPr lang="en-US" sz="1800" dirty="0"/>
+            <a:endParaRPr lang="en-US" sz="1800"/>
           </a:p>
         </p:txBody>
       </p:sp>
@@ -8968,21 +7585,21 @@
           <a:bodyPr wrap="square" lIns="0" tIns="0" rIns="0" bIns="0" rtlCol="0" anchor="ctr"/>
           <a:lstStyle/>
           <a:p>
-            <a:pPr indent="0" marL="0">
-              <a:buNone/>
-            </a:pPr>
-            <a:r>
-              <a:rPr lang="en-US" sz="1050" dirty="0">
+            <a:pPr marL="0" indent="0">
+              <a:buNone/>
+            </a:pPr>
+            <a:r>
+              <a:rPr lang="en-US" sz="1050">
                 <a:solidFill>
                   <a:srgbClr val="475569"/>
                 </a:solidFill>
-                <a:latin typeface="Malgun Gothic" pitchFamily="34" charset="0"/>
-                <a:ea typeface="Malgun Gothic" pitchFamily="34" charset="-122"/>
-                <a:cs typeface="Malgun Gothic" pitchFamily="34" charset="-120"/>
+                <a:latin typeface="Malgun Gothic"/>
+                <a:ea typeface="Malgun Gothic"/>
+                <a:cs typeface="Malgun Gothic"/>
               </a:rPr>
               <a:t>계산기나 수기 검토 없이, 4구간 자부담 공식과 잔여 예산 대조가 실시간으로 완벽하게 처리됩니다.</a:t>
             </a:r>
-            <a:endParaRPr lang="en-US" sz="1050" dirty="0"/>
+            <a:endParaRPr lang="en-US" sz="1050"/>
           </a:p>
         </p:txBody>
       </p:sp>
@@ -9030,21 +7647,21 @@
           <a:bodyPr wrap="square" lIns="0" tIns="0" rIns="0" bIns="0" rtlCol="0" anchor="ctr"/>
           <a:lstStyle/>
           <a:p>
-            <a:pPr indent="0" marL="0">
-              <a:buNone/>
-            </a:pPr>
-            <a:r>
-              <a:rPr lang="en-US" sz="800" dirty="0">
+            <a:pPr marL="0" indent="0">
+              <a:buNone/>
+            </a:pPr>
+            <a:r>
+              <a:rPr lang="en-US" sz="800">
                 <a:solidFill>
                   <a:srgbClr val="64748B"/>
                 </a:solidFill>
-                <a:latin typeface="Malgun Gothic" pitchFamily="34" charset="0"/>
-                <a:ea typeface="Malgun Gothic" pitchFamily="34" charset="-122"/>
-                <a:cs typeface="Malgun Gothic" pitchFamily="34" charset="-120"/>
+                <a:latin typeface="Malgun Gothic"/>
+                <a:ea typeface="Malgun Gothic"/>
+                <a:cs typeface="Malgun Gothic"/>
               </a:rPr>
               <a:t>3M 사내 동아리·클럽 비용 정산기 (v1.6.310) | 실무 사용자 설명회</a:t>
             </a:r>
-            <a:endParaRPr lang="en-US" sz="800" dirty="0"/>
+            <a:endParaRPr lang="en-US" sz="800"/>
           </a:p>
         </p:txBody>
       </p:sp>
@@ -9069,34 +7686,34 @@
           <a:bodyPr wrap="square" lIns="0" tIns="0" rIns="0" bIns="0" rtlCol="0" anchor="ctr"/>
           <a:lstStyle/>
           <a:p>
-            <a:pPr algn="r" indent="0" marL="0">
-              <a:buNone/>
-            </a:pPr>
-            <a:r>
-              <a:rPr lang="en-US" sz="750" dirty="0">
+            <a:pPr marL="0" indent="0" algn="r">
+              <a:buNone/>
+            </a:pPr>
+            <a:r>
+              <a:rPr lang="en-US" sz="750">
                 <a:solidFill>
                   <a:srgbClr val="64748B"/>
                 </a:solidFill>
-                <a:latin typeface="Malgun Gothic" pitchFamily="34" charset="0"/>
-                <a:ea typeface="Malgun Gothic" pitchFamily="34" charset="-122"/>
-                <a:cs typeface="Malgun Gothic" pitchFamily="34" charset="-120"/>
+                <a:latin typeface="Malgun Gothic"/>
+                <a:ea typeface="Malgun Gothic"/>
+                <a:cs typeface="Malgun Gothic"/>
               </a:rPr>
               <a:t>COPYRIGHT © 2026 3M ALL RIGHTS RESERVED</a:t>
             </a:r>
-            <a:endParaRPr lang="en-US" sz="750" dirty="0"/>
+            <a:endParaRPr lang="en-US" sz="750"/>
           </a:p>
         </p:txBody>
       </p:sp>
       <p:pic>
         <p:nvPicPr>
-          <p:cNvPr id="11" name="Image 0" descr="preencoded.png">    </p:cNvPr>
+          <p:cNvPr id="11" name="Image 0" descr="preencoded.png"/>
           <p:cNvPicPr>
             <a:picLocks noChangeAspect="1"/>
           </p:cNvPicPr>
           <p:nvPr/>
         </p:nvPicPr>
-        <p:blipFill>
-          <a:blip r:embed="rId1"/>
+        <p:blipFill rotWithShape="1">
+          <a:blip r:embed="rId2"/>
           <a:stretch>
             <a:fillRect/>
           </a:stretch>
@@ -9159,21 +7776,21 @@
           <a:bodyPr wrap="square" lIns="0" tIns="0" rIns="0" bIns="0" rtlCol="0" anchor="ctr"/>
           <a:lstStyle/>
           <a:p>
-            <a:pPr indent="0" marL="0">
-              <a:buNone/>
-            </a:pPr>
-            <a:r>
-              <a:rPr lang="en-US" sz="1100" b="1" dirty="0">
+            <a:pPr marL="0" indent="0">
+              <a:buNone/>
+            </a:pPr>
+            <a:r>
+              <a:rPr lang="en-US" sz="1100" b="1">
                 <a:solidFill>
                   <a:srgbClr val="2563EB"/>
                 </a:solidFill>
-                <a:latin typeface="Malgun Gothic" pitchFamily="34" charset="0"/>
-                <a:ea typeface="Malgun Gothic" pitchFamily="34" charset="-122"/>
-                <a:cs typeface="Malgun Gothic" pitchFamily="34" charset="-120"/>
+                <a:latin typeface="Malgun Gothic"/>
+                <a:ea typeface="Malgun Gothic"/>
+                <a:cs typeface="Malgun Gothic"/>
               </a:rPr>
               <a:t>📊 3M 사내 동아리 4구간 지원 기준표 (규정 공식)</a:t>
             </a:r>
-            <a:endParaRPr lang="en-US" sz="1100" dirty="0"/>
+            <a:endParaRPr lang="en-US" sz="1100"/>
           </a:p>
         </p:txBody>
       </p:sp>
@@ -9198,21 +7815,21 @@
           <a:bodyPr wrap="square" lIns="0" tIns="0" rIns="0" bIns="0" rtlCol="0" anchor="ctr"/>
           <a:lstStyle/>
           <a:p>
-            <a:pPr indent="0" marL="0">
-              <a:buNone/>
-            </a:pPr>
-            <a:r>
-              <a:rPr lang="en-US" sz="880" b="1" dirty="0">
+            <a:pPr marL="0" indent="0">
+              <a:buNone/>
+            </a:pPr>
+            <a:r>
+              <a:rPr lang="en-US" sz="880" b="1">
                 <a:solidFill>
                   <a:srgbClr val="0F172A"/>
                 </a:solidFill>
-                <a:latin typeface="Malgun Gothic" pitchFamily="34" charset="0"/>
-                <a:ea typeface="Malgun Gothic" pitchFamily="34" charset="-122"/>
-                <a:cs typeface="Malgun Gothic" pitchFamily="34" charset="-120"/>
+                <a:latin typeface="Malgun Gothic"/>
+                <a:ea typeface="Malgun Gothic"/>
+                <a:cs typeface="Malgun Gothic"/>
               </a:rPr>
               <a:t>• 가 구간 (≤ 30,000원)</a:t>
             </a:r>
-            <a:endParaRPr lang="en-US" sz="880" dirty="0"/>
+            <a:endParaRPr lang="en-US" sz="880"/>
           </a:p>
         </p:txBody>
       </p:sp>
@@ -9237,21 +7854,21 @@
           <a:bodyPr wrap="square" lIns="0" tIns="0" rIns="0" bIns="0" rtlCol="0" anchor="ctr"/>
           <a:lstStyle/>
           <a:p>
-            <a:pPr indent="0" marL="0">
-              <a:buNone/>
-            </a:pPr>
-            <a:r>
-              <a:rPr lang="en-US" sz="880" b="1" dirty="0">
+            <a:pPr marL="0" indent="0">
+              <a:buNone/>
+            </a:pPr>
+            <a:r>
+              <a:rPr lang="en-US" sz="880" b="1">
                 <a:solidFill>
                   <a:srgbClr val="D97706"/>
                 </a:solidFill>
-                <a:latin typeface="Malgun Gothic" pitchFamily="34" charset="0"/>
-                <a:ea typeface="Malgun Gothic" pitchFamily="34" charset="-122"/>
-                <a:cs typeface="Malgun Gothic" pitchFamily="34" charset="-120"/>
+                <a:latin typeface="Malgun Gothic"/>
+                <a:ea typeface="Malgun Gothic"/>
+                <a:cs typeface="Malgun Gothic"/>
               </a:rPr>
               <a:t>자부담 0% (전액 지원)</a:t>
             </a:r>
-            <a:endParaRPr lang="en-US" sz="880" dirty="0"/>
+            <a:endParaRPr lang="en-US" sz="880"/>
           </a:p>
         </p:txBody>
       </p:sp>
@@ -9276,21 +7893,21 @@
           <a:bodyPr wrap="square" lIns="0" tIns="0" rIns="0" bIns="0" rtlCol="0" anchor="ctr"/>
           <a:lstStyle/>
           <a:p>
-            <a:pPr indent="0" marL="0">
-              <a:buNone/>
-            </a:pPr>
-            <a:r>
-              <a:rPr lang="en-US" sz="820" dirty="0">
+            <a:pPr marL="0" indent="0">
+              <a:buNone/>
+            </a:pPr>
+            <a:r>
+              <a:rPr lang="en-US" sz="820">
                 <a:solidFill>
                   <a:srgbClr val="475569"/>
                 </a:solidFill>
-                <a:latin typeface="Malgun Gothic" pitchFamily="34" charset="0"/>
-                <a:ea typeface="Malgun Gothic" pitchFamily="34" charset="-122"/>
-                <a:cs typeface="Malgun Gothic" pitchFamily="34" charset="-120"/>
+                <a:latin typeface="Malgun Gothic"/>
+                <a:ea typeface="Malgun Gothic"/>
+                <a:cs typeface="Malgun Gothic"/>
               </a:rPr>
               <a:t>지원금 = 비용 전액</a:t>
             </a:r>
-            <a:endParaRPr lang="en-US" sz="820" dirty="0"/>
+            <a:endParaRPr lang="en-US" sz="820"/>
           </a:p>
         </p:txBody>
       </p:sp>
@@ -9315,21 +7932,21 @@
           <a:bodyPr wrap="square" lIns="0" tIns="0" rIns="0" bIns="0" rtlCol="0" anchor="ctr"/>
           <a:lstStyle/>
           <a:p>
-            <a:pPr indent="0" marL="0">
-              <a:buNone/>
-            </a:pPr>
-            <a:r>
-              <a:rPr lang="en-US" sz="880" b="1" dirty="0">
+            <a:pPr marL="0" indent="0">
+              <a:buNone/>
+            </a:pPr>
+            <a:r>
+              <a:rPr lang="en-US" sz="880" b="1">
                 <a:solidFill>
                   <a:srgbClr val="0F172A"/>
                 </a:solidFill>
-                <a:latin typeface="Malgun Gothic" pitchFamily="34" charset="0"/>
-                <a:ea typeface="Malgun Gothic" pitchFamily="34" charset="-122"/>
-                <a:cs typeface="Malgun Gothic" pitchFamily="34" charset="-120"/>
+                <a:latin typeface="Malgun Gothic"/>
+                <a:ea typeface="Malgun Gothic"/>
+                <a:cs typeface="Malgun Gothic"/>
               </a:rPr>
               <a:t>• 나 구간 (≤ 60,000원)</a:t>
             </a:r>
-            <a:endParaRPr lang="en-US" sz="880" dirty="0"/>
+            <a:endParaRPr lang="en-US" sz="880"/>
           </a:p>
         </p:txBody>
       </p:sp>
@@ -9354,21 +7971,21 @@
           <a:bodyPr wrap="square" lIns="0" tIns="0" rIns="0" bIns="0" rtlCol="0" anchor="ctr"/>
           <a:lstStyle/>
           <a:p>
-            <a:pPr indent="0" marL="0">
-              <a:buNone/>
-            </a:pPr>
-            <a:r>
-              <a:rPr lang="en-US" sz="880" b="1" dirty="0">
+            <a:pPr marL="0" indent="0">
+              <a:buNone/>
+            </a:pPr>
+            <a:r>
+              <a:rPr lang="en-US" sz="880" b="1">
                 <a:solidFill>
                   <a:srgbClr val="D97706"/>
                 </a:solidFill>
-                <a:latin typeface="Malgun Gothic" pitchFamily="34" charset="0"/>
-                <a:ea typeface="Malgun Gothic" pitchFamily="34" charset="-122"/>
-                <a:cs typeface="Malgun Gothic" pitchFamily="34" charset="-120"/>
+                <a:latin typeface="Malgun Gothic"/>
+                <a:ea typeface="Malgun Gothic"/>
+                <a:cs typeface="Malgun Gothic"/>
               </a:rPr>
               <a:t>자부담 20%</a:t>
             </a:r>
-            <a:endParaRPr lang="en-US" sz="880" dirty="0"/>
+            <a:endParaRPr lang="en-US" sz="880"/>
           </a:p>
         </p:txBody>
       </p:sp>
@@ -9393,21 +8010,21 @@
           <a:bodyPr wrap="square" lIns="0" tIns="0" rIns="0" bIns="0" rtlCol="0" anchor="ctr"/>
           <a:lstStyle/>
           <a:p>
-            <a:pPr indent="0" marL="0">
-              <a:buNone/>
-            </a:pPr>
-            <a:r>
-              <a:rPr lang="en-US" sz="820" dirty="0">
+            <a:pPr marL="0" indent="0">
+              <a:buNone/>
+            </a:pPr>
+            <a:r>
+              <a:rPr lang="en-US" sz="820">
                 <a:solidFill>
                   <a:srgbClr val="475569"/>
                 </a:solidFill>
-                <a:latin typeface="Malgun Gothic" pitchFamily="34" charset="0"/>
-                <a:ea typeface="Malgun Gothic" pitchFamily="34" charset="-122"/>
-                <a:cs typeface="Malgun Gothic" pitchFamily="34" charset="-120"/>
+                <a:latin typeface="Malgun Gothic"/>
+                <a:ea typeface="Malgun Gothic"/>
+                <a:cs typeface="Malgun Gothic"/>
               </a:rPr>
               <a:t>지원금 = 비용 × 80%</a:t>
             </a:r>
-            <a:endParaRPr lang="en-US" sz="820" dirty="0"/>
+            <a:endParaRPr lang="en-US" sz="820"/>
           </a:p>
         </p:txBody>
       </p:sp>
@@ -9432,21 +8049,21 @@
           <a:bodyPr wrap="square" lIns="0" tIns="0" rIns="0" bIns="0" rtlCol="0" anchor="ctr"/>
           <a:lstStyle/>
           <a:p>
-            <a:pPr indent="0" marL="0">
-              <a:buNone/>
-            </a:pPr>
-            <a:r>
-              <a:rPr lang="en-US" sz="880" b="1" dirty="0">
+            <a:pPr marL="0" indent="0">
+              <a:buNone/>
+            </a:pPr>
+            <a:r>
+              <a:rPr lang="en-US" sz="880" b="1">
                 <a:solidFill>
                   <a:srgbClr val="0F172A"/>
                 </a:solidFill>
-                <a:latin typeface="Malgun Gothic" pitchFamily="34" charset="0"/>
-                <a:ea typeface="Malgun Gothic" pitchFamily="34" charset="-122"/>
-                <a:cs typeface="Malgun Gothic" pitchFamily="34" charset="-120"/>
+                <a:latin typeface="Malgun Gothic"/>
+                <a:ea typeface="Malgun Gothic"/>
+                <a:cs typeface="Malgun Gothic"/>
               </a:rPr>
               <a:t>• 다 구간 (≤ 120,000원)</a:t>
             </a:r>
-            <a:endParaRPr lang="en-US" sz="880" dirty="0"/>
+            <a:endParaRPr lang="en-US" sz="880"/>
           </a:p>
         </p:txBody>
       </p:sp>
@@ -9471,21 +8088,21 @@
           <a:bodyPr wrap="square" lIns="0" tIns="0" rIns="0" bIns="0" rtlCol="0" anchor="ctr"/>
           <a:lstStyle/>
           <a:p>
-            <a:pPr indent="0" marL="0">
-              <a:buNone/>
-            </a:pPr>
-            <a:r>
-              <a:rPr lang="en-US" sz="880" b="1" dirty="0">
+            <a:pPr marL="0" indent="0">
+              <a:buNone/>
+            </a:pPr>
+            <a:r>
+              <a:rPr lang="en-US" sz="880" b="1">
                 <a:solidFill>
                   <a:srgbClr val="D97706"/>
                 </a:solidFill>
-                <a:latin typeface="Malgun Gothic" pitchFamily="34" charset="0"/>
-                <a:ea typeface="Malgun Gothic" pitchFamily="34" charset="-122"/>
-                <a:cs typeface="Malgun Gothic" pitchFamily="34" charset="-120"/>
+                <a:latin typeface="Malgun Gothic"/>
+                <a:ea typeface="Malgun Gothic"/>
+                <a:cs typeface="Malgun Gothic"/>
               </a:rPr>
               <a:t>6만원 초과분 40%</a:t>
             </a:r>
-            <a:endParaRPr lang="en-US" sz="880" dirty="0"/>
+            <a:endParaRPr lang="en-US" sz="880"/>
           </a:p>
         </p:txBody>
       </p:sp>
@@ -9510,21 +8127,21 @@
           <a:bodyPr wrap="square" lIns="0" tIns="0" rIns="0" bIns="0" rtlCol="0" anchor="ctr"/>
           <a:lstStyle/>
           <a:p>
-            <a:pPr indent="0" marL="0">
-              <a:buNone/>
-            </a:pPr>
-            <a:r>
-              <a:rPr lang="en-US" sz="820" dirty="0">
+            <a:pPr marL="0" indent="0">
+              <a:buNone/>
+            </a:pPr>
+            <a:r>
+              <a:rPr lang="en-US" sz="820">
                 <a:solidFill>
                   <a:srgbClr val="475569"/>
                 </a:solidFill>
-                <a:latin typeface="Malgun Gothic" pitchFamily="34" charset="0"/>
-                <a:ea typeface="Malgun Gothic" pitchFamily="34" charset="-122"/>
-                <a:cs typeface="Malgun Gothic" pitchFamily="34" charset="-120"/>
+                <a:latin typeface="Malgun Gothic"/>
+                <a:ea typeface="Malgun Gothic"/>
+                <a:cs typeface="Malgun Gothic"/>
               </a:rPr>
               <a:t>자부담 = 6만×20% + 초과분×40%</a:t>
             </a:r>
-            <a:endParaRPr lang="en-US" sz="820" dirty="0"/>
+            <a:endParaRPr lang="en-US" sz="820"/>
           </a:p>
         </p:txBody>
       </p:sp>
@@ -9549,21 +8166,21 @@
           <a:bodyPr wrap="square" lIns="0" tIns="0" rIns="0" bIns="0" rtlCol="0" anchor="ctr"/>
           <a:lstStyle/>
           <a:p>
-            <a:pPr indent="0" marL="0">
-              <a:buNone/>
-            </a:pPr>
-            <a:r>
-              <a:rPr lang="en-US" sz="880" b="1" dirty="0">
+            <a:pPr marL="0" indent="0">
+              <a:buNone/>
+            </a:pPr>
+            <a:r>
+              <a:rPr lang="en-US" sz="880" b="1">
                 <a:solidFill>
                   <a:srgbClr val="0F172A"/>
                 </a:solidFill>
-                <a:latin typeface="Malgun Gothic" pitchFamily="34" charset="0"/>
-                <a:ea typeface="Malgun Gothic" pitchFamily="34" charset="-122"/>
-                <a:cs typeface="Malgun Gothic" pitchFamily="34" charset="-120"/>
+                <a:latin typeface="Malgun Gothic"/>
+                <a:ea typeface="Malgun Gothic"/>
+                <a:cs typeface="Malgun Gothic"/>
               </a:rPr>
               <a:t>• 라 구간 (&gt; 120,000원)</a:t>
             </a:r>
-            <a:endParaRPr lang="en-US" sz="880" dirty="0"/>
+            <a:endParaRPr lang="en-US" sz="880"/>
           </a:p>
         </p:txBody>
       </p:sp>
@@ -9588,21 +8205,21 @@
           <a:bodyPr wrap="square" lIns="0" tIns="0" rIns="0" bIns="0" rtlCol="0" anchor="ctr"/>
           <a:lstStyle/>
           <a:p>
-            <a:pPr indent="0" marL="0">
-              <a:buNone/>
-            </a:pPr>
-            <a:r>
-              <a:rPr lang="en-US" sz="880" b="1" dirty="0">
+            <a:pPr marL="0" indent="0">
+              <a:buNone/>
+            </a:pPr>
+            <a:r>
+              <a:rPr lang="en-US" sz="880" b="1">
                 <a:solidFill>
                   <a:srgbClr val="D97706"/>
                 </a:solidFill>
-                <a:latin typeface="Malgun Gothic" pitchFamily="34" charset="0"/>
-                <a:ea typeface="Malgun Gothic" pitchFamily="34" charset="-122"/>
-                <a:cs typeface="Malgun Gothic" pitchFamily="34" charset="-120"/>
+                <a:latin typeface="Malgun Gothic"/>
+                <a:ea typeface="Malgun Gothic"/>
+                <a:cs typeface="Malgun Gothic"/>
               </a:rPr>
               <a:t>인당 최대 85,000원 캡</a:t>
             </a:r>
-            <a:endParaRPr lang="en-US" sz="880" dirty="0"/>
+            <a:endParaRPr lang="en-US" sz="880"/>
           </a:p>
         </p:txBody>
       </p:sp>
@@ -9627,21 +8244,21 @@
           <a:bodyPr wrap="square" lIns="0" tIns="0" rIns="0" bIns="0" rtlCol="0" anchor="ctr"/>
           <a:lstStyle/>
           <a:p>
-            <a:pPr indent="0" marL="0">
-              <a:buNone/>
-            </a:pPr>
-            <a:r>
-              <a:rPr lang="en-US" sz="820" dirty="0">
+            <a:pPr marL="0" indent="0">
+              <a:buNone/>
+            </a:pPr>
+            <a:r>
+              <a:rPr lang="en-US" sz="820">
                 <a:solidFill>
                   <a:srgbClr val="475569"/>
                 </a:solidFill>
-                <a:latin typeface="Malgun Gothic" pitchFamily="34" charset="0"/>
-                <a:ea typeface="Malgun Gothic" pitchFamily="34" charset="-122"/>
-                <a:cs typeface="Malgun Gothic" pitchFamily="34" charset="-120"/>
+                <a:latin typeface="Malgun Gothic"/>
+                <a:ea typeface="Malgun Gothic"/>
+                <a:cs typeface="Malgun Gothic"/>
               </a:rPr>
               <a:t>지원금 = 85,000원 고정 (초과 전액 자부담)</a:t>
             </a:r>
-            <a:endParaRPr lang="en-US" sz="820" dirty="0"/>
+            <a:endParaRPr lang="en-US" sz="820"/>
           </a:p>
         </p:txBody>
       </p:sp>
@@ -9693,21 +8310,21 @@
           <a:bodyPr wrap="square" lIns="0" tIns="0" rIns="0" bIns="0" rtlCol="0" anchor="ctr"/>
           <a:lstStyle/>
           <a:p>
-            <a:pPr indent="0" marL="0">
-              <a:buNone/>
-            </a:pPr>
-            <a:r>
-              <a:rPr lang="en-US" sz="1100" b="1" dirty="0">
+            <a:pPr marL="0" indent="0">
+              <a:buNone/>
+            </a:pPr>
+            <a:r>
+              <a:rPr lang="en-US" sz="1100" b="1">
                 <a:solidFill>
                   <a:srgbClr val="059669"/>
                 </a:solidFill>
-                <a:latin typeface="Malgun Gothic" pitchFamily="34" charset="0"/>
-                <a:ea typeface="Malgun Gothic" pitchFamily="34" charset="-122"/>
-                <a:cs typeface="Malgun Gothic" pitchFamily="34" charset="-120"/>
+                <a:latin typeface="Malgun Gothic"/>
+                <a:ea typeface="Malgun Gothic"/>
+                <a:cs typeface="Malgun Gothic"/>
               </a:rPr>
               <a:t>⚡ 실전 화면 결과 보는 법 (100% 자동 산출)</a:t>
             </a:r>
-            <a:endParaRPr lang="en-US" sz="1100" dirty="0"/>
+            <a:endParaRPr lang="en-US" sz="1100"/>
           </a:p>
         </p:txBody>
       </p:sp>
@@ -9732,21 +8349,21 @@
           <a:bodyPr wrap="square" lIns="0" tIns="0" rIns="0" bIns="0" rtlCol="0" anchor="ctr"/>
           <a:lstStyle/>
           <a:p>
-            <a:pPr indent="0" marL="0">
-              <a:buNone/>
-            </a:pPr>
-            <a:r>
-              <a:rPr lang="en-US" sz="880" b="1" dirty="0">
+            <a:pPr marL="0" indent="0">
+              <a:buNone/>
+            </a:pPr>
+            <a:r>
+              <a:rPr lang="en-US" sz="880" b="1">
                 <a:solidFill>
                   <a:srgbClr val="1D4ED8"/>
                 </a:solidFill>
-                <a:latin typeface="Malgun Gothic" pitchFamily="34" charset="0"/>
-                <a:ea typeface="Malgun Gothic" pitchFamily="34" charset="-122"/>
-                <a:cs typeface="Malgun Gothic" pitchFamily="34" charset="-120"/>
+                <a:latin typeface="Malgun Gothic"/>
+                <a:ea typeface="Malgun Gothic"/>
+                <a:cs typeface="Malgun Gothic"/>
               </a:rPr>
               <a:t>✓ 최종 지원금 (법인카드):</a:t>
             </a:r>
-            <a:endParaRPr lang="en-US" sz="880" dirty="0"/>
+            <a:endParaRPr lang="en-US" sz="880"/>
           </a:p>
         </p:txBody>
       </p:sp>
@@ -9771,21 +8388,21 @@
           <a:bodyPr wrap="square" lIns="0" tIns="0" rIns="0" bIns="0" rtlCol="0" anchor="ctr"/>
           <a:lstStyle/>
           <a:p>
-            <a:pPr indent="0" marL="0">
-              <a:buNone/>
-            </a:pPr>
-            <a:r>
-              <a:rPr lang="en-US" sz="850" dirty="0">
+            <a:pPr marL="0" indent="0">
+              <a:buNone/>
+            </a:pPr>
+            <a:r>
+              <a:rPr lang="en-US" sz="850">
                 <a:solidFill>
                   <a:srgbClr val="334155"/>
                 </a:solidFill>
-                <a:latin typeface="Malgun Gothic" pitchFamily="34" charset="0"/>
-                <a:ea typeface="Malgun Gothic" pitchFamily="34" charset="-122"/>
-                <a:cs typeface="Malgun Gothic" pitchFamily="34" charset="-120"/>
+                <a:latin typeface="Malgun Gothic"/>
+                <a:ea typeface="Malgun Gothic"/>
+                <a:cs typeface="Malgun Gothic"/>
               </a:rPr>
               <a:t>규정 한도 내에서 회사가 지급할 법인카드 총액 (실화면: 360,000원)</a:t>
             </a:r>
-            <a:endParaRPr lang="en-US" sz="850" dirty="0"/>
+            <a:endParaRPr lang="en-US" sz="850"/>
           </a:p>
         </p:txBody>
       </p:sp>
@@ -9810,21 +8427,21 @@
           <a:bodyPr wrap="square" lIns="0" tIns="0" rIns="0" bIns="0" rtlCol="0" anchor="ctr"/>
           <a:lstStyle/>
           <a:p>
-            <a:pPr indent="0" marL="0">
-              <a:buNone/>
-            </a:pPr>
-            <a:r>
-              <a:rPr lang="en-US" sz="880" b="1" dirty="0">
+            <a:pPr marL="0" indent="0">
+              <a:buNone/>
+            </a:pPr>
+            <a:r>
+              <a:rPr lang="en-US" sz="880" b="1">
                 <a:solidFill>
                   <a:srgbClr val="1D4ED8"/>
                 </a:solidFill>
-                <a:latin typeface="Malgun Gothic" pitchFamily="34" charset="0"/>
-                <a:ea typeface="Malgun Gothic" pitchFamily="34" charset="-122"/>
-                <a:cs typeface="Malgun Gothic" pitchFamily="34" charset="-120"/>
+                <a:latin typeface="Malgun Gothic"/>
+                <a:ea typeface="Malgun Gothic"/>
+                <a:cs typeface="Malgun Gothic"/>
               </a:rPr>
               <a:t>✓ 인당 자부담 비용:</a:t>
             </a:r>
-            <a:endParaRPr lang="en-US" sz="880" dirty="0"/>
+            <a:endParaRPr lang="en-US" sz="880"/>
           </a:p>
         </p:txBody>
       </p:sp>
@@ -9849,21 +8466,21 @@
           <a:bodyPr wrap="square" lIns="0" tIns="0" rIns="0" bIns="0" rtlCol="0" anchor="ctr"/>
           <a:lstStyle/>
           <a:p>
-            <a:pPr indent="0" marL="0">
-              <a:buNone/>
-            </a:pPr>
-            <a:r>
-              <a:rPr lang="en-US" sz="850" dirty="0">
+            <a:pPr marL="0" indent="0">
+              <a:buNone/>
+            </a:pPr>
+            <a:r>
+              <a:rPr lang="en-US" sz="850">
                 <a:solidFill>
                   <a:srgbClr val="334155"/>
                 </a:solidFill>
-                <a:latin typeface="Malgun Gothic" pitchFamily="34" charset="0"/>
-                <a:ea typeface="Malgun Gothic" pitchFamily="34" charset="-122"/>
-                <a:cs typeface="Malgun Gothic" pitchFamily="34" charset="-120"/>
+                <a:latin typeface="Malgun Gothic"/>
+                <a:ea typeface="Malgun Gothic"/>
+                <a:cs typeface="Malgun Gothic"/>
               </a:rPr>
               <a:t>참석자 1인당 계좌 입금 또는 현장 결제할 1인 금액 (실화면: 10,000원)</a:t>
             </a:r>
-            <a:endParaRPr lang="en-US" sz="850" dirty="0"/>
+            <a:endParaRPr lang="en-US" sz="850"/>
           </a:p>
         </p:txBody>
       </p:sp>
@@ -9888,21 +8505,21 @@
           <a:bodyPr wrap="square" lIns="0" tIns="0" rIns="0" bIns="0" rtlCol="0" anchor="ctr"/>
           <a:lstStyle/>
           <a:p>
-            <a:pPr indent="0" marL="0">
-              <a:buNone/>
-            </a:pPr>
-            <a:r>
-              <a:rPr lang="en-US" sz="880" b="1" dirty="0">
+            <a:pPr marL="0" indent="0">
+              <a:buNone/>
+            </a:pPr>
+            <a:r>
+              <a:rPr lang="en-US" sz="880" b="1">
                 <a:solidFill>
                   <a:srgbClr val="1D4ED8"/>
                 </a:solidFill>
-                <a:latin typeface="Malgun Gothic" pitchFamily="34" charset="0"/>
-                <a:ea typeface="Malgun Gothic" pitchFamily="34" charset="-122"/>
-                <a:cs typeface="Malgun Gothic" pitchFamily="34" charset="-120"/>
+                <a:latin typeface="Malgun Gothic"/>
+                <a:ea typeface="Malgun Gothic"/>
+                <a:cs typeface="Malgun Gothic"/>
               </a:rPr>
               <a:t>✓ 클럽 잔여 예산 실시간 차감:</a:t>
             </a:r>
-            <a:endParaRPr lang="en-US" sz="880" dirty="0"/>
+            <a:endParaRPr lang="en-US" sz="880"/>
           </a:p>
         </p:txBody>
       </p:sp>
@@ -9927,21 +8544,21 @@
           <a:bodyPr wrap="square" lIns="0" tIns="0" rIns="0" bIns="0" rtlCol="0" anchor="ctr"/>
           <a:lstStyle/>
           <a:p>
-            <a:pPr indent="0" marL="0">
-              <a:buNone/>
-            </a:pPr>
-            <a:r>
-              <a:rPr lang="en-US" sz="850" dirty="0">
+            <a:pPr marL="0" indent="0">
+              <a:buNone/>
+            </a:pPr>
+            <a:r>
+              <a:rPr lang="en-US" sz="850">
                 <a:solidFill>
                   <a:srgbClr val="334155"/>
                 </a:solidFill>
-                <a:latin typeface="Malgun Gothic" pitchFamily="34" charset="0"/>
-                <a:ea typeface="Malgun Gothic" pitchFamily="34" charset="-122"/>
-                <a:cs typeface="Malgun Gothic" pitchFamily="34" charset="-120"/>
+                <a:latin typeface="Malgun Gothic"/>
+                <a:ea typeface="Malgun Gothic"/>
+                <a:cs typeface="Malgun Gothic"/>
               </a:rPr>
               <a:t>이전 잔여 예산(423,200원) ➔ 이번 지원 후 잔여(63,200원) 즉시 확인</a:t>
             </a:r>
-            <a:endParaRPr lang="en-US" sz="850" dirty="0"/>
+            <a:endParaRPr lang="en-US" sz="850"/>
           </a:p>
         </p:txBody>
       </p:sp>
@@ -9966,21 +8583,21 @@
           <a:bodyPr wrap="square" lIns="0" tIns="0" rIns="0" bIns="0" rtlCol="0" anchor="ctr"/>
           <a:lstStyle/>
           <a:p>
-            <a:pPr indent="0" marL="0">
-              <a:buNone/>
-            </a:pPr>
-            <a:r>
-              <a:rPr lang="en-US" sz="880" b="1" dirty="0">
+            <a:pPr marL="0" indent="0">
+              <a:buNone/>
+            </a:pPr>
+            <a:r>
+              <a:rPr lang="en-US" sz="880" b="1">
                 <a:solidFill>
                   <a:srgbClr val="1D4ED8"/>
                 </a:solidFill>
-                <a:latin typeface="Malgun Gothic" pitchFamily="34" charset="0"/>
-                <a:ea typeface="Malgun Gothic" pitchFamily="34" charset="-122"/>
-                <a:cs typeface="Malgun Gothic" pitchFamily="34" charset="-120"/>
+                <a:latin typeface="Malgun Gothic"/>
+                <a:ea typeface="Malgun Gothic"/>
+                <a:cs typeface="Malgun Gothic"/>
               </a:rPr>
               <a:t>✓ [정산 완료] 원클릭 마감:</a:t>
             </a:r>
-            <a:endParaRPr lang="en-US" sz="880" dirty="0"/>
+            <a:endParaRPr lang="en-US" sz="880"/>
           </a:p>
         </p:txBody>
       </p:sp>
@@ -10005,21 +8622,21 @@
           <a:bodyPr wrap="square" lIns="0" tIns="0" rIns="0" bIns="0" rtlCol="0" anchor="ctr"/>
           <a:lstStyle/>
           <a:p>
-            <a:pPr indent="0" marL="0">
-              <a:buNone/>
-            </a:pPr>
-            <a:r>
-              <a:rPr lang="en-US" sz="850" dirty="0">
+            <a:pPr marL="0" indent="0">
+              <a:buNone/>
+            </a:pPr>
+            <a:r>
+              <a:rPr lang="en-US" sz="850">
                 <a:solidFill>
                   <a:srgbClr val="334155"/>
                 </a:solidFill>
-                <a:latin typeface="Malgun Gothic" pitchFamily="34" charset="0"/>
-                <a:ea typeface="Malgun Gothic" pitchFamily="34" charset="-122"/>
-                <a:cs typeface="Malgun Gothic" pitchFamily="34" charset="-120"/>
+                <a:latin typeface="Malgun Gothic"/>
+                <a:ea typeface="Malgun Gothic"/>
+                <a:cs typeface="Malgun Gothic"/>
               </a:rPr>
               <a:t>버튼 클릭 시 Firebase 공유 DB에 저장 + 전사원 카운트 동기화 완료</a:t>
             </a:r>
-            <a:endParaRPr lang="en-US" sz="850" dirty="0"/>
+            <a:endParaRPr lang="en-US" sz="850"/>
           </a:p>
         </p:txBody>
       </p:sp>
@@ -10146,21 +8763,21 @@
           <a:bodyPr wrap="square" lIns="0" tIns="0" rIns="0" bIns="0" rtlCol="0" anchor="ctr"/>
           <a:lstStyle/>
           <a:p>
-            <a:pPr algn="ctr" indent="0" marL="0">
-              <a:buNone/>
-            </a:pPr>
-            <a:r>
-              <a:rPr lang="en-US" sz="900" b="1" dirty="0">
+            <a:pPr marL="0" indent="0" algn="ctr">
+              <a:buNone/>
+            </a:pPr>
+            <a:r>
+              <a:rPr lang="en-US" sz="900" b="1">
                 <a:solidFill>
                   <a:srgbClr val="1D4ED8"/>
                 </a:solidFill>
-                <a:latin typeface="Malgun Gothic" pitchFamily="34" charset="0"/>
-                <a:ea typeface="Malgun Gothic" pitchFamily="34" charset="-122"/>
-                <a:cs typeface="Malgun Gothic" pitchFamily="34" charset="-120"/>
+                <a:latin typeface="Malgun Gothic"/>
+                <a:ea typeface="Malgun Gothic"/>
+                <a:cs typeface="Malgun Gothic"/>
               </a:rPr>
               <a:t>3M 사내 클럽 비용 정산 시스템</a:t>
             </a:r>
-            <a:endParaRPr lang="en-US" sz="900" dirty="0"/>
+            <a:endParaRPr lang="en-US" sz="900"/>
           </a:p>
         </p:txBody>
       </p:sp>
@@ -10185,21 +8802,21 @@
           <a:bodyPr wrap="square" lIns="0" tIns="0" rIns="0" bIns="0" rtlCol="0" anchor="ctr"/>
           <a:lstStyle/>
           <a:p>
-            <a:pPr indent="0" marL="0">
-              <a:buNone/>
-            </a:pPr>
-            <a:r>
-              <a:rPr lang="en-US" sz="1800" b="1" dirty="0">
+            <a:pPr marL="0" indent="0">
+              <a:buNone/>
+            </a:pPr>
+            <a:r>
+              <a:rPr lang="en-US" sz="1800" b="1">
                 <a:solidFill>
                   <a:srgbClr val="0F172A"/>
                 </a:solidFill>
-                <a:latin typeface="Malgun Gothic" pitchFamily="34" charset="0"/>
-                <a:ea typeface="Malgun Gothic" pitchFamily="34" charset="-122"/>
-                <a:cs typeface="Malgun Gothic" pitchFamily="34" charset="-120"/>
+                <a:latin typeface="Malgun Gothic"/>
+                <a:ea typeface="Malgun Gothic"/>
+                <a:cs typeface="Malgun Gothic"/>
               </a:rPr>
               <a:t>Step 5. 정산 이력 관리 &amp; 공식 엑셀 품의서 원클릭 다운로드</a:t>
             </a:r>
-            <a:endParaRPr lang="en-US" sz="1800" dirty="0"/>
+            <a:endParaRPr lang="en-US" sz="1800"/>
           </a:p>
         </p:txBody>
       </p:sp>
@@ -10224,21 +8841,21 @@
           <a:bodyPr wrap="square" lIns="0" tIns="0" rIns="0" bIns="0" rtlCol="0" anchor="ctr"/>
           <a:lstStyle/>
           <a:p>
-            <a:pPr indent="0" marL="0">
-              <a:buNone/>
-            </a:pPr>
-            <a:r>
-              <a:rPr lang="en-US" sz="1050" dirty="0">
+            <a:pPr marL="0" indent="0">
+              <a:buNone/>
+            </a:pPr>
+            <a:r>
+              <a:rPr lang="en-US" sz="1050">
                 <a:solidFill>
                   <a:srgbClr val="475569"/>
                 </a:solidFill>
-                <a:latin typeface="Malgun Gothic" pitchFamily="34" charset="0"/>
-                <a:ea typeface="Malgun Gothic" pitchFamily="34" charset="-122"/>
-                <a:cs typeface="Malgun Gothic" pitchFamily="34" charset="-120"/>
+                <a:latin typeface="Malgun Gothic"/>
+                <a:ea typeface="Malgun Gothic"/>
+                <a:cs typeface="Malgun Gothic"/>
               </a:rPr>
               <a:t>완료된 정산 내역이 투명하게 보관되며, 회사 공식 품의 엑셀을 언제든 재다운로드할 수 있습니다.</a:t>
             </a:r>
-            <a:endParaRPr lang="en-US" sz="1050" dirty="0"/>
+            <a:endParaRPr lang="en-US" sz="1050"/>
           </a:p>
         </p:txBody>
       </p:sp>
@@ -10286,21 +8903,21 @@
           <a:bodyPr wrap="square" lIns="0" tIns="0" rIns="0" bIns="0" rtlCol="0" anchor="ctr"/>
           <a:lstStyle/>
           <a:p>
-            <a:pPr indent="0" marL="0">
-              <a:buNone/>
-            </a:pPr>
-            <a:r>
-              <a:rPr lang="en-US" sz="800" dirty="0">
+            <a:pPr marL="0" indent="0">
+              <a:buNone/>
+            </a:pPr>
+            <a:r>
+              <a:rPr lang="en-US" sz="800">
                 <a:solidFill>
                   <a:srgbClr val="64748B"/>
                 </a:solidFill>
-                <a:latin typeface="Malgun Gothic" pitchFamily="34" charset="0"/>
-                <a:ea typeface="Malgun Gothic" pitchFamily="34" charset="-122"/>
-                <a:cs typeface="Malgun Gothic" pitchFamily="34" charset="-120"/>
+                <a:latin typeface="Malgun Gothic"/>
+                <a:ea typeface="Malgun Gothic"/>
+                <a:cs typeface="Malgun Gothic"/>
               </a:rPr>
               <a:t>3M 사내 동아리·클럽 비용 정산기 (v1.6.310) | 실무 사용자 설명회</a:t>
             </a:r>
-            <a:endParaRPr lang="en-US" sz="800" dirty="0"/>
+            <a:endParaRPr lang="en-US" sz="800"/>
           </a:p>
         </p:txBody>
       </p:sp>
@@ -10325,34 +8942,34 @@
           <a:bodyPr wrap="square" lIns="0" tIns="0" rIns="0" bIns="0" rtlCol="0" anchor="ctr"/>
           <a:lstStyle/>
           <a:p>
-            <a:pPr algn="r" indent="0" marL="0">
-              <a:buNone/>
-            </a:pPr>
-            <a:r>
-              <a:rPr lang="en-US" sz="750" dirty="0">
+            <a:pPr marL="0" indent="0" algn="r">
+              <a:buNone/>
+            </a:pPr>
+            <a:r>
+              <a:rPr lang="en-US" sz="750">
                 <a:solidFill>
                   <a:srgbClr val="64748B"/>
                 </a:solidFill>
-                <a:latin typeface="Malgun Gothic" pitchFamily="34" charset="0"/>
-                <a:ea typeface="Malgun Gothic" pitchFamily="34" charset="-122"/>
-                <a:cs typeface="Malgun Gothic" pitchFamily="34" charset="-120"/>
+                <a:latin typeface="Malgun Gothic"/>
+                <a:ea typeface="Malgun Gothic"/>
+                <a:cs typeface="Malgun Gothic"/>
               </a:rPr>
               <a:t>COPYRIGHT © 2026 3M ALL RIGHTS RESERVED</a:t>
             </a:r>
-            <a:endParaRPr lang="en-US" sz="750" dirty="0"/>
+            <a:endParaRPr lang="en-US" sz="750"/>
           </a:p>
         </p:txBody>
       </p:sp>
       <p:pic>
         <p:nvPicPr>
-          <p:cNvPr id="11" name="Image 0" descr="preencoded.png">    </p:cNvPr>
+          <p:cNvPr id="11" name="Image 0" descr="preencoded.png"/>
           <p:cNvPicPr>
             <a:picLocks noChangeAspect="1"/>
           </p:cNvPicPr>
           <p:nvPr/>
         </p:nvPicPr>
-        <p:blipFill>
-          <a:blip r:embed="rId1"/>
+        <p:blipFill rotWithShape="1">
+          <a:blip r:embed="rId2"/>
           <a:stretch>
             <a:fillRect/>
           </a:stretch>
@@ -10415,21 +9032,21 @@
           <a:bodyPr wrap="square" lIns="0" tIns="0" rIns="0" bIns="0" rtlCol="0" anchor="ctr"/>
           <a:lstStyle/>
           <a:p>
-            <a:pPr indent="0" marL="0">
-              <a:buNone/>
-            </a:pPr>
-            <a:r>
-              <a:rPr lang="en-US" sz="1250" b="1" dirty="0">
+            <a:pPr marL="0" indent="0">
+              <a:buNone/>
+            </a:pPr>
+            <a:r>
+              <a:rPr lang="en-US" sz="1250" b="1">
                 <a:solidFill>
                   <a:srgbClr val="059669"/>
                 </a:solidFill>
-                <a:latin typeface="Malgun Gothic" pitchFamily="34" charset="0"/>
-                <a:ea typeface="Malgun Gothic" pitchFamily="34" charset="-122"/>
-                <a:cs typeface="Malgun Gothic" pitchFamily="34" charset="-120"/>
+                <a:latin typeface="Malgun Gothic"/>
+                <a:ea typeface="Malgun Gothic"/>
+                <a:cs typeface="Malgun Gothic"/>
               </a:rPr>
               <a:t>📑 정산 이력 &amp; 엑셀 다운로드</a:t>
             </a:r>
-            <a:endParaRPr lang="en-US" sz="1250" dirty="0"/>
+            <a:endParaRPr lang="en-US" sz="1250"/>
           </a:p>
         </p:txBody>
       </p:sp>
@@ -10454,21 +9071,21 @@
           <a:bodyPr wrap="square" lIns="0" tIns="0" rIns="0" bIns="0" rtlCol="0" anchor="ctr"/>
           <a:lstStyle/>
           <a:p>
-            <a:pPr indent="0" marL="0">
-              <a:buNone/>
-            </a:pPr>
-            <a:r>
-              <a:rPr lang="en-US" sz="980" b="1" dirty="0">
+            <a:pPr marL="0" indent="0">
+              <a:buNone/>
+            </a:pPr>
+            <a:r>
+              <a:rPr lang="en-US" sz="980" b="1">
                 <a:solidFill>
                   <a:srgbClr val="0F172A"/>
                 </a:solidFill>
-                <a:latin typeface="Malgun Gothic" pitchFamily="34" charset="0"/>
-                <a:ea typeface="Malgun Gothic" pitchFamily="34" charset="-122"/>
-                <a:cs typeface="Malgun Gothic" pitchFamily="34" charset="-120"/>
+                <a:latin typeface="Malgun Gothic"/>
+                <a:ea typeface="Malgun Gothic"/>
+                <a:cs typeface="Malgun Gothic"/>
               </a:rPr>
               <a:t>① 클럽 예산 실시간 요약 대시보드</a:t>
             </a:r>
-            <a:endParaRPr lang="en-US" sz="980" dirty="0"/>
+            <a:endParaRPr lang="en-US" sz="980"/>
           </a:p>
         </p:txBody>
       </p:sp>
@@ -10493,24 +9110,24 @@
           <a:bodyPr wrap="square" lIns="0" tIns="0" rIns="0" bIns="0" rtlCol="0" anchor="ctr"/>
           <a:lstStyle/>
           <a:p>
-            <a:pPr indent="0" marL="0">
+            <a:pPr marL="0" indent="0">
               <a:lnSpc>
                 <a:spcPts val="1300"/>
               </a:lnSpc>
               <a:buNone/>
             </a:pPr>
             <a:r>
-              <a:rPr lang="en-US" sz="840" dirty="0">
+              <a:rPr lang="en-US" sz="840">
                 <a:solidFill>
                   <a:srgbClr val="475569"/>
                 </a:solidFill>
-                <a:latin typeface="Malgun Gothic" pitchFamily="34" charset="0"/>
-                <a:ea typeface="Malgun Gothic" pitchFamily="34" charset="-122"/>
-                <a:cs typeface="Malgun Gothic" pitchFamily="34" charset="-120"/>
+                <a:latin typeface="Malgun Gothic"/>
+                <a:ea typeface="Malgun Gothic"/>
+                <a:cs typeface="Malgun Gothic"/>
               </a:rPr>
               <a:t>총 예산(154만원), 잔여 예산(42.3만원), 총 참석 인원(53명), 상품비 누적액이 상단 배너에 즉시 집계됩니다.</a:t>
             </a:r>
-            <a:endParaRPr lang="en-US" sz="840" dirty="0"/>
+            <a:endParaRPr lang="en-US" sz="840"/>
           </a:p>
         </p:txBody>
       </p:sp>
@@ -10535,21 +9152,21 @@
           <a:bodyPr wrap="square" lIns="0" tIns="0" rIns="0" bIns="0" rtlCol="0" anchor="ctr"/>
           <a:lstStyle/>
           <a:p>
-            <a:pPr indent="0" marL="0">
-              <a:buNone/>
-            </a:pPr>
-            <a:r>
-              <a:rPr lang="en-US" sz="980" b="1" dirty="0">
+            <a:pPr marL="0" indent="0">
+              <a:buNone/>
+            </a:pPr>
+            <a:r>
+              <a:rPr lang="en-US" sz="980" b="1">
                 <a:solidFill>
                   <a:srgbClr val="0F172A"/>
                 </a:solidFill>
-                <a:latin typeface="Malgun Gothic" pitchFamily="34" charset="0"/>
-                <a:ea typeface="Malgun Gothic" pitchFamily="34" charset="-122"/>
-                <a:cs typeface="Malgun Gothic" pitchFamily="34" charset="-120"/>
+                <a:latin typeface="Malgun Gothic"/>
+                <a:ea typeface="Malgun Gothic"/>
+                <a:cs typeface="Malgun Gothic"/>
               </a:rPr>
               <a:t>② 행사 날짜별 상세 내역 조회</a:t>
             </a:r>
-            <a:endParaRPr lang="en-US" sz="980" dirty="0"/>
+            <a:endParaRPr lang="en-US" sz="980"/>
           </a:p>
         </p:txBody>
       </p:sp>
@@ -10574,24 +9191,24 @@
           <a:bodyPr wrap="square" lIns="0" tIns="0" rIns="0" bIns="0" rtlCol="0" anchor="ctr"/>
           <a:lstStyle/>
           <a:p>
-            <a:pPr indent="0" marL="0">
+            <a:pPr marL="0" indent="0">
               <a:lnSpc>
                 <a:spcPts val="1300"/>
               </a:lnSpc>
               <a:buNone/>
             </a:pPr>
             <a:r>
-              <a:rPr lang="en-US" sz="840" dirty="0">
+              <a:rPr lang="en-US" sz="840">
                 <a:solidFill>
                   <a:srgbClr val="475569"/>
                 </a:solidFill>
-                <a:latin typeface="Malgun Gothic" pitchFamily="34" charset="0"/>
-                <a:ea typeface="Malgun Gothic" pitchFamily="34" charset="-122"/>
-                <a:cs typeface="Malgun Gothic" pitchFamily="34" charset="-120"/>
+                <a:latin typeface="Malgun Gothic"/>
+                <a:ea typeface="Malgun Gothic"/>
+                <a:cs typeface="Malgun Gothic"/>
               </a:rPr>
               <a:t>행사일, 참석 인원, 행사비, 시설비, 상품비, 회사 지원금, 자부담 비용이 한눈에 표 형태로 정리됩니다.</a:t>
             </a:r>
-            <a:endParaRPr lang="en-US" sz="840" dirty="0"/>
+            <a:endParaRPr lang="en-US" sz="840"/>
           </a:p>
         </p:txBody>
       </p:sp>
@@ -10616,21 +9233,21 @@
           <a:bodyPr wrap="square" lIns="0" tIns="0" rIns="0" bIns="0" rtlCol="0" anchor="ctr"/>
           <a:lstStyle/>
           <a:p>
-            <a:pPr indent="0" marL="0">
-              <a:buNone/>
-            </a:pPr>
-            <a:r>
-              <a:rPr lang="en-US" sz="980" b="1" dirty="0">
+            <a:pPr marL="0" indent="0">
+              <a:buNone/>
+            </a:pPr>
+            <a:r>
+              <a:rPr lang="en-US" sz="980" b="1">
                 <a:solidFill>
                   <a:srgbClr val="0F172A"/>
                 </a:solidFill>
-                <a:latin typeface="Malgun Gothic" pitchFamily="34" charset="0"/>
-                <a:ea typeface="Malgun Gothic" pitchFamily="34" charset="-122"/>
-                <a:cs typeface="Malgun Gothic" pitchFamily="34" charset="-120"/>
+                <a:latin typeface="Malgun Gothic"/>
+                <a:ea typeface="Malgun Gothic"/>
+                <a:cs typeface="Malgun Gothic"/>
               </a:rPr>
               <a:t>③ 공식 엑셀 품의서 즉시 다운로드</a:t>
             </a:r>
-            <a:endParaRPr lang="en-US" sz="980" dirty="0"/>
+            <a:endParaRPr lang="en-US" sz="980"/>
           </a:p>
         </p:txBody>
       </p:sp>
@@ -10655,24 +9272,24 @@
           <a:bodyPr wrap="square" lIns="0" tIns="0" rIns="0" bIns="0" rtlCol="0" anchor="ctr"/>
           <a:lstStyle/>
           <a:p>
-            <a:pPr indent="0" marL="0">
+            <a:pPr marL="0" indent="0">
               <a:lnSpc>
                 <a:spcPts val="1300"/>
               </a:lnSpc>
               <a:buNone/>
             </a:pPr>
             <a:r>
-              <a:rPr lang="en-US" sz="840" dirty="0">
+              <a:rPr lang="en-US" sz="840">
                 <a:solidFill>
                   <a:srgbClr val="475569"/>
                 </a:solidFill>
-                <a:latin typeface="Malgun Gothic" pitchFamily="34" charset="0"/>
-                <a:ea typeface="Malgun Gothic" pitchFamily="34" charset="-122"/>
-                <a:cs typeface="Malgun Gothic" pitchFamily="34" charset="-120"/>
+                <a:latin typeface="Malgun Gothic"/>
+                <a:ea typeface="Malgun Gothic"/>
+                <a:cs typeface="Malgun Gothic"/>
               </a:rPr>
               <a:t>우측 초록색 [엑셀] 버튼을 누르면 회사 공식 템플릿(template.xlsx)에 모든 셀 좌표가 완벽 매핑된 .xlsx 파일이 생성됩니다.</a:t>
             </a:r>
-            <a:endParaRPr lang="en-US" sz="840" dirty="0"/>
+            <a:endParaRPr lang="en-US" sz="840"/>
           </a:p>
         </p:txBody>
       </p:sp>
@@ -10697,21 +9314,21 @@
           <a:bodyPr wrap="square" lIns="0" tIns="0" rIns="0" bIns="0" rtlCol="0" anchor="ctr"/>
           <a:lstStyle/>
           <a:p>
-            <a:pPr indent="0" marL="0">
-              <a:buNone/>
-            </a:pPr>
-            <a:r>
-              <a:rPr lang="en-US" sz="980" b="1" dirty="0">
+            <a:pPr marL="0" indent="0">
+              <a:buNone/>
+            </a:pPr>
+            <a:r>
+              <a:rPr lang="en-US" sz="980" b="1">
                 <a:solidFill>
                   <a:srgbClr val="0F172A"/>
                 </a:solidFill>
-                <a:latin typeface="Malgun Gothic" pitchFamily="34" charset="0"/>
-                <a:ea typeface="Malgun Gothic" pitchFamily="34" charset="-122"/>
-                <a:cs typeface="Malgun Gothic" pitchFamily="34" charset="-120"/>
+                <a:latin typeface="Malgun Gothic"/>
+                <a:ea typeface="Malgun Gothic"/>
+                <a:cs typeface="Malgun Gothic"/>
               </a:rPr>
               <a:t>④ 투명한 이력 공유 및 보관</a:t>
             </a:r>
-            <a:endParaRPr lang="en-US" sz="980" dirty="0"/>
+            <a:endParaRPr lang="en-US" sz="980"/>
           </a:p>
         </p:txBody>
       </p:sp>
@@ -10736,24 +9353,24 @@
           <a:bodyPr wrap="square" lIns="0" tIns="0" rIns="0" bIns="0" rtlCol="0" anchor="ctr"/>
           <a:lstStyle/>
           <a:p>
-            <a:pPr indent="0" marL="0">
+            <a:pPr marL="0" indent="0">
               <a:lnSpc>
                 <a:spcPts val="1300"/>
               </a:lnSpc>
               <a:buNone/>
             </a:pPr>
             <a:r>
-              <a:rPr lang="en-US" sz="840" dirty="0">
+              <a:rPr lang="en-US" sz="840">
                 <a:solidFill>
                   <a:srgbClr val="475569"/>
                 </a:solidFill>
-                <a:latin typeface="Malgun Gothic" pitchFamily="34" charset="0"/>
-                <a:ea typeface="Malgun Gothic" pitchFamily="34" charset="-122"/>
-                <a:cs typeface="Malgun Gothic" pitchFamily="34" charset="-120"/>
+                <a:latin typeface="Malgun Gothic"/>
+                <a:ea typeface="Malgun Gothic"/>
+                <a:cs typeface="Malgun Gothic"/>
               </a:rPr>
               <a:t>일반 회원은 본인 작성 내역을 확인하고, 관리자는 전사 클럽 집행 현황을 검토할 수 있습니다.</a:t>
             </a:r>
-            <a:endParaRPr lang="en-US" sz="840" dirty="0"/>
+            <a:endParaRPr lang="en-US" sz="840"/>
           </a:p>
         </p:txBody>
       </p:sp>
@@ -10805,24 +9422,24 @@
           <a:bodyPr wrap="square" lIns="0" tIns="0" rIns="0" bIns="0" rtlCol="0" anchor="ctr"/>
           <a:lstStyle/>
           <a:p>
-            <a:pPr indent="0" marL="0">
+            <a:pPr marL="0" indent="0">
               <a:lnSpc>
                 <a:spcPts val="1200"/>
               </a:lnSpc>
               <a:buNone/>
             </a:pPr>
             <a:r>
-              <a:rPr lang="en-US" sz="800" dirty="0">
+              <a:rPr lang="en-US" sz="800">
                 <a:solidFill>
                   <a:srgbClr val="065F46"/>
                 </a:solidFill>
-                <a:latin typeface="Malgun Gothic" pitchFamily="34" charset="0"/>
-                <a:ea typeface="Malgun Gothic" pitchFamily="34" charset="-122"/>
-                <a:cs typeface="Malgun Gothic" pitchFamily="34" charset="-120"/>
+                <a:latin typeface="Malgun Gothic"/>
+                <a:ea typeface="Malgun Gothic"/>
+                <a:cs typeface="Malgun Gothic"/>
               </a:rPr>
               <a:t>✓ 엑셀 다운로드 시 K4~K30, L12~L25 등 회사 회계 제출용 좌표가 100% 자동 매핑됩니다.</a:t>
             </a:r>
-            <a:endParaRPr lang="en-US" sz="800" dirty="0"/>
+            <a:endParaRPr lang="en-US" sz="800"/>
           </a:p>
         </p:txBody>
       </p:sp>
@@ -10949,21 +9566,21 @@
           <a:bodyPr wrap="square" lIns="0" tIns="0" rIns="0" bIns="0" rtlCol="0" anchor="ctr"/>
           <a:lstStyle/>
           <a:p>
-            <a:pPr algn="ctr" indent="0" marL="0">
-              <a:buNone/>
-            </a:pPr>
-            <a:r>
-              <a:rPr lang="en-US" sz="900" b="1" dirty="0">
+            <a:pPr marL="0" indent="0" algn="ctr">
+              <a:buNone/>
+            </a:pPr>
+            <a:r>
+              <a:rPr lang="en-US" sz="900" b="1">
                 <a:solidFill>
                   <a:srgbClr val="1D4ED8"/>
                 </a:solidFill>
-                <a:latin typeface="Malgun Gothic" pitchFamily="34" charset="0"/>
-                <a:ea typeface="Malgun Gothic" pitchFamily="34" charset="-122"/>
-                <a:cs typeface="Malgun Gothic" pitchFamily="34" charset="-120"/>
+                <a:latin typeface="Malgun Gothic"/>
+                <a:ea typeface="Malgun Gothic"/>
+                <a:cs typeface="Malgun Gothic"/>
               </a:rPr>
               <a:t>관리자 전용 기능 (회장단)</a:t>
             </a:r>
-            <a:endParaRPr lang="en-US" sz="900" dirty="0"/>
+            <a:endParaRPr lang="en-US" sz="900"/>
           </a:p>
         </p:txBody>
       </p:sp>
@@ -10988,21 +9605,21 @@
           <a:bodyPr wrap="square" lIns="0" tIns="0" rIns="0" bIns="0" rtlCol="0" anchor="ctr"/>
           <a:lstStyle/>
           <a:p>
-            <a:pPr indent="0" marL="0">
-              <a:buNone/>
-            </a:pPr>
-            <a:r>
-              <a:rPr lang="en-US" sz="1800" b="1" dirty="0">
+            <a:pPr marL="0" indent="0">
+              <a:buNone/>
+            </a:pPr>
+            <a:r>
+              <a:rPr lang="en-US" sz="1800" b="1">
                 <a:solidFill>
                   <a:srgbClr val="0F172A"/>
                 </a:solidFill>
-                <a:latin typeface="Malgun Gothic" pitchFamily="34" charset="0"/>
-                <a:ea typeface="Malgun Gothic" pitchFamily="34" charset="-122"/>
-                <a:cs typeface="Malgun Gothic" pitchFamily="34" charset="-120"/>
+                <a:latin typeface="Malgun Gothic"/>
+                <a:ea typeface="Malgun Gothic"/>
+                <a:cs typeface="Malgun Gothic"/>
               </a:rPr>
               <a:t>[관리자] 전체 관리자 모드: 대시보드 &amp; KPI 모니터링</a:t>
             </a:r>
-            <a:endParaRPr lang="en-US" sz="1800" dirty="0"/>
+            <a:endParaRPr lang="en-US" sz="1800"/>
           </a:p>
         </p:txBody>
       </p:sp>
@@ -11027,21 +9644,21 @@
           <a:bodyPr wrap="square" lIns="0" tIns="0" rIns="0" bIns="0" rtlCol="0" anchor="ctr"/>
           <a:lstStyle/>
           <a:p>
-            <a:pPr indent="0" marL="0">
-              <a:buNone/>
-            </a:pPr>
-            <a:r>
-              <a:rPr lang="en-US" sz="1050" dirty="0">
+            <a:pPr marL="0" indent="0">
+              <a:buNone/>
+            </a:pPr>
+            <a:r>
+              <a:rPr lang="en-US" sz="1050">
                 <a:solidFill>
                   <a:srgbClr val="475569"/>
                 </a:solidFill>
-                <a:latin typeface="Malgun Gothic" pitchFamily="34" charset="0"/>
-                <a:ea typeface="Malgun Gothic" pitchFamily="34" charset="-122"/>
-                <a:cs typeface="Malgun Gothic" pitchFamily="34" charset="-120"/>
+                <a:latin typeface="Malgun Gothic"/>
+                <a:ea typeface="Malgun Gothic"/>
+                <a:cs typeface="Malgun Gothic"/>
               </a:rPr>
               <a:t>클럽 회장단 및 관리자(PIN: 000000)를 위한 전사 운영 현황 통합 관리 화면입니다.</a:t>
             </a:r>
-            <a:endParaRPr lang="en-US" sz="1050" dirty="0"/>
+            <a:endParaRPr lang="en-US" sz="1050"/>
           </a:p>
         </p:txBody>
       </p:sp>
@@ -11089,21 +9706,21 @@
           <a:bodyPr wrap="square" lIns="0" tIns="0" rIns="0" bIns="0" rtlCol="0" anchor="ctr"/>
           <a:lstStyle/>
           <a:p>
-            <a:pPr indent="0" marL="0">
-              <a:buNone/>
-            </a:pPr>
-            <a:r>
-              <a:rPr lang="en-US" sz="800" dirty="0">
+            <a:pPr marL="0" indent="0">
+              <a:buNone/>
+            </a:pPr>
+            <a:r>
+              <a:rPr lang="en-US" sz="800">
                 <a:solidFill>
                   <a:srgbClr val="64748B"/>
                 </a:solidFill>
-                <a:latin typeface="Malgun Gothic" pitchFamily="34" charset="0"/>
-                <a:ea typeface="Malgun Gothic" pitchFamily="34" charset="-122"/>
-                <a:cs typeface="Malgun Gothic" pitchFamily="34" charset="-120"/>
+                <a:latin typeface="Malgun Gothic"/>
+                <a:ea typeface="Malgun Gothic"/>
+                <a:cs typeface="Malgun Gothic"/>
               </a:rPr>
               <a:t>3M 사내 동아리·클럽 비용 정산기 (v1.6.310) | 실무 사용자 설명회</a:t>
             </a:r>
-            <a:endParaRPr lang="en-US" sz="800" dirty="0"/>
+            <a:endParaRPr lang="en-US" sz="800"/>
           </a:p>
         </p:txBody>
       </p:sp>
@@ -11128,34 +9745,34 @@
           <a:bodyPr wrap="square" lIns="0" tIns="0" rIns="0" bIns="0" rtlCol="0" anchor="ctr"/>
           <a:lstStyle/>
           <a:p>
-            <a:pPr algn="r" indent="0" marL="0">
-              <a:buNone/>
-            </a:pPr>
-            <a:r>
-              <a:rPr lang="en-US" sz="750" dirty="0">
+            <a:pPr marL="0" indent="0" algn="r">
+              <a:buNone/>
+            </a:pPr>
+            <a:r>
+              <a:rPr lang="en-US" sz="750">
                 <a:solidFill>
                   <a:srgbClr val="64748B"/>
                 </a:solidFill>
-                <a:latin typeface="Malgun Gothic" pitchFamily="34" charset="0"/>
-                <a:ea typeface="Malgun Gothic" pitchFamily="34" charset="-122"/>
-                <a:cs typeface="Malgun Gothic" pitchFamily="34" charset="-120"/>
+                <a:latin typeface="Malgun Gothic"/>
+                <a:ea typeface="Malgun Gothic"/>
+                <a:cs typeface="Malgun Gothic"/>
               </a:rPr>
               <a:t>COPYRIGHT © 2026 3M ALL RIGHTS RESERVED</a:t>
             </a:r>
-            <a:endParaRPr lang="en-US" sz="750" dirty="0"/>
+            <a:endParaRPr lang="en-US" sz="750"/>
           </a:p>
         </p:txBody>
       </p:sp>
       <p:pic>
         <p:nvPicPr>
-          <p:cNvPr id="11" name="Image 0" descr="preencoded.png">    </p:cNvPr>
+          <p:cNvPr id="11" name="Image 0" descr="preencoded.png"/>
           <p:cNvPicPr>
             <a:picLocks noChangeAspect="1"/>
           </p:cNvPicPr>
           <p:nvPr/>
         </p:nvPicPr>
-        <p:blipFill>
-          <a:blip r:embed="rId1"/>
+        <p:blipFill rotWithShape="1">
+          <a:blip r:embed="rId2"/>
           <a:stretch>
             <a:fillRect/>
           </a:stretch>
@@ -11218,21 +9835,21 @@
           <a:bodyPr wrap="square" lIns="0" tIns="0" rIns="0" bIns="0" rtlCol="0" anchor="ctr"/>
           <a:lstStyle/>
           <a:p>
-            <a:pPr indent="0" marL="0">
-              <a:buNone/>
-            </a:pPr>
-            <a:r>
-              <a:rPr lang="en-US" sz="1250" b="1" dirty="0">
+            <a:pPr marL="0" indent="0">
+              <a:buNone/>
+            </a:pPr>
+            <a:r>
+              <a:rPr lang="en-US" sz="1250" b="1">
                 <a:solidFill>
                   <a:srgbClr val="D97706"/>
                 </a:solidFill>
-                <a:latin typeface="Malgun Gothic" pitchFamily="34" charset="0"/>
-                <a:ea typeface="Malgun Gothic" pitchFamily="34" charset="-122"/>
-                <a:cs typeface="Malgun Gothic" pitchFamily="34" charset="-120"/>
+                <a:latin typeface="Malgun Gothic"/>
+                <a:ea typeface="Malgun Gothic"/>
+                <a:cs typeface="Malgun Gothic"/>
               </a:rPr>
               <a:t>👑 관리자 전용 대시보드 핵심</a:t>
             </a:r>
-            <a:endParaRPr lang="en-US" sz="1250" dirty="0"/>
+            <a:endParaRPr lang="en-US" sz="1250"/>
           </a:p>
         </p:txBody>
       </p:sp>
@@ -11257,21 +9874,21 @@
           <a:bodyPr wrap="square" lIns="0" tIns="0" rIns="0" bIns="0" rtlCol="0" anchor="ctr"/>
           <a:lstStyle/>
           <a:p>
-            <a:pPr indent="0" marL="0">
-              <a:buNone/>
-            </a:pPr>
-            <a:r>
-              <a:rPr lang="en-US" sz="980" b="1" dirty="0">
+            <a:pPr marL="0" indent="0">
+              <a:buNone/>
+            </a:pPr>
+            <a:r>
+              <a:rPr lang="en-US" sz="980" b="1">
                 <a:solidFill>
                   <a:srgbClr val="0F172A"/>
                 </a:solidFill>
-                <a:latin typeface="Malgun Gothic" pitchFamily="34" charset="0"/>
-                <a:ea typeface="Malgun Gothic" pitchFamily="34" charset="-122"/>
-                <a:cs typeface="Malgun Gothic" pitchFamily="34" charset="-120"/>
+                <a:latin typeface="Malgun Gothic"/>
+                <a:ea typeface="Malgun Gothic"/>
+                <a:cs typeface="Malgun Gothic"/>
               </a:rPr>
               <a:t>① 전사 총괄 4대 KPI 실시간 타일</a:t>
             </a:r>
-            <a:endParaRPr lang="en-US" sz="980" dirty="0"/>
+            <a:endParaRPr lang="en-US" sz="980"/>
           </a:p>
         </p:txBody>
       </p:sp>
@@ -11296,24 +9913,24 @@
           <a:bodyPr wrap="square" lIns="0" tIns="0" rIns="0" bIns="0" rtlCol="0" anchor="ctr"/>
           <a:lstStyle/>
           <a:p>
-            <a:pPr indent="0" marL="0">
+            <a:pPr marL="0" indent="0">
               <a:lnSpc>
                 <a:spcPts val="1300"/>
               </a:lnSpc>
               <a:buNone/>
             </a:pPr>
             <a:r>
-              <a:rPr lang="en-US" sz="840" dirty="0">
+              <a:rPr lang="en-US" sz="840">
                 <a:solidFill>
                   <a:srgbClr val="475569"/>
                 </a:solidFill>
-                <a:latin typeface="Malgun Gothic" pitchFamily="34" charset="0"/>
-                <a:ea typeface="Malgun Gothic" pitchFamily="34" charset="-122"/>
-                <a:cs typeface="Malgun Gothic" pitchFamily="34" charset="-120"/>
+                <a:latin typeface="Malgun Gothic"/>
+                <a:ea typeface="Malgun Gothic"/>
+                <a:cs typeface="Malgun Gothic"/>
               </a:rPr>
               <a:t>총 등록 가입자(7명), 전체 누적 지출액(1,159만원), 회사 지원금(948만원), 임직원 자부담(211만원) 실시간 집계</a:t>
             </a:r>
-            <a:endParaRPr lang="en-US" sz="840" dirty="0"/>
+            <a:endParaRPr lang="en-US" sz="840"/>
           </a:p>
         </p:txBody>
       </p:sp>
@@ -11338,21 +9955,21 @@
           <a:bodyPr wrap="square" lIns="0" tIns="0" rIns="0" bIns="0" rtlCol="0" anchor="ctr"/>
           <a:lstStyle/>
           <a:p>
-            <a:pPr indent="0" marL="0">
-              <a:buNone/>
-            </a:pPr>
-            <a:r>
-              <a:rPr lang="en-US" sz="980" b="1" dirty="0">
+            <a:pPr marL="0" indent="0">
+              <a:buNone/>
+            </a:pPr>
+            <a:r>
+              <a:rPr lang="en-US" sz="980" b="1">
                 <a:solidFill>
                   <a:srgbClr val="0F172A"/>
                 </a:solidFill>
-                <a:latin typeface="Malgun Gothic" pitchFamily="34" charset="0"/>
-                <a:ea typeface="Malgun Gothic" pitchFamily="34" charset="-122"/>
-                <a:cs typeface="Malgun Gothic" pitchFamily="34" charset="-120"/>
+                <a:latin typeface="Malgun Gothic"/>
+                <a:ea typeface="Malgun Gothic"/>
+                <a:cs typeface="Malgun Gothic"/>
               </a:rPr>
               <a:t>② 초보 관리자 3단계 온보딩 가이드</a:t>
             </a:r>
-            <a:endParaRPr lang="en-US" sz="980" dirty="0"/>
+            <a:endParaRPr lang="en-US" sz="980"/>
           </a:p>
         </p:txBody>
       </p:sp>
@@ -11377,24 +9994,24 @@
           <a:bodyPr wrap="square" lIns="0" tIns="0" rIns="0" bIns="0" rtlCol="0" anchor="ctr"/>
           <a:lstStyle/>
           <a:p>
-            <a:pPr indent="0" marL="0">
+            <a:pPr marL="0" indent="0">
               <a:lnSpc>
                 <a:spcPts val="1300"/>
               </a:lnSpc>
               <a:buNone/>
             </a:pPr>
             <a:r>
-              <a:rPr lang="en-US" sz="840" dirty="0">
+              <a:rPr lang="en-US" sz="840">
                 <a:solidFill>
                   <a:srgbClr val="475569"/>
                 </a:solidFill>
-                <a:latin typeface="Malgun Gothic" pitchFamily="34" charset="0"/>
-                <a:ea typeface="Malgun Gothic" pitchFamily="34" charset="-122"/>
-                <a:cs typeface="Malgun Gothic" pitchFamily="34" charset="-120"/>
+                <a:latin typeface="Malgun Gothic"/>
+                <a:ea typeface="Malgun Gothic"/>
+                <a:cs typeface="Malgun Gothic"/>
               </a:rPr>
               <a:t>① 클럽·예산 설정 ➔ ② 정산 기준 확인 ➔ ③ 정산 현황 확인으로 이어지는 간편 네비게이션 제공</a:t>
             </a:r>
-            <a:endParaRPr lang="en-US" sz="840" dirty="0"/>
+            <a:endParaRPr lang="en-US" sz="840"/>
           </a:p>
         </p:txBody>
       </p:sp>
@@ -11419,21 +10036,21 @@
           <a:bodyPr wrap="square" lIns="0" tIns="0" rIns="0" bIns="0" rtlCol="0" anchor="ctr"/>
           <a:lstStyle/>
           <a:p>
-            <a:pPr indent="0" marL="0">
-              <a:buNone/>
-            </a:pPr>
-            <a:r>
-              <a:rPr lang="en-US" sz="980" b="1" dirty="0">
+            <a:pPr marL="0" indent="0">
+              <a:buNone/>
+            </a:pPr>
+            <a:r>
+              <a:rPr lang="en-US" sz="980" b="1">
                 <a:solidFill>
                   <a:srgbClr val="0F172A"/>
                 </a:solidFill>
-                <a:latin typeface="Malgun Gothic" pitchFamily="34" charset="0"/>
-                <a:ea typeface="Malgun Gothic" pitchFamily="34" charset="-122"/>
-                <a:cs typeface="Malgun Gothic" pitchFamily="34" charset="-120"/>
+                <a:latin typeface="Malgun Gothic"/>
+                <a:ea typeface="Malgun Gothic"/>
+                <a:cs typeface="Malgun Gothic"/>
               </a:rPr>
               <a:t>③ 정산 구간 및 비율 전사 설정</a:t>
             </a:r>
-            <a:endParaRPr lang="en-US" sz="980" dirty="0"/>
+            <a:endParaRPr lang="en-US" sz="980"/>
           </a:p>
         </p:txBody>
       </p:sp>
@@ -11458,24 +10075,24 @@
           <a:bodyPr wrap="square" lIns="0" tIns="0" rIns="0" bIns="0" rtlCol="0" anchor="ctr"/>
           <a:lstStyle/>
           <a:p>
-            <a:pPr indent="0" marL="0">
+            <a:pPr marL="0" indent="0">
               <a:lnSpc>
                 <a:spcPts val="1300"/>
               </a:lnSpc>
               <a:buNone/>
             </a:pPr>
             <a:r>
-              <a:rPr lang="en-US" sz="840" dirty="0">
+              <a:rPr lang="en-US" sz="840">
                 <a:solidFill>
                   <a:srgbClr val="475569"/>
                 </a:solidFill>
-                <a:latin typeface="Malgun Gothic" pitchFamily="34" charset="0"/>
-                <a:ea typeface="Malgun Gothic" pitchFamily="34" charset="-122"/>
-                <a:cs typeface="Malgun Gothic" pitchFamily="34" charset="-120"/>
+                <a:latin typeface="Malgun Gothic"/>
+                <a:ea typeface="Malgun Gothic"/>
+                <a:cs typeface="Malgun Gothic"/>
               </a:rPr>
               <a:t>지원 규정 변경 시 가/나/다/라 구간 한도액(3만/6만/12만)과 자부담 비율(20%/40%)을 관리자가 유연하게 조정</a:t>
             </a:r>
-            <a:endParaRPr lang="en-US" sz="840" dirty="0"/>
+            <a:endParaRPr lang="en-US" sz="840"/>
           </a:p>
         </p:txBody>
       </p:sp>
@@ -11500,21 +10117,21 @@
           <a:bodyPr wrap="square" lIns="0" tIns="0" rIns="0" bIns="0" rtlCol="0" anchor="ctr"/>
           <a:lstStyle/>
           <a:p>
-            <a:pPr indent="0" marL="0">
-              <a:buNone/>
-            </a:pPr>
-            <a:r>
-              <a:rPr lang="en-US" sz="980" b="1" dirty="0">
+            <a:pPr marL="0" indent="0">
+              <a:buNone/>
+            </a:pPr>
+            <a:r>
+              <a:rPr lang="en-US" sz="980" b="1">
                 <a:solidFill>
                   <a:srgbClr val="0F172A"/>
                 </a:solidFill>
-                <a:latin typeface="Malgun Gothic" pitchFamily="34" charset="0"/>
-                <a:ea typeface="Malgun Gothic" pitchFamily="34" charset="-122"/>
-                <a:cs typeface="Malgun Gothic" pitchFamily="34" charset="-120"/>
+                <a:latin typeface="Malgun Gothic"/>
+                <a:ea typeface="Malgun Gothic"/>
+                <a:cs typeface="Malgun Gothic"/>
               </a:rPr>
               <a:t>④ 연간 결산 PPT &amp; 감사 로그</a:t>
             </a:r>
-            <a:endParaRPr lang="en-US" sz="980" dirty="0"/>
+            <a:endParaRPr lang="en-US" sz="980"/>
           </a:p>
         </p:txBody>
       </p:sp>
@@ -11539,24 +10156,24 @@
           <a:bodyPr wrap="square" lIns="0" tIns="0" rIns="0" bIns="0" rtlCol="0" anchor="ctr"/>
           <a:lstStyle/>
           <a:p>
-            <a:pPr indent="0" marL="0">
+            <a:pPr marL="0" indent="0">
               <a:lnSpc>
                 <a:spcPts val="1300"/>
               </a:lnSpc>
               <a:buNone/>
             </a:pPr>
             <a:r>
-              <a:rPr lang="en-US" sz="840" dirty="0">
+              <a:rPr lang="en-US" sz="840">
                 <a:solidFill>
                   <a:srgbClr val="475569"/>
                 </a:solidFill>
-                <a:latin typeface="Malgun Gothic" pitchFamily="34" charset="0"/>
-                <a:ea typeface="Malgun Gothic" pitchFamily="34" charset="-122"/>
-                <a:cs typeface="Malgun Gothic" pitchFamily="34" charset="-120"/>
+                <a:latin typeface="Malgun Gothic"/>
+                <a:ea typeface="Malgun Gothic"/>
+                <a:cs typeface="Malgun Gothic"/>
               </a:rPr>
               <a:t>경영진 보고용 파워포인트 자동 생성 및 데이터 위변조 방지를 위한 전사 작업 로그 완벽 기록</a:t>
             </a:r>
-            <a:endParaRPr lang="en-US" sz="840" dirty="0"/>
+            <a:endParaRPr lang="en-US" sz="840"/>
           </a:p>
         </p:txBody>
       </p:sp>
@@ -11608,24 +10225,24 @@
           <a:bodyPr wrap="square" lIns="0" tIns="0" rIns="0" bIns="0" rtlCol="0" anchor="ctr"/>
           <a:lstStyle/>
           <a:p>
-            <a:pPr indent="0" marL="0">
+            <a:pPr marL="0" indent="0">
               <a:lnSpc>
                 <a:spcPts val="1200"/>
               </a:lnSpc>
               <a:buNone/>
             </a:pPr>
             <a:r>
-              <a:rPr lang="en-US" sz="800" dirty="0">
+              <a:rPr lang="en-US" sz="800">
                 <a:solidFill>
                   <a:srgbClr val="92400E"/>
                 </a:solidFill>
-                <a:latin typeface="Malgun Gothic" pitchFamily="34" charset="0"/>
-                <a:ea typeface="Malgun Gothic" pitchFamily="34" charset="-122"/>
-                <a:cs typeface="Malgun Gothic" pitchFamily="34" charset="-120"/>
+                <a:latin typeface="Malgun Gothic"/>
+                <a:ea typeface="Malgun Gothic"/>
+                <a:cs typeface="Malgun Gothic"/>
               </a:rPr>
               <a:t>⚠️ 관리자 설정값은 모든 클럽 사용자에게 즉시 적용되며 Firebase 단일 기준으로 안전하게 동기화됩니다.</a:t>
             </a:r>
-            <a:endParaRPr lang="en-US" sz="800" dirty="0"/>
+            <a:endParaRPr lang="en-US" sz="800"/>
           </a:p>
         </p:txBody>
       </p:sp>
@@ -11752,21 +10369,21 @@
           <a:bodyPr wrap="square" lIns="0" tIns="0" rIns="0" bIns="0" rtlCol="0" anchor="ctr"/>
           <a:lstStyle/>
           <a:p>
-            <a:pPr algn="ctr" indent="0" marL="0">
-              <a:buNone/>
-            </a:pPr>
-            <a:r>
-              <a:rPr lang="en-US" sz="900" b="1" dirty="0">
+            <a:pPr marL="0" indent="0" algn="ctr">
+              <a:buNone/>
+            </a:pPr>
+            <a:r>
+              <a:rPr lang="en-US" sz="900" b="1">
                 <a:solidFill>
                   <a:srgbClr val="1D4ED8"/>
                 </a:solidFill>
-                <a:latin typeface="Malgun Gothic" pitchFamily="34" charset="0"/>
-                <a:ea typeface="Malgun Gothic" pitchFamily="34" charset="-122"/>
-                <a:cs typeface="Malgun Gothic" pitchFamily="34" charset="-120"/>
+                <a:latin typeface="Malgun Gothic"/>
+                <a:ea typeface="Malgun Gothic"/>
+                <a:cs typeface="Malgun Gothic"/>
               </a:rPr>
               <a:t>관리자 전용 기능 (회장단)</a:t>
             </a:r>
-            <a:endParaRPr lang="en-US" sz="900" dirty="0"/>
+            <a:endParaRPr lang="en-US" sz="900"/>
           </a:p>
         </p:txBody>
       </p:sp>
@@ -11791,21 +10408,21 @@
           <a:bodyPr wrap="square" lIns="0" tIns="0" rIns="0" bIns="0" rtlCol="0" anchor="ctr"/>
           <a:lstStyle/>
           <a:p>
-            <a:pPr indent="0" marL="0">
-              <a:buNone/>
-            </a:pPr>
-            <a:r>
-              <a:rPr lang="en-US" sz="1800" b="1" dirty="0">
+            <a:pPr marL="0" indent="0">
+              <a:buNone/>
+            </a:pPr>
+            <a:r>
+              <a:rPr lang="en-US" sz="1800" b="1">
                 <a:solidFill>
                   <a:srgbClr val="0F172A"/>
                 </a:solidFill>
-                <a:latin typeface="Malgun Gothic" pitchFamily="34" charset="0"/>
-                <a:ea typeface="Malgun Gothic" pitchFamily="34" charset="-122"/>
-                <a:cs typeface="Malgun Gothic" pitchFamily="34" charset="-120"/>
+                <a:latin typeface="Malgun Gothic"/>
+                <a:ea typeface="Malgun Gothic"/>
+                <a:cs typeface="Malgun Gothic"/>
               </a:rPr>
               <a:t>[관리자] 전사 클럽별 정산 이력 &amp; 정산인별 필터링</a:t>
             </a:r>
-            <a:endParaRPr lang="en-US" sz="1800" dirty="0"/>
+            <a:endParaRPr lang="en-US" sz="1800"/>
           </a:p>
         </p:txBody>
       </p:sp>
@@ -11830,21 +10447,21 @@
           <a:bodyPr wrap="square" lIns="0" tIns="0" rIns="0" bIns="0" rtlCol="0" anchor="ctr"/>
           <a:lstStyle/>
           <a:p>
-            <a:pPr indent="0" marL="0">
-              <a:buNone/>
-            </a:pPr>
-            <a:r>
-              <a:rPr lang="en-US" sz="1050" dirty="0">
+            <a:pPr marL="0" indent="0">
+              <a:buNone/>
+            </a:pPr>
+            <a:r>
+              <a:rPr lang="en-US" sz="1050">
                 <a:solidFill>
                   <a:srgbClr val="475569"/>
                 </a:solidFill>
-                <a:latin typeface="Malgun Gothic" pitchFamily="34" charset="0"/>
-                <a:ea typeface="Malgun Gothic" pitchFamily="34" charset="-122"/>
-                <a:cs typeface="Malgun Gothic" pitchFamily="34" charset="-120"/>
+                <a:latin typeface="Malgun Gothic"/>
+                <a:ea typeface="Malgun Gothic"/>
+                <a:cs typeface="Malgun Gothic"/>
               </a:rPr>
               <a:t>전사 10개 클럽의 행사 집행 내역을 한곳에서 모니터링하고 작성자별로 교차 검토합니다.</a:t>
             </a:r>
-            <a:endParaRPr lang="en-US" sz="1050" dirty="0"/>
+            <a:endParaRPr lang="en-US" sz="1050"/>
           </a:p>
         </p:txBody>
       </p:sp>
@@ -11892,21 +10509,21 @@
           <a:bodyPr wrap="square" lIns="0" tIns="0" rIns="0" bIns="0" rtlCol="0" anchor="ctr"/>
           <a:lstStyle/>
           <a:p>
-            <a:pPr indent="0" marL="0">
-              <a:buNone/>
-            </a:pPr>
-            <a:r>
-              <a:rPr lang="en-US" sz="800" dirty="0">
+            <a:pPr marL="0" indent="0">
+              <a:buNone/>
+            </a:pPr>
+            <a:r>
+              <a:rPr lang="en-US" sz="800">
                 <a:solidFill>
                   <a:srgbClr val="64748B"/>
                 </a:solidFill>
-                <a:latin typeface="Malgun Gothic" pitchFamily="34" charset="0"/>
-                <a:ea typeface="Malgun Gothic" pitchFamily="34" charset="-122"/>
-                <a:cs typeface="Malgun Gothic" pitchFamily="34" charset="-120"/>
+                <a:latin typeface="Malgun Gothic"/>
+                <a:ea typeface="Malgun Gothic"/>
+                <a:cs typeface="Malgun Gothic"/>
               </a:rPr>
               <a:t>3M 사내 동아리·클럽 비용 정산기 (v1.6.310) | 실무 사용자 설명회</a:t>
             </a:r>
-            <a:endParaRPr lang="en-US" sz="800" dirty="0"/>
+            <a:endParaRPr lang="en-US" sz="800"/>
           </a:p>
         </p:txBody>
       </p:sp>
@@ -11931,34 +10548,34 @@
           <a:bodyPr wrap="square" lIns="0" tIns="0" rIns="0" bIns="0" rtlCol="0" anchor="ctr"/>
           <a:lstStyle/>
           <a:p>
-            <a:pPr algn="r" indent="0" marL="0">
-              <a:buNone/>
-            </a:pPr>
-            <a:r>
-              <a:rPr lang="en-US" sz="750" dirty="0">
+            <a:pPr marL="0" indent="0" algn="r">
+              <a:buNone/>
+            </a:pPr>
+            <a:r>
+              <a:rPr lang="en-US" sz="750">
                 <a:solidFill>
                   <a:srgbClr val="64748B"/>
                 </a:solidFill>
-                <a:latin typeface="Malgun Gothic" pitchFamily="34" charset="0"/>
-                <a:ea typeface="Malgun Gothic" pitchFamily="34" charset="-122"/>
-                <a:cs typeface="Malgun Gothic" pitchFamily="34" charset="-120"/>
+                <a:latin typeface="Malgun Gothic"/>
+                <a:ea typeface="Malgun Gothic"/>
+                <a:cs typeface="Malgun Gothic"/>
               </a:rPr>
               <a:t>COPYRIGHT © 2026 3M ALL RIGHTS RESERVED</a:t>
             </a:r>
-            <a:endParaRPr lang="en-US" sz="750" dirty="0"/>
+            <a:endParaRPr lang="en-US" sz="750"/>
           </a:p>
         </p:txBody>
       </p:sp>
       <p:pic>
         <p:nvPicPr>
-          <p:cNvPr id="11" name="Image 0" descr="preencoded.png">    </p:cNvPr>
+          <p:cNvPr id="11" name="Image 0" descr="preencoded.png"/>
           <p:cNvPicPr>
             <a:picLocks noChangeAspect="1"/>
           </p:cNvPicPr>
           <p:nvPr/>
         </p:nvPicPr>
-        <p:blipFill>
-          <a:blip r:embed="rId1"/>
+        <p:blipFill rotWithShape="1">
+          <a:blip r:embed="rId2"/>
           <a:stretch>
             <a:fillRect/>
           </a:stretch>
@@ -12021,21 +10638,21 @@
           <a:bodyPr wrap="square" lIns="0" tIns="0" rIns="0" bIns="0" rtlCol="0" anchor="ctr"/>
           <a:lstStyle/>
           <a:p>
-            <a:pPr indent="0" marL="0">
-              <a:buNone/>
-            </a:pPr>
-            <a:r>
-              <a:rPr lang="en-US" sz="1250" b="1" dirty="0">
+            <a:pPr marL="0" indent="0">
+              <a:buNone/>
+            </a:pPr>
+            <a:r>
+              <a:rPr lang="en-US" sz="1250" b="1">
                 <a:solidFill>
                   <a:srgbClr val="2563EB"/>
                 </a:solidFill>
-                <a:latin typeface="Malgun Gothic" pitchFamily="34" charset="0"/>
-                <a:ea typeface="Malgun Gothic" pitchFamily="34" charset="-122"/>
-                <a:cs typeface="Malgun Gothic" pitchFamily="34" charset="-120"/>
+                <a:latin typeface="Malgun Gothic"/>
+                <a:ea typeface="Malgun Gothic"/>
+                <a:cs typeface="Malgun Gothic"/>
               </a:rPr>
               <a:t>🔍 클럽별 이력 관리 핵심</a:t>
             </a:r>
-            <a:endParaRPr lang="en-US" sz="1250" dirty="0"/>
+            <a:endParaRPr lang="en-US" sz="1250"/>
           </a:p>
         </p:txBody>
       </p:sp>
@@ -12060,21 +10677,21 @@
           <a:bodyPr wrap="square" lIns="0" tIns="0" rIns="0" bIns="0" rtlCol="0" anchor="ctr"/>
           <a:lstStyle/>
           <a:p>
-            <a:pPr indent="0" marL="0">
-              <a:buNone/>
-            </a:pPr>
-            <a:r>
-              <a:rPr lang="en-US" sz="980" b="1" dirty="0">
+            <a:pPr marL="0" indent="0">
+              <a:buNone/>
+            </a:pPr>
+            <a:r>
+              <a:rPr lang="en-US" sz="980" b="1">
                 <a:solidFill>
                   <a:srgbClr val="0F172A"/>
                 </a:solidFill>
-                <a:latin typeface="Malgun Gothic" pitchFamily="34" charset="0"/>
-                <a:ea typeface="Malgun Gothic" pitchFamily="34" charset="-122"/>
-                <a:cs typeface="Malgun Gothic" pitchFamily="34" charset="-120"/>
+                <a:latin typeface="Malgun Gothic"/>
+                <a:ea typeface="Malgun Gothic"/>
+                <a:cs typeface="Malgun Gothic"/>
               </a:rPr>
               <a:t>① 10개 클럽 집행 내역 통합 조회</a:t>
             </a:r>
-            <a:endParaRPr lang="en-US" sz="980" dirty="0"/>
+            <a:endParaRPr lang="en-US" sz="980"/>
           </a:p>
         </p:txBody>
       </p:sp>
@@ -12099,24 +10716,24 @@
           <a:bodyPr wrap="square" lIns="0" tIns="0" rIns="0" bIns="0" rtlCol="0" anchor="ctr"/>
           <a:lstStyle/>
           <a:p>
-            <a:pPr indent="0" marL="0">
+            <a:pPr marL="0" indent="0">
               <a:lnSpc>
                 <a:spcPts val="1300"/>
               </a:lnSpc>
               <a:buNone/>
             </a:pPr>
             <a:r>
-              <a:rPr lang="en-US" sz="840" dirty="0">
+              <a:rPr lang="en-US" sz="840">
                 <a:solidFill>
                   <a:srgbClr val="475569"/>
                 </a:solidFill>
-                <a:latin typeface="Malgun Gothic" pitchFamily="34" charset="0"/>
-                <a:ea typeface="Malgun Gothic" pitchFamily="34" charset="-122"/>
-                <a:cs typeface="Malgun Gothic" pitchFamily="34" charset="-120"/>
+                <a:latin typeface="Malgun Gothic"/>
+                <a:ea typeface="Malgun Gothic"/>
+                <a:cs typeface="Malgun Gothic"/>
               </a:rPr>
               <a:t>전체 클럽을 자유롭게 선택하여 예산 소진 현황과 행사 집행 내역을 즉시 조회합니다.</a:t>
             </a:r>
-            <a:endParaRPr lang="en-US" sz="840" dirty="0"/>
+            <a:endParaRPr lang="en-US" sz="840"/>
           </a:p>
         </p:txBody>
       </p:sp>
@@ -12141,21 +10758,21 @@
           <a:bodyPr wrap="square" lIns="0" tIns="0" rIns="0" bIns="0" rtlCol="0" anchor="ctr"/>
           <a:lstStyle/>
           <a:p>
-            <a:pPr indent="0" marL="0">
-              <a:buNone/>
-            </a:pPr>
-            <a:r>
-              <a:rPr lang="en-US" sz="980" b="1" dirty="0">
+            <a:pPr marL="0" indent="0">
+              <a:buNone/>
+            </a:pPr>
+            <a:r>
+              <a:rPr lang="en-US" sz="980" b="1">
                 <a:solidFill>
                   <a:srgbClr val="0F172A"/>
                 </a:solidFill>
-                <a:latin typeface="Malgun Gothic" pitchFamily="34" charset="0"/>
-                <a:ea typeface="Malgun Gothic" pitchFamily="34" charset="-122"/>
-                <a:cs typeface="Malgun Gothic" pitchFamily="34" charset="-120"/>
+                <a:latin typeface="Malgun Gothic"/>
+                <a:ea typeface="Malgun Gothic"/>
+                <a:cs typeface="Malgun Gothic"/>
               </a:rPr>
               <a:t>② 정산인(작성자) 스마트 필터링</a:t>
             </a:r>
-            <a:endParaRPr lang="en-US" sz="980" dirty="0"/>
+            <a:endParaRPr lang="en-US" sz="980"/>
           </a:p>
         </p:txBody>
       </p:sp>
@@ -12180,24 +10797,24 @@
           <a:bodyPr wrap="square" lIns="0" tIns="0" rIns="0" bIns="0" rtlCol="0" anchor="ctr"/>
           <a:lstStyle/>
           <a:p>
-            <a:pPr indent="0" marL="0">
+            <a:pPr marL="0" indent="0">
               <a:lnSpc>
                 <a:spcPts val="1300"/>
               </a:lnSpc>
               <a:buNone/>
             </a:pPr>
             <a:r>
-              <a:rPr lang="en-US" sz="840" dirty="0">
+              <a:rPr lang="en-US" sz="840">
                 <a:solidFill>
                   <a:srgbClr val="475569"/>
                 </a:solidFill>
-                <a:latin typeface="Malgun Gothic" pitchFamily="34" charset="0"/>
-                <a:ea typeface="Malgun Gothic" pitchFamily="34" charset="-122"/>
-                <a:cs typeface="Malgun Gothic" pitchFamily="34" charset="-120"/>
+                <a:latin typeface="Malgun Gothic"/>
+                <a:ea typeface="Malgun Gothic"/>
+                <a:cs typeface="Malgun Gothic"/>
               </a:rPr>
               <a:t>정산인이 2명 이상인 클럽은 자동 드롭다운이 노출되어 담당자별로 교차 검토합니다.</a:t>
             </a:r>
-            <a:endParaRPr lang="en-US" sz="840" dirty="0"/>
+            <a:endParaRPr lang="en-US" sz="840"/>
           </a:p>
         </p:txBody>
       </p:sp>
@@ -12222,21 +10839,21 @@
           <a:bodyPr wrap="square" lIns="0" tIns="0" rIns="0" bIns="0" rtlCol="0" anchor="ctr"/>
           <a:lstStyle/>
           <a:p>
-            <a:pPr indent="0" marL="0">
-              <a:buNone/>
-            </a:pPr>
-            <a:r>
-              <a:rPr lang="en-US" sz="980" b="1" dirty="0">
+            <a:pPr marL="0" indent="0">
+              <a:buNone/>
+            </a:pPr>
+            <a:r>
+              <a:rPr lang="en-US" sz="980" b="1">
                 <a:solidFill>
                   <a:srgbClr val="0F172A"/>
                 </a:solidFill>
-                <a:latin typeface="Malgun Gothic" pitchFamily="34" charset="0"/>
-                <a:ea typeface="Malgun Gothic" pitchFamily="34" charset="-122"/>
-                <a:cs typeface="Malgun Gothic" pitchFamily="34" charset="-120"/>
+                <a:latin typeface="Malgun Gothic"/>
+                <a:ea typeface="Malgun Gothic"/>
+                <a:cs typeface="Malgun Gothic"/>
               </a:rPr>
               <a:t>③ 행사 일자 수정 및 명단 재확인</a:t>
             </a:r>
-            <a:endParaRPr lang="en-US" sz="980" dirty="0"/>
+            <a:endParaRPr lang="en-US" sz="980"/>
           </a:p>
         </p:txBody>
       </p:sp>
@@ -12261,24 +10878,24 @@
           <a:bodyPr wrap="square" lIns="0" tIns="0" rIns="0" bIns="0" rtlCol="0" anchor="ctr"/>
           <a:lstStyle/>
           <a:p>
-            <a:pPr indent="0" marL="0">
+            <a:pPr marL="0" indent="0">
               <a:lnSpc>
                 <a:spcPts val="1300"/>
               </a:lnSpc>
               <a:buNone/>
             </a:pPr>
             <a:r>
-              <a:rPr lang="en-US" sz="840" dirty="0">
+              <a:rPr lang="en-US" sz="840">
                 <a:solidFill>
                   <a:srgbClr val="475569"/>
                 </a:solidFill>
-                <a:latin typeface="Malgun Gothic" pitchFamily="34" charset="0"/>
-                <a:ea typeface="Malgun Gothic" pitchFamily="34" charset="-122"/>
-                <a:cs typeface="Malgun Gothic" pitchFamily="34" charset="-120"/>
+                <a:latin typeface="Malgun Gothic"/>
+                <a:ea typeface="Malgun Gothic"/>
+                <a:cs typeface="Malgun Gothic"/>
               </a:rPr>
               <a:t>날짜 클릭으로 일정을 수정하고, 인원 배지(4명) 클릭 시 당시 참석 명단을 확인합니다.</a:t>
             </a:r>
-            <a:endParaRPr lang="en-US" sz="840" dirty="0"/>
+            <a:endParaRPr lang="en-US" sz="840"/>
           </a:p>
         </p:txBody>
       </p:sp>
@@ -12303,21 +10920,21 @@
           <a:bodyPr wrap="square" lIns="0" tIns="0" rIns="0" bIns="0" rtlCol="0" anchor="ctr"/>
           <a:lstStyle/>
           <a:p>
-            <a:pPr indent="0" marL="0">
-              <a:buNone/>
-            </a:pPr>
-            <a:r>
-              <a:rPr lang="en-US" sz="980" b="1" dirty="0">
+            <a:pPr marL="0" indent="0">
+              <a:buNone/>
+            </a:pPr>
+            <a:r>
+              <a:rPr lang="en-US" sz="980" b="1">
                 <a:solidFill>
                   <a:srgbClr val="0F172A"/>
                 </a:solidFill>
-                <a:latin typeface="Malgun Gothic" pitchFamily="34" charset="0"/>
-                <a:ea typeface="Malgun Gothic" pitchFamily="34" charset="-122"/>
-                <a:cs typeface="Malgun Gothic" pitchFamily="34" charset="-120"/>
+                <a:latin typeface="Malgun Gothic"/>
+                <a:ea typeface="Malgun Gothic"/>
+                <a:cs typeface="Malgun Gothic"/>
               </a:rPr>
               <a:t>④ 무결성 보장 삭제 (관리자 전용)</a:t>
             </a:r>
-            <a:endParaRPr lang="en-US" sz="980" dirty="0"/>
+            <a:endParaRPr lang="en-US" sz="980"/>
           </a:p>
         </p:txBody>
       </p:sp>
@@ -12342,24 +10959,24 @@
           <a:bodyPr wrap="square" lIns="0" tIns="0" rIns="0" bIns="0" rtlCol="0" anchor="ctr"/>
           <a:lstStyle/>
           <a:p>
-            <a:pPr indent="0" marL="0">
+            <a:pPr marL="0" indent="0">
               <a:lnSpc>
                 <a:spcPts val="1300"/>
               </a:lnSpc>
               <a:buNone/>
             </a:pPr>
             <a:r>
-              <a:rPr lang="en-US" sz="840" dirty="0">
+              <a:rPr lang="en-US" sz="840">
                 <a:solidFill>
                   <a:srgbClr val="475569"/>
                 </a:solidFill>
-                <a:latin typeface="Malgun Gothic" pitchFamily="34" charset="0"/>
-                <a:ea typeface="Malgun Gothic" pitchFamily="34" charset="-122"/>
-                <a:cs typeface="Malgun Gothic" pitchFamily="34" charset="-120"/>
+                <a:latin typeface="Malgun Gothic"/>
+                <a:ea typeface="Malgun Gothic"/>
+                <a:cs typeface="Malgun Gothic"/>
               </a:rPr>
               <a:t>오등록 삭제 시 globalHistory + 개인 이력 + 누적 카운트가 완벽히 동시 롤백됩니다.</a:t>
             </a:r>
-            <a:endParaRPr lang="en-US" sz="840" dirty="0"/>
+            <a:endParaRPr lang="en-US" sz="840"/>
           </a:p>
         </p:txBody>
       </p:sp>
@@ -12411,24 +11028,24 @@
           <a:bodyPr wrap="square" lIns="0" tIns="0" rIns="0" bIns="0" rtlCol="0" anchor="ctr"/>
           <a:lstStyle/>
           <a:p>
-            <a:pPr indent="0" marL="0">
+            <a:pPr marL="0" indent="0">
               <a:lnSpc>
                 <a:spcPts val="1200"/>
               </a:lnSpc>
               <a:buNone/>
             </a:pPr>
             <a:r>
-              <a:rPr lang="en-US" sz="800" dirty="0">
+              <a:rPr lang="en-US" sz="800">
                 <a:solidFill>
                   <a:srgbClr val="1D4ED8"/>
                 </a:solidFill>
-                <a:latin typeface="Malgun Gothic" pitchFamily="34" charset="0"/>
-                <a:ea typeface="Malgun Gothic" pitchFamily="34" charset="-122"/>
-                <a:cs typeface="Malgun Gothic" pitchFamily="34" charset="-120"/>
+                <a:latin typeface="Malgun Gothic"/>
+                <a:ea typeface="Malgun Gothic"/>
+                <a:cs typeface="Malgun Gothic"/>
               </a:rPr>
               <a:t>✓ 모든 이력 데이터는 Firebase 공유 DB에 실시간 동기화되어 데이터 분실 위험이 전혀 없습니다.</a:t>
             </a:r>
-            <a:endParaRPr lang="en-US" sz="800" dirty="0"/>
+            <a:endParaRPr lang="en-US" sz="800"/>
           </a:p>
         </p:txBody>
       </p:sp>
@@ -12441,14 +11058,14 @@
 </file>
 
 <file path=ppt/theme/theme1.xml><?xml version="1.0" encoding="utf-8"?>
-<a:theme xmlns:a="http://schemas.openxmlformats.org/drawingml/2006/main" name="Office Theme">
+<a:theme xmlns:a="http://schemas.openxmlformats.org/drawingml/2006/main" xmlns:r="http://schemas.openxmlformats.org/officeDocument/2006/relationships" name="Office Theme">
   <a:themeElements>
     <a:clrScheme name="Office">
       <a:dk1>
-        <a:sysClr val="windowText" lastClr="000000"/>
+        <a:srgbClr val="000000"/>
       </a:dk1>
       <a:lt1>
-        <a:sysClr val="window" lastClr="FFFFFF"/>
+        <a:srgbClr val="FFFFFF"/>
       </a:lt1>
       <a:dk2>
         <a:srgbClr val="44546A"/>
@@ -12483,7 +11100,7 @@
     </a:clrScheme>
     <a:fontScheme name="Office">
       <a:majorFont>
-        <a:latin typeface="Calibri Light" panose="020F0302020204030204"/>
+        <a:latin typeface="Calibri Light"/>
         <a:ea typeface=""/>
         <a:cs typeface=""/>
         <a:font script="Jpan" typeface="游ゴシック Light"/>
@@ -12535,7 +11152,7 @@
         <a:font script="Tfng" typeface="Ebrima"/>
       </a:majorFont>
       <a:minorFont>
-        <a:latin typeface="Calibri" panose="020F0502020204030204"/>
+        <a:latin typeface="Calibri"/>
         <a:ea typeface=""/>
         <a:cs typeface=""/>
         <a:font script="Jpan" typeface="游ゴシック"/>
@@ -12646,26 +11263,26 @@
         </a:gradFill>
       </a:fillStyleLst>
       <a:lnStyleLst>
-        <a:ln w="6350" cap="flat" cmpd="sng" algn="ctr">
+        <a:ln w="6350" cap="flat" cmpd="sng">
           <a:solidFill>
             <a:schemeClr val="phClr"/>
           </a:solidFill>
           <a:prstDash val="solid"/>
-          <a:miter lim="800000"/>
+          <a:miter/>
         </a:ln>
-        <a:ln w="12700" cap="flat" cmpd="sng" algn="ctr">
+        <a:ln w="12700" cap="flat" cmpd="sng">
           <a:solidFill>
             <a:schemeClr val="phClr"/>
           </a:solidFill>
           <a:prstDash val="solid"/>
-          <a:miter lim="800000"/>
+          <a:miter/>
         </a:ln>
-        <a:ln w="19050" cap="flat" cmpd="sng" algn="ctr">
+        <a:ln w="19050" cap="flat" cmpd="sng">
           <a:solidFill>
             <a:schemeClr val="phClr"/>
           </a:solidFill>
           <a:prstDash val="solid"/>
-          <a:miter lim="800000"/>
+          <a:miter/>
         </a:ln>
       </a:lnStyleLst>
       <a:effectStyleLst>
@@ -12725,12 +11342,7 @@
       </a:bgFillStyleLst>
     </a:fmtScheme>
   </a:themeElements>
-  <a:objectDefaults/>
-  <a:extraClrSchemeLst/>
-  <a:extLst>
-    <a:ext uri="{05A4C25C-085E-4340-85A3-A5531E510DB2}">
-      <thm15:themeFamily xmlns:thm15="http://schemas.microsoft.com/office/thememl/2012/main" name="Office Theme" id="{62F939B6-93AF-4DB8-9C6B-D6C7DFDC589F}" vid="{4A3C46E8-61CC-4603-A589-7422A47A8E4A}"/>
-    </a:ext>
-  </a:extLst>
+  <a:objectDefaults xmlns:a="http://schemas.openxmlformats.org/drawingml/2006/main"/>
+  <a:extraClrSchemeLst xmlns:a="http://schemas.openxmlformats.org/drawingml/2006/main"/>
 </a:theme>
 </file>